--- a/public/SurgiFind-Pitch-Deck.pptx
+++ b/public/SurgiFind-Pitch-Deck.pptx
@@ -13,9 +13,6 @@
     <p:sldId id="261" r:id="rId12"/>
     <p:sldId id="262" r:id="rId13"/>
     <p:sldId id="263" r:id="rId14"/>
-    <p:sldId id="264" r:id="rId15"/>
-    <p:sldId id="265" r:id="rId16"/>
-    <p:sldId id="266" r:id="rId17"/>
   </p:sldIdLst>
   <p:sldSz cx="12191695" cy="6858000" type="screen4x3"/>
   <p:notesSz cx="6858000" cy="9144000"/>
@@ -3094,7 +3091,7 @@
     <p:bg>
       <p:bgPr>
         <a:solidFill>
-          <a:srgbClr val="FFFFFF"/>
+          <a:srgbClr val="0A1626"/>
         </a:solidFill>
         <a:effectLst/>
       </p:bgPr>
@@ -3114,19 +3111,17 @@
         </p:nvSpPr>
         <p:spPr>
           <a:xfrm>
-            <a:off x="411480" y="320040"/>
-            <a:ext cx="11338560" cy="822960"/>
+            <a:off x="0" y="0"/>
+            <a:ext cx="12188952" cy="6858000"/>
           </a:xfrm>
           <a:prstGeom prst="roundRect">
             <a:avLst/>
           </a:prstGeom>
           <a:solidFill>
-            <a:srgbClr val="F0FDFA"/>
+            <a:srgbClr val="0A1626"/>
           </a:solidFill>
           <a:ln>
-            <a:solidFill>
-              <a:srgbClr val="CCFBF1"/>
-            </a:solidFill>
+            <a:noFill/>
           </a:ln>
         </p:spPr>
         <p:style>
@@ -3153,58 +3148,23 @@
       </p:sp>
       <p:sp>
         <p:nvSpPr>
-          <p:cNvPr id="3" name="TextBox 2"/>
-          <p:cNvSpPr txBox="1"/>
-          <p:nvPr/>
-        </p:nvSpPr>
-        <p:spPr>
-          <a:xfrm>
-            <a:off x="685800" y="475488"/>
-            <a:ext cx="7772400" cy="411480"/>
-          </a:xfrm>
-          <a:prstGeom prst="rect">
-            <a:avLst/>
-          </a:prstGeom>
-          <a:noFill/>
-        </p:spPr>
-        <p:txBody>
-          <a:bodyPr wrap="none">
-            <a:spAutoFit/>
-          </a:bodyPr>
-          <a:lstStyle/>
-          <a:p>
-            <a:r>
-              <a:rPr sz="2800" b="1">
-                <a:solidFill>
-                  <a:srgbClr val="0F172A"/>
-                </a:solidFill>
-              </a:rPr>
-              <a:t>SurgiFind</a:t>
-            </a:r>
-          </a:p>
-        </p:txBody>
-      </p:sp>
-      <p:sp>
-        <p:nvSpPr>
-          <p:cNvPr id="4" name="Rounded Rectangle 3"/>
+          <p:cNvPr id="3" name="Oval 2"/>
           <p:cNvSpPr/>
           <p:nvPr/>
         </p:nvSpPr>
         <p:spPr>
           <a:xfrm>
-            <a:off x="10058400" y="475488"/>
-            <a:ext cx="1097280" cy="310896"/>
-          </a:xfrm>
-          <a:prstGeom prst="roundRect">
+            <a:off x="7955279" y="-548640"/>
+            <a:ext cx="5120640" cy="3657600"/>
+          </a:xfrm>
+          <a:prstGeom prst="ellipse">
             <a:avLst/>
           </a:prstGeom>
           <a:solidFill>
-            <a:srgbClr val="0D9488"/>
+            <a:srgbClr val="115E59"/>
           </a:solidFill>
           <a:ln>
-            <a:solidFill>
-              <a:srgbClr val="0D9488"/>
-            </a:solidFill>
+            <a:noFill/>
           </a:ln>
         </p:spPr>
         <p:style>
@@ -3231,48 +3191,242 @@
       </p:sp>
       <p:sp>
         <p:nvSpPr>
-          <p:cNvPr id="5" name="TextBox 4"/>
-          <p:cNvSpPr txBox="1"/>
-          <p:nvPr/>
-        </p:nvSpPr>
-        <p:spPr>
-          <a:xfrm>
-            <a:off x="10058400" y="512064"/>
-            <a:ext cx="1097280" cy="228600"/>
-          </a:xfrm>
-          <a:prstGeom prst="rect">
-            <a:avLst/>
-          </a:prstGeom>
-          <a:noFill/>
-        </p:spPr>
-        <p:txBody>
-          <a:bodyPr wrap="none">
-            <a:spAutoFit/>
-          </a:bodyPr>
-          <a:lstStyle/>
-          <a:p>
-            <a:pPr algn="ctr"/>
-            <a:r>
-              <a:rPr sz="1200" b="1">
+          <p:cNvPr id="4" name="Oval 3"/>
+          <p:cNvSpPr/>
+          <p:nvPr/>
+        </p:nvSpPr>
+        <p:spPr>
+          <a:xfrm>
+            <a:off x="9235440" y="4297680"/>
+            <a:ext cx="3017520" cy="2286000"/>
+          </a:xfrm>
+          <a:prstGeom prst="ellipse">
+            <a:avLst/>
+          </a:prstGeom>
+          <a:solidFill>
+            <a:srgbClr val="082F49"/>
+          </a:solidFill>
+          <a:ln>
+            <a:noFill/>
+          </a:ln>
+        </p:spPr>
+        <p:style>
+          <a:lnRef idx="1">
+            <a:schemeClr val="accent1"/>
+          </a:lnRef>
+          <a:fillRef idx="3">
+            <a:schemeClr val="accent1"/>
+          </a:fillRef>
+          <a:effectRef idx="2">
+            <a:schemeClr val="accent1"/>
+          </a:effectRef>
+          <a:fontRef idx="minor">
+            <a:schemeClr val="lt1"/>
+          </a:fontRef>
+        </p:style>
+        <p:txBody>
+          <a:bodyPr rtlCol="0" anchor="ctr"/>
+          <a:lstStyle/>
+          <a:p>
+            <a:pPr algn="ctr"/>
+          </a:p>
+        </p:txBody>
+      </p:sp>
+      <p:sp>
+        <p:nvSpPr>
+          <p:cNvPr id="5" name="Rounded Rectangle 4"/>
+          <p:cNvSpPr/>
+          <p:nvPr/>
+        </p:nvSpPr>
+        <p:spPr>
+          <a:xfrm>
+            <a:off x="502920" y="384048"/>
+            <a:ext cx="1874519" cy="457200"/>
+          </a:xfrm>
+          <a:prstGeom prst="roundRect">
+            <a:avLst/>
+          </a:prstGeom>
+          <a:solidFill>
+            <a:srgbClr val="122D42"/>
+          </a:solidFill>
+          <a:ln>
+            <a:solidFill>
+              <a:srgbClr val="2DD4BF"/>
+            </a:solidFill>
+          </a:ln>
+        </p:spPr>
+        <p:style>
+          <a:lnRef idx="1">
+            <a:schemeClr val="accent1"/>
+          </a:lnRef>
+          <a:fillRef idx="3">
+            <a:schemeClr val="accent1"/>
+          </a:fillRef>
+          <a:effectRef idx="2">
+            <a:schemeClr val="accent1"/>
+          </a:effectRef>
+          <a:fontRef idx="minor">
+            <a:schemeClr val="lt1"/>
+          </a:fontRef>
+        </p:style>
+        <p:txBody>
+          <a:bodyPr rtlCol="0" anchor="ctr"/>
+          <a:lstStyle/>
+          <a:p>
+            <a:pPr algn="ctr"/>
+          </a:p>
+        </p:txBody>
+      </p:sp>
+      <p:sp>
+        <p:nvSpPr>
+          <p:cNvPr id="6" name="TextBox 5"/>
+          <p:cNvSpPr txBox="1"/>
+          <p:nvPr/>
+        </p:nvSpPr>
+        <p:spPr>
+          <a:xfrm>
+            <a:off x="658368" y="493776"/>
+            <a:ext cx="1554480" cy="182880"/>
+          </a:xfrm>
+          <a:prstGeom prst="rect">
+            <a:avLst/>
+          </a:prstGeom>
+          <a:noFill/>
+        </p:spPr>
+        <p:txBody>
+          <a:bodyPr wrap="square">
+            <a:normAutofit/>
+          </a:bodyPr>
+          <a:lstStyle/>
+          <a:p>
+            <a:pPr algn="l"/>
+            <a:r>
+              <a:rPr sz="1100" b="1" i="0">
+                <a:solidFill>
+                  <a:srgbClr val="99F6E4"/>
+                </a:solidFill>
+                <a:latin typeface="Aptos"/>
+              </a:rPr>
+              <a:t>HACKATHON PITCH</a:t>
+            </a:r>
+          </a:p>
+        </p:txBody>
+      </p:sp>
+      <p:sp>
+        <p:nvSpPr>
+          <p:cNvPr id="7" name="TextBox 6"/>
+          <p:cNvSpPr txBox="1"/>
+          <p:nvPr/>
+        </p:nvSpPr>
+        <p:spPr>
+          <a:xfrm>
+            <a:off x="640080" y="1143000"/>
+            <a:ext cx="5760720" cy="731520"/>
+          </a:xfrm>
+          <a:prstGeom prst="rect">
+            <a:avLst/>
+          </a:prstGeom>
+          <a:noFill/>
+        </p:spPr>
+        <p:txBody>
+          <a:bodyPr wrap="square">
+            <a:normAutofit/>
+          </a:bodyPr>
+          <a:lstStyle/>
+          <a:p>
+            <a:pPr algn="l"/>
+            <a:r>
+              <a:rPr sz="2800" b="1" i="0">
                 <a:solidFill>
                   <a:srgbClr val="FFFFFF"/>
                 </a:solidFill>
-              </a:rPr>
-              <a:t>01</a:t>
-            </a:r>
-          </a:p>
-        </p:txBody>
-      </p:sp>
-      <p:sp>
-        <p:nvSpPr>
-          <p:cNvPr id="6" name="Rounded Rectangle 5"/>
+                <a:latin typeface="Aptos"/>
+              </a:rPr>
+              <a:t>SurgiFind</a:t>
+            </a:r>
+          </a:p>
+        </p:txBody>
+      </p:sp>
+      <p:sp>
+        <p:nvSpPr>
+          <p:cNvPr id="8" name="TextBox 7"/>
+          <p:cNvSpPr txBox="1"/>
+          <p:nvPr/>
+        </p:nvSpPr>
+        <p:spPr>
+          <a:xfrm>
+            <a:off x="640080" y="1828800"/>
+            <a:ext cx="6858000" cy="1371600"/>
+          </a:xfrm>
+          <a:prstGeom prst="rect">
+            <a:avLst/>
+          </a:prstGeom>
+          <a:noFill/>
+        </p:spPr>
+        <p:txBody>
+          <a:bodyPr wrap="square">
+            <a:normAutofit/>
+          </a:bodyPr>
+          <a:lstStyle/>
+          <a:p>
+            <a:pPr algn="l"/>
+            <a:r>
+              <a:rPr sz="2800" b="1" i="0">
+                <a:solidFill>
+                  <a:srgbClr val="FFFFFF"/>
+                </a:solidFill>
+                <a:latin typeface="Aptos"/>
+              </a:rPr>
+              <a:t>From surgical uncertainty to hospital booking in one guided flow.</a:t>
+            </a:r>
+          </a:p>
+        </p:txBody>
+      </p:sp>
+      <p:sp>
+        <p:nvSpPr>
+          <p:cNvPr id="9" name="TextBox 8"/>
+          <p:cNvSpPr txBox="1"/>
+          <p:nvPr/>
+        </p:nvSpPr>
+        <p:spPr>
+          <a:xfrm>
+            <a:off x="658368" y="3154680"/>
+            <a:ext cx="5029200" cy="914400"/>
+          </a:xfrm>
+          <a:prstGeom prst="rect">
+            <a:avLst/>
+          </a:prstGeom>
+          <a:noFill/>
+        </p:spPr>
+        <p:txBody>
+          <a:bodyPr wrap="square">
+            <a:normAutofit/>
+          </a:bodyPr>
+          <a:lstStyle/>
+          <a:p>
+            <a:pPr algn="l"/>
+            <a:r>
+              <a:rPr sz="1700" b="0" i="0">
+                <a:solidFill>
+                  <a:srgbClr val="CBD5E1"/>
+                </a:solidFill>
+                <a:latin typeface="Aptos"/>
+              </a:rPr>
+              <a:t>Search. Compare price. Check insurance. Book with confidence.</a:t>
+            </a:r>
+          </a:p>
+        </p:txBody>
+      </p:sp>
+      <p:sp>
+        <p:nvSpPr>
+          <p:cNvPr id="10" name="Rounded Rectangle 9"/>
           <p:cNvSpPr/>
           <p:nvPr/>
         </p:nvSpPr>
         <p:spPr>
           <a:xfrm>
-            <a:off x="640080" y="1417320"/>
-            <a:ext cx="10972800" cy="4846320"/>
+            <a:off x="658368" y="4892040"/>
+            <a:ext cx="2011680" cy="1051560"/>
           </a:xfrm>
           <a:prstGeom prst="roundRect">
             <a:avLst/>
@@ -3282,7 +3436,7 @@
           </a:solidFill>
           <a:ln>
             <a:solidFill>
-              <a:srgbClr val="E2E8F0"/>
+              <a:srgbClr val="2DD4BF"/>
             </a:solidFill>
           </a:ln>
         </p:spPr>
@@ -3310,116 +3464,94 @@
       </p:sp>
       <p:sp>
         <p:nvSpPr>
-          <p:cNvPr id="7" name="TextBox 6"/>
-          <p:cNvSpPr txBox="1"/>
-          <p:nvPr/>
-        </p:nvSpPr>
-        <p:spPr>
-          <a:xfrm>
-            <a:off x="914400" y="1783080"/>
-            <a:ext cx="9875520" cy="731520"/>
-          </a:xfrm>
-          <a:prstGeom prst="rect">
-            <a:avLst/>
-          </a:prstGeom>
-          <a:noFill/>
-        </p:spPr>
-        <p:txBody>
-          <a:bodyPr wrap="none">
-            <a:spAutoFit/>
-          </a:bodyPr>
-          <a:lstStyle/>
-          <a:p>
-            <a:r>
-              <a:rPr sz="2000" b="1">
+          <p:cNvPr id="11" name="TextBox 10"/>
+          <p:cNvSpPr txBox="1"/>
+          <p:nvPr/>
+        </p:nvSpPr>
+        <p:spPr>
+          <a:xfrm>
+            <a:off x="795528" y="5102352"/>
+            <a:ext cx="1645920" cy="237744"/>
+          </a:xfrm>
+          <a:prstGeom prst="rect">
+            <a:avLst/>
+          </a:prstGeom>
+          <a:noFill/>
+        </p:spPr>
+        <p:txBody>
+          <a:bodyPr wrap="square">
+            <a:normAutofit/>
+          </a:bodyPr>
+          <a:lstStyle/>
+          <a:p>
+            <a:pPr algn="l"/>
+            <a:r>
+              <a:rPr sz="1500" b="1" i="0">
                 <a:solidFill>
                   <a:srgbClr val="0F172A"/>
                 </a:solidFill>
-              </a:rPr>
-              <a:t>Find the right hospital for surgery with clarity on price, insurance, and booking.</a:t>
-            </a:r>
-          </a:p>
-        </p:txBody>
-      </p:sp>
-      <p:sp>
-        <p:nvSpPr>
-          <p:cNvPr id="8" name="TextBox 7"/>
-          <p:cNvSpPr txBox="1"/>
-          <p:nvPr/>
-        </p:nvSpPr>
-        <p:spPr>
-          <a:xfrm>
-            <a:off x="914400" y="2514600"/>
-            <a:ext cx="9875520" cy="640080"/>
-          </a:xfrm>
-          <a:prstGeom prst="rect">
-            <a:avLst/>
-          </a:prstGeom>
-          <a:noFill/>
-        </p:spPr>
-        <p:txBody>
-          <a:bodyPr wrap="none">
-            <a:spAutoFit/>
-          </a:bodyPr>
-          <a:lstStyle/>
-          <a:p>
-            <a:r>
-              <a:rPr sz="1800">
+                <a:latin typeface="Aptos"/>
+              </a:rPr>
+              <a:t>Search</a:t>
+            </a:r>
+          </a:p>
+        </p:txBody>
+      </p:sp>
+      <p:sp>
+        <p:nvSpPr>
+          <p:cNvPr id="12" name="TextBox 11"/>
+          <p:cNvSpPr txBox="1"/>
+          <p:nvPr/>
+        </p:nvSpPr>
+        <p:spPr>
+          <a:xfrm>
+            <a:off x="795528" y="5422392"/>
+            <a:ext cx="1691640" cy="347472"/>
+          </a:xfrm>
+          <a:prstGeom prst="rect">
+            <a:avLst/>
+          </a:prstGeom>
+          <a:noFill/>
+        </p:spPr>
+        <p:txBody>
+          <a:bodyPr wrap="square">
+            <a:normAutofit/>
+          </a:bodyPr>
+          <a:lstStyle/>
+          <a:p>
+            <a:pPr algn="l"/>
+            <a:r>
+              <a:rPr sz="1000" b="0" i="0">
                 <a:solidFill>
                   <a:srgbClr val="475569"/>
                 </a:solidFill>
-              </a:rPr>
-              <a:t>SurgiFind helps patients discover surgical care faster by combining hospital search, price comparison, insurance matching, and guided booking in one platform.</a:t>
-            </a:r>
-          </a:p>
-        </p:txBody>
-      </p:sp>
-    </p:spTree>
-  </p:cSld>
-  <p:clrMapOvr>
-    <a:masterClrMapping/>
-  </p:clrMapOvr>
-</p:sld>
-</file>
-
-<file path=ppt/slides/slide10.xml><?xml version="1.0" encoding="utf-8"?>
-<p:sld xmlns:a="http://schemas.openxmlformats.org/drawingml/2006/main" xmlns:p="http://schemas.openxmlformats.org/presentationml/2006/main" xmlns:r="http://schemas.openxmlformats.org/officeDocument/2006/relationships">
-  <p:cSld>
-    <p:bg>
-      <p:bgPr>
-        <a:solidFill>
-          <a:srgbClr val="FFFFFF"/>
-        </a:solidFill>
-        <a:effectLst/>
-      </p:bgPr>
-    </p:bg>
-    <p:spTree>
-      <p:nvGrpSpPr>
-        <p:cNvPr id="1" name=""/>
-        <p:cNvGrpSpPr/>
-        <p:nvPr/>
-      </p:nvGrpSpPr>
-      <p:grpSpPr/>
-      <p:sp>
-        <p:nvSpPr>
-          <p:cNvPr id="2" name="Rounded Rectangle 1"/>
+                <a:latin typeface="Aptos"/>
+              </a:rPr>
+              <a:t>Surgery, city, budget, rating</a:t>
+            </a:r>
+          </a:p>
+        </p:txBody>
+      </p:sp>
+      <p:sp>
+        <p:nvSpPr>
+          <p:cNvPr id="13" name="Rounded Rectangle 12"/>
           <p:cNvSpPr/>
           <p:nvPr/>
         </p:nvSpPr>
         <p:spPr>
           <a:xfrm>
-            <a:off x="411480" y="320040"/>
-            <a:ext cx="11338560" cy="822960"/>
+            <a:off x="2898648" y="4892040"/>
+            <a:ext cx="2011680" cy="1051560"/>
           </a:xfrm>
           <a:prstGeom prst="roundRect">
             <a:avLst/>
           </a:prstGeom>
           <a:solidFill>
-            <a:srgbClr val="F0FDFA"/>
+            <a:srgbClr val="FFFFFF"/>
           </a:solidFill>
           <a:ln>
             <a:solidFill>
-              <a:srgbClr val="CCFBF1"/>
+              <a:srgbClr val="2DD4BF"/>
             </a:solidFill>
           </a:ln>
         </p:spPr>
@@ -3447,57 +3579,94 @@
       </p:sp>
       <p:sp>
         <p:nvSpPr>
-          <p:cNvPr id="3" name="TextBox 2"/>
-          <p:cNvSpPr txBox="1"/>
-          <p:nvPr/>
-        </p:nvSpPr>
-        <p:spPr>
-          <a:xfrm>
-            <a:off x="685800" y="475488"/>
-            <a:ext cx="7772400" cy="411480"/>
-          </a:xfrm>
-          <a:prstGeom prst="rect">
-            <a:avLst/>
-          </a:prstGeom>
-          <a:noFill/>
-        </p:spPr>
-        <p:txBody>
-          <a:bodyPr wrap="none">
-            <a:spAutoFit/>
-          </a:bodyPr>
-          <a:lstStyle/>
-          <a:p>
-            <a:r>
-              <a:rPr sz="2800" b="1">
+          <p:cNvPr id="14" name="TextBox 13"/>
+          <p:cNvSpPr txBox="1"/>
+          <p:nvPr/>
+        </p:nvSpPr>
+        <p:spPr>
+          <a:xfrm>
+            <a:off x="3035808" y="5102352"/>
+            <a:ext cx="1645920" cy="237744"/>
+          </a:xfrm>
+          <a:prstGeom prst="rect">
+            <a:avLst/>
+          </a:prstGeom>
+          <a:noFill/>
+        </p:spPr>
+        <p:txBody>
+          <a:bodyPr wrap="square">
+            <a:normAutofit/>
+          </a:bodyPr>
+          <a:lstStyle/>
+          <a:p>
+            <a:pPr algn="l"/>
+            <a:r>
+              <a:rPr sz="1500" b="1" i="0">
                 <a:solidFill>
                   <a:srgbClr val="0F172A"/>
                 </a:solidFill>
-              </a:rPr>
-              <a:t>Closing</a:t>
-            </a:r>
-          </a:p>
-        </p:txBody>
-      </p:sp>
-      <p:sp>
-        <p:nvSpPr>
-          <p:cNvPr id="4" name="Rounded Rectangle 3"/>
+                <a:latin typeface="Aptos"/>
+              </a:rPr>
+              <a:t>Trust</a:t>
+            </a:r>
+          </a:p>
+        </p:txBody>
+      </p:sp>
+      <p:sp>
+        <p:nvSpPr>
+          <p:cNvPr id="15" name="TextBox 14"/>
+          <p:cNvSpPr txBox="1"/>
+          <p:nvPr/>
+        </p:nvSpPr>
+        <p:spPr>
+          <a:xfrm>
+            <a:off x="3035808" y="5422392"/>
+            <a:ext cx="1691640" cy="347472"/>
+          </a:xfrm>
+          <a:prstGeom prst="rect">
+            <a:avLst/>
+          </a:prstGeom>
+          <a:noFill/>
+        </p:spPr>
+        <p:txBody>
+          <a:bodyPr wrap="square">
+            <a:normAutofit/>
+          </a:bodyPr>
+          <a:lstStyle/>
+          <a:p>
+            <a:pPr algn="l"/>
+            <a:r>
+              <a:rPr sz="1000" b="0" i="0">
+                <a:solidFill>
+                  <a:srgbClr val="475569"/>
+                </a:solidFill>
+                <a:latin typeface="Aptos"/>
+              </a:rPr>
+              <a:t>Price and insurance clarity</a:t>
+            </a:r>
+          </a:p>
+        </p:txBody>
+      </p:sp>
+      <p:sp>
+        <p:nvSpPr>
+          <p:cNvPr id="16" name="Rounded Rectangle 15"/>
           <p:cNvSpPr/>
           <p:nvPr/>
         </p:nvSpPr>
         <p:spPr>
           <a:xfrm>
-            <a:off x="10058400" y="475488"/>
-            <a:ext cx="1097280" cy="310896"/>
+            <a:off x="5138928" y="4892040"/>
+            <a:ext cx="2011680" cy="1051560"/>
           </a:xfrm>
           <a:prstGeom prst="roundRect">
             <a:avLst/>
           </a:prstGeom>
           <a:solidFill>
-            <a:srgbClr val="0D9488"/>
+            <a:srgbClr val="FFFFFF"/>
           </a:solidFill>
           <a:ln>
             <a:solidFill>
-              <a:srgbClr val="0D9488"/>
+              <a:srgbClr val="2DD4BF"/>
             </a:solidFill>
           </a:ln>
         </p:spPr>
@@ -3525,58 +3694,94 @@
       </p:sp>
       <p:sp>
         <p:nvSpPr>
-          <p:cNvPr id="5" name="TextBox 4"/>
-          <p:cNvSpPr txBox="1"/>
-          <p:nvPr/>
-        </p:nvSpPr>
-        <p:spPr>
-          <a:xfrm>
-            <a:off x="10058400" y="512064"/>
-            <a:ext cx="1097280" cy="228600"/>
-          </a:xfrm>
-          <a:prstGeom prst="rect">
-            <a:avLst/>
-          </a:prstGeom>
-          <a:noFill/>
-        </p:spPr>
-        <p:txBody>
-          <a:bodyPr wrap="none">
-            <a:spAutoFit/>
-          </a:bodyPr>
-          <a:lstStyle/>
-          <a:p>
-            <a:pPr algn="ctr"/>
-            <a:r>
-              <a:rPr sz="1200" b="1">
-                <a:solidFill>
-                  <a:srgbClr val="FFFFFF"/>
-                </a:solidFill>
-              </a:rPr>
-              <a:t>10</a:t>
-            </a:r>
-          </a:p>
-        </p:txBody>
-      </p:sp>
-      <p:sp>
-        <p:nvSpPr>
-          <p:cNvPr id="6" name="Rounded Rectangle 5"/>
+          <p:cNvPr id="17" name="TextBox 16"/>
+          <p:cNvSpPr txBox="1"/>
+          <p:nvPr/>
+        </p:nvSpPr>
+        <p:spPr>
+          <a:xfrm>
+            <a:off x="5276088" y="5102352"/>
+            <a:ext cx="1645920" cy="237744"/>
+          </a:xfrm>
+          <a:prstGeom prst="rect">
+            <a:avLst/>
+          </a:prstGeom>
+          <a:noFill/>
+        </p:spPr>
+        <p:txBody>
+          <a:bodyPr wrap="square">
+            <a:normAutofit/>
+          </a:bodyPr>
+          <a:lstStyle/>
+          <a:p>
+            <a:pPr algn="l"/>
+            <a:r>
+              <a:rPr sz="1500" b="1" i="0">
+                <a:solidFill>
+                  <a:srgbClr val="0F172A"/>
+                </a:solidFill>
+                <a:latin typeface="Aptos"/>
+              </a:rPr>
+              <a:t>Action</a:t>
+            </a:r>
+          </a:p>
+        </p:txBody>
+      </p:sp>
+      <p:sp>
+        <p:nvSpPr>
+          <p:cNvPr id="18" name="TextBox 17"/>
+          <p:cNvSpPr txBox="1"/>
+          <p:nvPr/>
+        </p:nvSpPr>
+        <p:spPr>
+          <a:xfrm>
+            <a:off x="5276088" y="5422392"/>
+            <a:ext cx="1691640" cy="347472"/>
+          </a:xfrm>
+          <a:prstGeom prst="rect">
+            <a:avLst/>
+          </a:prstGeom>
+          <a:noFill/>
+        </p:spPr>
+        <p:txBody>
+          <a:bodyPr wrap="square">
+            <a:normAutofit/>
+          </a:bodyPr>
+          <a:lstStyle/>
+          <a:p>
+            <a:pPr algn="l"/>
+            <a:r>
+              <a:rPr sz="1000" b="0" i="0">
+                <a:solidFill>
+                  <a:srgbClr val="475569"/>
+                </a:solidFill>
+                <a:latin typeface="Aptos"/>
+              </a:rPr>
+              <a:t>Authenticated booking and history</a:t>
+            </a:r>
+          </a:p>
+        </p:txBody>
+      </p:sp>
+      <p:sp>
+        <p:nvSpPr>
+          <p:cNvPr id="19" name="Rounded Rectangle 18"/>
           <p:cNvSpPr/>
           <p:nvPr/>
         </p:nvSpPr>
         <p:spPr>
           <a:xfrm>
-            <a:off x="640080" y="1417320"/>
-            <a:ext cx="10972800" cy="4846320"/>
+            <a:off x="6903720" y="1234440"/>
+            <a:ext cx="4526280" cy="4526280"/>
           </a:xfrm>
           <a:prstGeom prst="roundRect">
             <a:avLst/>
           </a:prstGeom>
           <a:solidFill>
-            <a:srgbClr val="FFFFFF"/>
+            <a:srgbClr val="F8FAFC"/>
           </a:solidFill>
           <a:ln>
             <a:solidFill>
-              <a:srgbClr val="E2E8F0"/>
+              <a:srgbClr val="99F6E4"/>
             </a:solidFill>
           </a:ln>
         </p:spPr>
@@ -3604,116 +3809,129 @@
       </p:sp>
       <p:sp>
         <p:nvSpPr>
-          <p:cNvPr id="7" name="TextBox 6"/>
-          <p:cNvSpPr txBox="1"/>
-          <p:nvPr/>
-        </p:nvSpPr>
-        <p:spPr>
-          <a:xfrm>
-            <a:off x="914400" y="1783080"/>
-            <a:ext cx="9875520" cy="640080"/>
-          </a:xfrm>
-          <a:prstGeom prst="rect">
-            <a:avLst/>
-          </a:prstGeom>
-          <a:noFill/>
-        </p:spPr>
-        <p:txBody>
-          <a:bodyPr wrap="none">
-            <a:spAutoFit/>
-          </a:bodyPr>
-          <a:lstStyle/>
-          <a:p>
-            <a:r>
-              <a:rPr sz="1800">
+          <p:cNvPr id="20" name="TextBox 19"/>
+          <p:cNvSpPr txBox="1"/>
+          <p:nvPr/>
+        </p:nvSpPr>
+        <p:spPr>
+          <a:xfrm>
+            <a:off x="7315200" y="1645920"/>
+            <a:ext cx="3703320" cy="365760"/>
+          </a:xfrm>
+          <a:prstGeom prst="rect">
+            <a:avLst/>
+          </a:prstGeom>
+          <a:noFill/>
+        </p:spPr>
+        <p:txBody>
+          <a:bodyPr wrap="square">
+            <a:normAutofit/>
+          </a:bodyPr>
+          <a:lstStyle/>
+          <a:p>
+            <a:pPr algn="l"/>
+            <a:r>
+              <a:rPr sz="1400" b="1" i="0">
+                <a:solidFill>
+                  <a:srgbClr val="0D746F"/>
+                </a:solidFill>
+                <a:latin typeface="Aptos"/>
+              </a:rPr>
+              <a:t>Why this matters</a:t>
+            </a:r>
+          </a:p>
+        </p:txBody>
+      </p:sp>
+      <p:sp>
+        <p:nvSpPr>
+          <p:cNvPr id="21" name="TextBox 20"/>
+          <p:cNvSpPr txBox="1"/>
+          <p:nvPr/>
+        </p:nvSpPr>
+        <p:spPr>
+          <a:xfrm>
+            <a:off x="7315200" y="2057400"/>
+            <a:ext cx="3566160" cy="1965960"/>
+          </a:xfrm>
+          <a:prstGeom prst="rect">
+            <a:avLst/>
+          </a:prstGeom>
+          <a:noFill/>
+        </p:spPr>
+        <p:txBody>
+          <a:bodyPr wrap="square">
+            <a:normAutofit/>
+          </a:bodyPr>
+          <a:lstStyle/>
+          <a:p>
+            <a:pPr algn="l"/>
+            <a:r>
+              <a:rPr sz="2100" b="1" i="0">
+                <a:solidFill>
+                  <a:srgbClr val="0F172A"/>
+                </a:solidFill>
+                <a:latin typeface="Aptos"/>
+              </a:rPr>
+              <a:t>A patient trying to book surgery today jumps across hospital sites, price ambiguity, insurance confusion, and manual calls. SurgiFind compresses that chaos into one decision flow.</a:t>
+            </a:r>
+          </a:p>
+        </p:txBody>
+      </p:sp>
+      <p:sp>
+        <p:nvSpPr>
+          <p:cNvPr id="22" name="TextBox 21"/>
+          <p:cNvSpPr txBox="1"/>
+          <p:nvPr/>
+        </p:nvSpPr>
+        <p:spPr>
+          <a:xfrm>
+            <a:off x="7315200" y="4343400"/>
+            <a:ext cx="3383280" cy="594360"/>
+          </a:xfrm>
+          <a:prstGeom prst="rect">
+            <a:avLst/>
+          </a:prstGeom>
+          <a:noFill/>
+        </p:spPr>
+        <p:txBody>
+          <a:bodyPr wrap="square">
+            <a:normAutofit/>
+          </a:bodyPr>
+          <a:lstStyle/>
+          <a:p>
+            <a:pPr algn="l"/>
+            <a:r>
+              <a:rPr sz="1200" b="0" i="0">
                 <a:solidFill>
                   <a:srgbClr val="475569"/>
                 </a:solidFill>
-              </a:rPr>
-              <a:t>When patients need surgery, they should not have to navigate cost, trust, insurance, and booking alone.</a:t>
-            </a:r>
-          </a:p>
-        </p:txBody>
-      </p:sp>
-      <p:sp>
-        <p:nvSpPr>
-          <p:cNvPr id="8" name="TextBox 7"/>
-          <p:cNvSpPr txBox="1"/>
-          <p:nvPr/>
-        </p:nvSpPr>
-        <p:spPr>
-          <a:xfrm>
-            <a:off x="914400" y="2377440"/>
-            <a:ext cx="9875520" cy="640080"/>
-          </a:xfrm>
-          <a:prstGeom prst="rect">
-            <a:avLst/>
-          </a:prstGeom>
-          <a:noFill/>
-        </p:spPr>
-        <p:txBody>
-          <a:bodyPr wrap="none">
-            <a:spAutoFit/>
-          </a:bodyPr>
-          <a:lstStyle/>
-          <a:p>
-            <a:r>
-              <a:rPr sz="1800">
-                <a:solidFill>
-                  <a:srgbClr val="475569"/>
-                </a:solidFill>
-              </a:rPr>
-              <a:t>SurgiFind gives them one place to decide and act.</a:t>
-            </a:r>
-          </a:p>
-        </p:txBody>
-      </p:sp>
-    </p:spTree>
-  </p:cSld>
-  <p:clrMapOvr>
-    <a:masterClrMapping/>
-  </p:clrMapOvr>
-</p:sld>
-</file>
-
-<file path=ppt/slides/slide11.xml><?xml version="1.0" encoding="utf-8"?>
-<p:sld xmlns:a="http://schemas.openxmlformats.org/drawingml/2006/main" xmlns:p="http://schemas.openxmlformats.org/presentationml/2006/main" xmlns:r="http://schemas.openxmlformats.org/officeDocument/2006/relationships">
-  <p:cSld>
-    <p:bg>
-      <p:bgPr>
-        <a:solidFill>
-          <a:srgbClr val="FFFFFF"/>
-        </a:solidFill>
-        <a:effectLst/>
-      </p:bgPr>
-    </p:bg>
-    <p:spTree>
-      <p:nvGrpSpPr>
-        <p:cNvPr id="1" name=""/>
-        <p:cNvGrpSpPr/>
-        <p:nvPr/>
-      </p:nvGrpSpPr>
-      <p:grpSpPr/>
-      <p:sp>
-        <p:nvSpPr>
-          <p:cNvPr id="2" name="Rounded Rectangle 1"/>
+                <a:latin typeface="Aptos"/>
+              </a:rPr>
+              <a:t>Built as a working full-stack prototype with AI-assisted discovery, secure booking, and a production-ready path forward.</a:t>
+            </a:r>
+          </a:p>
+        </p:txBody>
+      </p:sp>
+      <p:sp>
+        <p:nvSpPr>
+          <p:cNvPr id="23" name="Rounded Rectangle 22"/>
           <p:cNvSpPr/>
           <p:nvPr/>
         </p:nvSpPr>
         <p:spPr>
           <a:xfrm>
-            <a:off x="411480" y="320040"/>
-            <a:ext cx="11338560" cy="822960"/>
+            <a:off x="9921240" y="5870448"/>
+            <a:ext cx="960120" cy="384048"/>
           </a:xfrm>
           <a:prstGeom prst="roundRect">
             <a:avLst/>
           </a:prstGeom>
           <a:solidFill>
-            <a:srgbClr val="F0FDFA"/>
+            <a:srgbClr val="05ABA5"/>
           </a:solidFill>
           <a:ln>
             <a:solidFill>
-              <a:srgbClr val="CCFBF1"/>
+              <a:srgbClr val="05ABA5"/>
             </a:solidFill>
           </a:ln>
         </p:spPr>
@@ -3741,946 +3959,35 @@
       </p:sp>
       <p:sp>
         <p:nvSpPr>
-          <p:cNvPr id="3" name="TextBox 2"/>
-          <p:cNvSpPr txBox="1"/>
-          <p:nvPr/>
-        </p:nvSpPr>
-        <p:spPr>
-          <a:xfrm>
-            <a:off x="685800" y="475488"/>
-            <a:ext cx="7772400" cy="411480"/>
-          </a:xfrm>
-          <a:prstGeom prst="rect">
-            <a:avLst/>
-          </a:prstGeom>
-          <a:noFill/>
-        </p:spPr>
-        <p:txBody>
-          <a:bodyPr wrap="none">
-            <a:spAutoFit/>
-          </a:bodyPr>
-          <a:lstStyle/>
-          <a:p>
-            <a:r>
-              <a:rPr sz="2800" b="1">
-                <a:solidFill>
-                  <a:srgbClr val="0F172A"/>
-                </a:solidFill>
-              </a:rPr>
-              <a:t>Long-Run Architecture Diagram</a:t>
-            </a:r>
-          </a:p>
-        </p:txBody>
-      </p:sp>
-      <p:sp>
-        <p:nvSpPr>
-          <p:cNvPr id="4" name="Rounded Rectangle 3"/>
-          <p:cNvSpPr/>
-          <p:nvPr/>
-        </p:nvSpPr>
-        <p:spPr>
-          <a:xfrm>
-            <a:off x="10058400" y="475488"/>
-            <a:ext cx="1097280" cy="310896"/>
-          </a:xfrm>
-          <a:prstGeom prst="roundRect">
-            <a:avLst/>
-          </a:prstGeom>
-          <a:solidFill>
-            <a:srgbClr val="0D9488"/>
-          </a:solidFill>
-          <a:ln>
-            <a:solidFill>
-              <a:srgbClr val="0D9488"/>
-            </a:solidFill>
-          </a:ln>
-        </p:spPr>
-        <p:style>
-          <a:lnRef idx="1">
-            <a:schemeClr val="accent1"/>
-          </a:lnRef>
-          <a:fillRef idx="3">
-            <a:schemeClr val="accent1"/>
-          </a:fillRef>
-          <a:effectRef idx="2">
-            <a:schemeClr val="accent1"/>
-          </a:effectRef>
-          <a:fontRef idx="minor">
-            <a:schemeClr val="lt1"/>
-          </a:fontRef>
-        </p:style>
-        <p:txBody>
-          <a:bodyPr rtlCol="0" anchor="ctr"/>
-          <a:lstStyle/>
-          <a:p>
-            <a:pPr algn="ctr"/>
-          </a:p>
-        </p:txBody>
-      </p:sp>
-      <p:sp>
-        <p:nvSpPr>
-          <p:cNvPr id="5" name="TextBox 4"/>
-          <p:cNvSpPr txBox="1"/>
-          <p:nvPr/>
-        </p:nvSpPr>
-        <p:spPr>
-          <a:xfrm>
-            <a:off x="10058400" y="512064"/>
-            <a:ext cx="1097280" cy="228600"/>
-          </a:xfrm>
-          <a:prstGeom prst="rect">
-            <a:avLst/>
-          </a:prstGeom>
-          <a:noFill/>
-        </p:spPr>
-        <p:txBody>
-          <a:bodyPr wrap="none">
-            <a:spAutoFit/>
-          </a:bodyPr>
-          <a:lstStyle/>
-          <a:p>
-            <a:pPr algn="ctr"/>
-            <a:r>
-              <a:rPr sz="1200" b="1">
+          <p:cNvPr id="24" name="TextBox 23"/>
+          <p:cNvSpPr txBox="1"/>
+          <p:nvPr/>
+        </p:nvSpPr>
+        <p:spPr>
+          <a:xfrm>
+            <a:off x="9921240" y="5897880"/>
+            <a:ext cx="960120" cy="256032"/>
+          </a:xfrm>
+          <a:prstGeom prst="rect">
+            <a:avLst/>
+          </a:prstGeom>
+          <a:noFill/>
+        </p:spPr>
+        <p:txBody>
+          <a:bodyPr wrap="square">
+            <a:normAutofit/>
+          </a:bodyPr>
+          <a:lstStyle/>
+          <a:p>
+            <a:pPr algn="ctr"/>
+            <a:r>
+              <a:rPr sz="1100" b="1" i="0">
                 <a:solidFill>
                   <a:srgbClr val="FFFFFF"/>
                 </a:solidFill>
-              </a:rPr>
-              <a:t>11</a:t>
-            </a:r>
-          </a:p>
-        </p:txBody>
-      </p:sp>
-      <p:sp>
-        <p:nvSpPr>
-          <p:cNvPr id="6" name="Rounded Rectangle 5"/>
-          <p:cNvSpPr/>
-          <p:nvPr/>
-        </p:nvSpPr>
-        <p:spPr>
-          <a:xfrm>
-            <a:off x="822960" y="1828800"/>
-            <a:ext cx="1783080" cy="2148840"/>
-          </a:xfrm>
-          <a:prstGeom prst="roundRect">
-            <a:avLst/>
-          </a:prstGeom>
-          <a:solidFill>
-            <a:srgbClr val="FFFFFF"/>
-          </a:solidFill>
-          <a:ln>
-            <a:solidFill>
-              <a:srgbClr val="CCFBF1"/>
-            </a:solidFill>
-          </a:ln>
-        </p:spPr>
-        <p:style>
-          <a:lnRef idx="1">
-            <a:schemeClr val="accent1"/>
-          </a:lnRef>
-          <a:fillRef idx="3">
-            <a:schemeClr val="accent1"/>
-          </a:fillRef>
-          <a:effectRef idx="2">
-            <a:schemeClr val="accent1"/>
-          </a:effectRef>
-          <a:fontRef idx="minor">
-            <a:schemeClr val="lt1"/>
-          </a:fontRef>
-        </p:style>
-        <p:txBody>
-          <a:bodyPr rtlCol="0" anchor="ctr"/>
-          <a:lstStyle/>
-          <a:p>
-            <a:pPr algn="ctr"/>
-          </a:p>
-        </p:txBody>
-      </p:sp>
-      <p:sp>
-        <p:nvSpPr>
-          <p:cNvPr id="7" name="TextBox 6"/>
-          <p:cNvSpPr txBox="1"/>
-          <p:nvPr/>
-        </p:nvSpPr>
-        <p:spPr>
-          <a:xfrm>
-            <a:off x="932688" y="1965960"/>
-            <a:ext cx="1554480" cy="1783080"/>
-          </a:xfrm>
-          <a:prstGeom prst="rect">
-            <a:avLst/>
-          </a:prstGeom>
-          <a:noFill/>
-        </p:spPr>
-        <p:txBody>
-          <a:bodyPr wrap="square">
-            <a:spAutoFit/>
-          </a:bodyPr>
-          <a:lstStyle/>
-          <a:p>
-            <a:pPr algn="ctr"/>
-            <a:r>
-              <a:rPr sz="1800" b="1">
-                <a:solidFill>
-                  <a:srgbClr val="0F172A"/>
-                </a:solidFill>
-              </a:rPr>
-              <a:t>Users</a:t>
-            </a:r>
-          </a:p>
-          <a:p>
-            <a:pPr algn="ctr">
-              <a:defRPr sz="1400">
-                <a:solidFill>
-                  <a:srgbClr val="475569"/>
-                </a:solidFill>
-              </a:defRPr>
-            </a:pPr>
-            <a:r>
-              <a:t>Patients</a:t>
-            </a:r>
-          </a:p>
-          <a:p>
-            <a:pPr algn="ctr">
-              <a:defRPr sz="1400">
-                <a:solidFill>
-                  <a:srgbClr val="475569"/>
-                </a:solidFill>
-              </a:defRPr>
-            </a:pPr>
-            <a:r>
-              <a:t>Admins</a:t>
-            </a:r>
-          </a:p>
-        </p:txBody>
-      </p:sp>
-      <p:sp>
-        <p:nvSpPr>
-          <p:cNvPr id="8" name="Rounded Rectangle 7"/>
-          <p:cNvSpPr/>
-          <p:nvPr/>
-        </p:nvSpPr>
-        <p:spPr>
-          <a:xfrm>
-            <a:off x="3154680" y="1828800"/>
-            <a:ext cx="1783080" cy="2148840"/>
-          </a:xfrm>
-          <a:prstGeom prst="roundRect">
-            <a:avLst/>
-          </a:prstGeom>
-          <a:solidFill>
-            <a:srgbClr val="F0FDFA"/>
-          </a:solidFill>
-          <a:ln>
-            <a:solidFill>
-              <a:srgbClr val="CCFBF1"/>
-            </a:solidFill>
-          </a:ln>
-        </p:spPr>
-        <p:style>
-          <a:lnRef idx="1">
-            <a:schemeClr val="accent1"/>
-          </a:lnRef>
-          <a:fillRef idx="3">
-            <a:schemeClr val="accent1"/>
-          </a:fillRef>
-          <a:effectRef idx="2">
-            <a:schemeClr val="accent1"/>
-          </a:effectRef>
-          <a:fontRef idx="minor">
-            <a:schemeClr val="lt1"/>
-          </a:fontRef>
-        </p:style>
-        <p:txBody>
-          <a:bodyPr rtlCol="0" anchor="ctr"/>
-          <a:lstStyle/>
-          <a:p>
-            <a:pPr algn="ctr"/>
-          </a:p>
-        </p:txBody>
-      </p:sp>
-      <p:sp>
-        <p:nvSpPr>
-          <p:cNvPr id="9" name="TextBox 8"/>
-          <p:cNvSpPr txBox="1"/>
-          <p:nvPr/>
-        </p:nvSpPr>
-        <p:spPr>
-          <a:xfrm>
-            <a:off x="3264408" y="1965960"/>
-            <a:ext cx="1554480" cy="1783080"/>
-          </a:xfrm>
-          <a:prstGeom prst="rect">
-            <a:avLst/>
-          </a:prstGeom>
-          <a:noFill/>
-        </p:spPr>
-        <p:txBody>
-          <a:bodyPr wrap="square">
-            <a:spAutoFit/>
-          </a:bodyPr>
-          <a:lstStyle/>
-          <a:p>
-            <a:pPr algn="ctr"/>
-            <a:r>
-              <a:rPr sz="1800" b="1">
-                <a:solidFill>
-                  <a:srgbClr val="0F172A"/>
-                </a:solidFill>
-              </a:rPr>
-              <a:t>Edge</a:t>
-            </a:r>
-          </a:p>
-          <a:p>
-            <a:pPr algn="ctr">
-              <a:defRPr sz="1400">
-                <a:solidFill>
-                  <a:srgbClr val="475569"/>
-                </a:solidFill>
-              </a:defRPr>
-            </a:pPr>
-            <a:r>
-              <a:t>CDN</a:t>
-            </a:r>
-          </a:p>
-          <a:p>
-            <a:pPr algn="ctr">
-              <a:defRPr sz="1400">
-                <a:solidFill>
-                  <a:srgbClr val="475569"/>
-                </a:solidFill>
-              </a:defRPr>
-            </a:pPr>
-            <a:r>
-              <a:t>WAF</a:t>
-            </a:r>
-          </a:p>
-          <a:p>
-            <a:pPr algn="ctr">
-              <a:defRPr sz="1400">
-                <a:solidFill>
-                  <a:srgbClr val="475569"/>
-                </a:solidFill>
-              </a:defRPr>
-            </a:pPr>
-            <a:r>
-              <a:t>Load Balancer</a:t>
-            </a:r>
-          </a:p>
-        </p:txBody>
-      </p:sp>
-      <p:sp>
-        <p:nvSpPr>
-          <p:cNvPr id="10" name="Rounded Rectangle 9"/>
-          <p:cNvSpPr/>
-          <p:nvPr/>
-        </p:nvSpPr>
-        <p:spPr>
-          <a:xfrm>
-            <a:off x="5486400" y="1828800"/>
-            <a:ext cx="1783080" cy="2148840"/>
-          </a:xfrm>
-          <a:prstGeom prst="roundRect">
-            <a:avLst/>
-          </a:prstGeom>
-          <a:solidFill>
-            <a:srgbClr val="FFFFFF"/>
-          </a:solidFill>
-          <a:ln>
-            <a:solidFill>
-              <a:srgbClr val="CCFBF1"/>
-            </a:solidFill>
-          </a:ln>
-        </p:spPr>
-        <p:style>
-          <a:lnRef idx="1">
-            <a:schemeClr val="accent1"/>
-          </a:lnRef>
-          <a:fillRef idx="3">
-            <a:schemeClr val="accent1"/>
-          </a:fillRef>
-          <a:effectRef idx="2">
-            <a:schemeClr val="accent1"/>
-          </a:effectRef>
-          <a:fontRef idx="minor">
-            <a:schemeClr val="lt1"/>
-          </a:fontRef>
-        </p:style>
-        <p:txBody>
-          <a:bodyPr rtlCol="0" anchor="ctr"/>
-          <a:lstStyle/>
-          <a:p>
-            <a:pPr algn="ctr"/>
-          </a:p>
-        </p:txBody>
-      </p:sp>
-      <p:sp>
-        <p:nvSpPr>
-          <p:cNvPr id="11" name="TextBox 10"/>
-          <p:cNvSpPr txBox="1"/>
-          <p:nvPr/>
-        </p:nvSpPr>
-        <p:spPr>
-          <a:xfrm>
-            <a:off x="5596128" y="1965960"/>
-            <a:ext cx="1554480" cy="1783080"/>
-          </a:xfrm>
-          <a:prstGeom prst="rect">
-            <a:avLst/>
-          </a:prstGeom>
-          <a:noFill/>
-        </p:spPr>
-        <p:txBody>
-          <a:bodyPr wrap="square">
-            <a:spAutoFit/>
-          </a:bodyPr>
-          <a:lstStyle/>
-          <a:p>
-            <a:pPr algn="ctr"/>
-            <a:r>
-              <a:rPr sz="1800" b="1">
-                <a:solidFill>
-                  <a:srgbClr val="0F172A"/>
-                </a:solidFill>
-              </a:rPr>
-              <a:t>App</a:t>
-            </a:r>
-          </a:p>
-          <a:p>
-            <a:pPr algn="ctr">
-              <a:defRPr sz="1400">
-                <a:solidFill>
-                  <a:srgbClr val="475569"/>
-                </a:solidFill>
-              </a:defRPr>
-            </a:pPr>
-            <a:r>
-              <a:t>Next.js UI</a:t>
-            </a:r>
-          </a:p>
-          <a:p>
-            <a:pPr algn="ctr">
-              <a:defRPr sz="1400">
-                <a:solidFill>
-                  <a:srgbClr val="475569"/>
-                </a:solidFill>
-              </a:defRPr>
-            </a:pPr>
-            <a:r>
-              <a:t>BFF APIs</a:t>
-            </a:r>
-          </a:p>
-          <a:p>
-            <a:pPr algn="ctr">
-              <a:defRPr sz="1400">
-                <a:solidFill>
-                  <a:srgbClr val="475569"/>
-                </a:solidFill>
-              </a:defRPr>
-            </a:pPr>
-            <a:r>
-              <a:t>Autoscale Runtime</a:t>
-            </a:r>
-          </a:p>
-        </p:txBody>
-      </p:sp>
-      <p:sp>
-        <p:nvSpPr>
-          <p:cNvPr id="12" name="Rounded Rectangle 11"/>
-          <p:cNvSpPr/>
-          <p:nvPr/>
-        </p:nvSpPr>
-        <p:spPr>
-          <a:xfrm>
-            <a:off x="7818120" y="1828800"/>
-            <a:ext cx="1783080" cy="2148840"/>
-          </a:xfrm>
-          <a:prstGeom prst="roundRect">
-            <a:avLst/>
-          </a:prstGeom>
-          <a:solidFill>
-            <a:srgbClr val="F0FDFA"/>
-          </a:solidFill>
-          <a:ln>
-            <a:solidFill>
-              <a:srgbClr val="CCFBF1"/>
-            </a:solidFill>
-          </a:ln>
-        </p:spPr>
-        <p:style>
-          <a:lnRef idx="1">
-            <a:schemeClr val="accent1"/>
-          </a:lnRef>
-          <a:fillRef idx="3">
-            <a:schemeClr val="accent1"/>
-          </a:fillRef>
-          <a:effectRef idx="2">
-            <a:schemeClr val="accent1"/>
-          </a:effectRef>
-          <a:fontRef idx="minor">
-            <a:schemeClr val="lt1"/>
-          </a:fontRef>
-        </p:style>
-        <p:txBody>
-          <a:bodyPr rtlCol="0" anchor="ctr"/>
-          <a:lstStyle/>
-          <a:p>
-            <a:pPr algn="ctr"/>
-          </a:p>
-        </p:txBody>
-      </p:sp>
-      <p:sp>
-        <p:nvSpPr>
-          <p:cNvPr id="13" name="TextBox 12"/>
-          <p:cNvSpPr txBox="1"/>
-          <p:nvPr/>
-        </p:nvSpPr>
-        <p:spPr>
-          <a:xfrm>
-            <a:off x="7927848" y="1965960"/>
-            <a:ext cx="1554480" cy="1783080"/>
-          </a:xfrm>
-          <a:prstGeom prst="rect">
-            <a:avLst/>
-          </a:prstGeom>
-          <a:noFill/>
-        </p:spPr>
-        <p:txBody>
-          <a:bodyPr wrap="square">
-            <a:spAutoFit/>
-          </a:bodyPr>
-          <a:lstStyle/>
-          <a:p>
-            <a:pPr algn="ctr"/>
-            <a:r>
-              <a:rPr sz="1800" b="1">
-                <a:solidFill>
-                  <a:srgbClr val="0F172A"/>
-                </a:solidFill>
-              </a:rPr>
-              <a:t>Platform</a:t>
-            </a:r>
-          </a:p>
-          <a:p>
-            <a:pPr algn="ctr">
-              <a:defRPr sz="1400">
-                <a:solidFill>
-                  <a:srgbClr val="475569"/>
-                </a:solidFill>
-              </a:defRPr>
-            </a:pPr>
-            <a:r>
-              <a:t>Redis Cache</a:t>
-            </a:r>
-          </a:p>
-          <a:p>
-            <a:pPr algn="ctr">
-              <a:defRPr sz="1400">
-                <a:solidFill>
-                  <a:srgbClr val="475569"/>
-                </a:solidFill>
-              </a:defRPr>
-            </a:pPr>
-            <a:r>
-              <a:t>Queue + Workers</a:t>
-            </a:r>
-          </a:p>
-          <a:p>
-            <a:pPr algn="ctr">
-              <a:defRPr sz="1400">
-                <a:solidFill>
-                  <a:srgbClr val="475569"/>
-                </a:solidFill>
-              </a:defRPr>
-            </a:pPr>
-            <a:r>
-              <a:t>Observability</a:t>
-            </a:r>
-          </a:p>
-        </p:txBody>
-      </p:sp>
-      <p:sp>
-        <p:nvSpPr>
-          <p:cNvPr id="14" name="Rounded Rectangle 13"/>
-          <p:cNvSpPr/>
-          <p:nvPr/>
-        </p:nvSpPr>
-        <p:spPr>
-          <a:xfrm>
-            <a:off x="10149840" y="1828800"/>
-            <a:ext cx="1783080" cy="2148840"/>
-          </a:xfrm>
-          <a:prstGeom prst="roundRect">
-            <a:avLst/>
-          </a:prstGeom>
-          <a:solidFill>
-            <a:srgbClr val="FFFFFF"/>
-          </a:solidFill>
-          <a:ln>
-            <a:solidFill>
-              <a:srgbClr val="CCFBF1"/>
-            </a:solidFill>
-          </a:ln>
-        </p:spPr>
-        <p:style>
-          <a:lnRef idx="1">
-            <a:schemeClr val="accent1"/>
-          </a:lnRef>
-          <a:fillRef idx="3">
-            <a:schemeClr val="accent1"/>
-          </a:fillRef>
-          <a:effectRef idx="2">
-            <a:schemeClr val="accent1"/>
-          </a:effectRef>
-          <a:fontRef idx="minor">
-            <a:schemeClr val="lt1"/>
-          </a:fontRef>
-        </p:style>
-        <p:txBody>
-          <a:bodyPr rtlCol="0" anchor="ctr"/>
-          <a:lstStyle/>
-          <a:p>
-            <a:pPr algn="ctr"/>
-          </a:p>
-        </p:txBody>
-      </p:sp>
-      <p:sp>
-        <p:nvSpPr>
-          <p:cNvPr id="15" name="TextBox 14"/>
-          <p:cNvSpPr txBox="1"/>
-          <p:nvPr/>
-        </p:nvSpPr>
-        <p:spPr>
-          <a:xfrm>
-            <a:off x="10259567" y="1965960"/>
-            <a:ext cx="1554480" cy="1783080"/>
-          </a:xfrm>
-          <a:prstGeom prst="rect">
-            <a:avLst/>
-          </a:prstGeom>
-          <a:noFill/>
-        </p:spPr>
-        <p:txBody>
-          <a:bodyPr wrap="square">
-            <a:spAutoFit/>
-          </a:bodyPr>
-          <a:lstStyle/>
-          <a:p>
-            <a:pPr algn="ctr"/>
-            <a:r>
-              <a:rPr sz="1800" b="1">
-                <a:solidFill>
-                  <a:srgbClr val="0F172A"/>
-                </a:solidFill>
-              </a:rPr>
-              <a:t>Data + External</a:t>
-            </a:r>
-          </a:p>
-          <a:p>
-            <a:pPr algn="ctr">
-              <a:defRPr sz="1400">
-                <a:solidFill>
-                  <a:srgbClr val="475569"/>
-                </a:solidFill>
-              </a:defRPr>
-            </a:pPr>
-            <a:r>
-              <a:t>Supabase</a:t>
-            </a:r>
-          </a:p>
-          <a:p>
-            <a:pPr algn="ctr">
-              <a:defRPr sz="1400">
-                <a:solidFill>
-                  <a:srgbClr val="475569"/>
-                </a:solidFill>
-              </a:defRPr>
-            </a:pPr>
-            <a:r>
-              <a:t>OpenAI</a:t>
-            </a:r>
-          </a:p>
-          <a:p>
-            <a:pPr algn="ctr">
-              <a:defRPr sz="1400">
-                <a:solidFill>
-                  <a:srgbClr val="475569"/>
-                </a:solidFill>
-              </a:defRPr>
-            </a:pPr>
-            <a:r>
-              <a:t>Payments</a:t>
-            </a:r>
-          </a:p>
-          <a:p>
-            <a:pPr algn="ctr">
-              <a:defRPr sz="1400">
-                <a:solidFill>
-                  <a:srgbClr val="475569"/>
-                </a:solidFill>
-              </a:defRPr>
-            </a:pPr>
-            <a:r>
-              <a:t>Notifications</a:t>
-            </a:r>
-          </a:p>
-        </p:txBody>
-      </p:sp>
-      <p:sp>
-        <p:nvSpPr>
-          <p:cNvPr id="16" name="Chevron 15"/>
-          <p:cNvSpPr/>
-          <p:nvPr/>
-        </p:nvSpPr>
-        <p:spPr>
-          <a:xfrm>
-            <a:off x="2606040" y="2578608"/>
-            <a:ext cx="292608" cy="310896"/>
-          </a:xfrm>
-          <a:prstGeom prst="chevron">
-            <a:avLst/>
-          </a:prstGeom>
-          <a:solidFill>
-            <a:srgbClr val="0D9488"/>
-          </a:solidFill>
-          <a:ln>
-            <a:solidFill>
-              <a:srgbClr val="0D9488"/>
-            </a:solidFill>
-          </a:ln>
-        </p:spPr>
-        <p:style>
-          <a:lnRef idx="1">
-            <a:schemeClr val="accent1"/>
-          </a:lnRef>
-          <a:fillRef idx="3">
-            <a:schemeClr val="accent1"/>
-          </a:fillRef>
-          <a:effectRef idx="2">
-            <a:schemeClr val="accent1"/>
-          </a:effectRef>
-          <a:fontRef idx="minor">
-            <a:schemeClr val="lt1"/>
-          </a:fontRef>
-        </p:style>
-        <p:txBody>
-          <a:bodyPr rtlCol="0" anchor="ctr"/>
-          <a:lstStyle/>
-          <a:p>
-            <a:pPr algn="ctr"/>
-          </a:p>
-        </p:txBody>
-      </p:sp>
-      <p:sp>
-        <p:nvSpPr>
-          <p:cNvPr id="17" name="Chevron 16"/>
-          <p:cNvSpPr/>
-          <p:nvPr/>
-        </p:nvSpPr>
-        <p:spPr>
-          <a:xfrm>
-            <a:off x="4937760" y="2578608"/>
-            <a:ext cx="292608" cy="310896"/>
-          </a:xfrm>
-          <a:prstGeom prst="chevron">
-            <a:avLst/>
-          </a:prstGeom>
-          <a:solidFill>
-            <a:srgbClr val="0D9488"/>
-          </a:solidFill>
-          <a:ln>
-            <a:solidFill>
-              <a:srgbClr val="0D9488"/>
-            </a:solidFill>
-          </a:ln>
-        </p:spPr>
-        <p:style>
-          <a:lnRef idx="1">
-            <a:schemeClr val="accent1"/>
-          </a:lnRef>
-          <a:fillRef idx="3">
-            <a:schemeClr val="accent1"/>
-          </a:fillRef>
-          <a:effectRef idx="2">
-            <a:schemeClr val="accent1"/>
-          </a:effectRef>
-          <a:fontRef idx="minor">
-            <a:schemeClr val="lt1"/>
-          </a:fontRef>
-        </p:style>
-        <p:txBody>
-          <a:bodyPr rtlCol="0" anchor="ctr"/>
-          <a:lstStyle/>
-          <a:p>
-            <a:pPr algn="ctr"/>
-          </a:p>
-        </p:txBody>
-      </p:sp>
-      <p:sp>
-        <p:nvSpPr>
-          <p:cNvPr id="18" name="Chevron 17"/>
-          <p:cNvSpPr/>
-          <p:nvPr/>
-        </p:nvSpPr>
-        <p:spPr>
-          <a:xfrm>
-            <a:off x="7269480" y="2578608"/>
-            <a:ext cx="292608" cy="310896"/>
-          </a:xfrm>
-          <a:prstGeom prst="chevron">
-            <a:avLst/>
-          </a:prstGeom>
-          <a:solidFill>
-            <a:srgbClr val="0D9488"/>
-          </a:solidFill>
-          <a:ln>
-            <a:solidFill>
-              <a:srgbClr val="0D9488"/>
-            </a:solidFill>
-          </a:ln>
-        </p:spPr>
-        <p:style>
-          <a:lnRef idx="1">
-            <a:schemeClr val="accent1"/>
-          </a:lnRef>
-          <a:fillRef idx="3">
-            <a:schemeClr val="accent1"/>
-          </a:fillRef>
-          <a:effectRef idx="2">
-            <a:schemeClr val="accent1"/>
-          </a:effectRef>
-          <a:fontRef idx="minor">
-            <a:schemeClr val="lt1"/>
-          </a:fontRef>
-        </p:style>
-        <p:txBody>
-          <a:bodyPr rtlCol="0" anchor="ctr"/>
-          <a:lstStyle/>
-          <a:p>
-            <a:pPr algn="ctr"/>
-          </a:p>
-        </p:txBody>
-      </p:sp>
-      <p:sp>
-        <p:nvSpPr>
-          <p:cNvPr id="19" name="Chevron 18"/>
-          <p:cNvSpPr/>
-          <p:nvPr/>
-        </p:nvSpPr>
-        <p:spPr>
-          <a:xfrm>
-            <a:off x="9601200" y="2578608"/>
-            <a:ext cx="292608" cy="310896"/>
-          </a:xfrm>
-          <a:prstGeom prst="chevron">
-            <a:avLst/>
-          </a:prstGeom>
-          <a:solidFill>
-            <a:srgbClr val="0D9488"/>
-          </a:solidFill>
-          <a:ln>
-            <a:solidFill>
-              <a:srgbClr val="0D9488"/>
-            </a:solidFill>
-          </a:ln>
-        </p:spPr>
-        <p:style>
-          <a:lnRef idx="1">
-            <a:schemeClr val="accent1"/>
-          </a:lnRef>
-          <a:fillRef idx="3">
-            <a:schemeClr val="accent1"/>
-          </a:fillRef>
-          <a:effectRef idx="2">
-            <a:schemeClr val="accent1"/>
-          </a:effectRef>
-          <a:fontRef idx="minor">
-            <a:schemeClr val="lt1"/>
-          </a:fontRef>
-        </p:style>
-        <p:txBody>
-          <a:bodyPr rtlCol="0" anchor="ctr"/>
-          <a:lstStyle/>
-          <a:p>
-            <a:pPr algn="ctr"/>
-          </a:p>
-        </p:txBody>
-      </p:sp>
-      <p:sp>
-        <p:nvSpPr>
-          <p:cNvPr id="20" name="Rounded Rectangle 19"/>
-          <p:cNvSpPr/>
-          <p:nvPr/>
-        </p:nvSpPr>
-        <p:spPr>
-          <a:xfrm>
-            <a:off x="822960" y="4572000"/>
-            <a:ext cx="10881360" cy="1051560"/>
-          </a:xfrm>
-          <a:prstGeom prst="roundRect">
-            <a:avLst/>
-          </a:prstGeom>
-          <a:solidFill>
-            <a:srgbClr val="F8FAFC"/>
-          </a:solidFill>
-          <a:ln>
-            <a:solidFill>
-              <a:srgbClr val="E2E8F0"/>
-            </a:solidFill>
-          </a:ln>
-        </p:spPr>
-        <p:style>
-          <a:lnRef idx="1">
-            <a:schemeClr val="accent1"/>
-          </a:lnRef>
-          <a:fillRef idx="3">
-            <a:schemeClr val="accent1"/>
-          </a:fillRef>
-          <a:effectRef idx="2">
-            <a:schemeClr val="accent1"/>
-          </a:effectRef>
-          <a:fontRef idx="minor">
-            <a:schemeClr val="lt1"/>
-          </a:fontRef>
-        </p:style>
-        <p:txBody>
-          <a:bodyPr rtlCol="0" anchor="ctr"/>
-          <a:lstStyle/>
-          <a:p>
-            <a:pPr algn="ctr"/>
-          </a:p>
-        </p:txBody>
-      </p:sp>
-      <p:sp>
-        <p:nvSpPr>
-          <p:cNvPr id="21" name="TextBox 20"/>
-          <p:cNvSpPr txBox="1"/>
-          <p:nvPr/>
-        </p:nvSpPr>
-        <p:spPr>
-          <a:xfrm>
-            <a:off x="1051560" y="4773168"/>
-            <a:ext cx="10424160" cy="594360"/>
-          </a:xfrm>
-          <a:prstGeom prst="rect">
-            <a:avLst/>
-          </a:prstGeom>
-          <a:noFill/>
-        </p:spPr>
-        <p:txBody>
-          <a:bodyPr wrap="square">
-            <a:spAutoFit/>
-          </a:bodyPr>
-          <a:lstStyle/>
-          <a:p>
-            <a:pPr algn="ctr"/>
-            <a:r>
-              <a:rPr sz="1600">
-                <a:solidFill>
-                  <a:srgbClr val="0F172A"/>
-                </a:solidFill>
-              </a:rPr>
-              <a:t>Current app remains the core product. Long-term scale comes from edge controls, autoscaling, API governance, caching, security, observability, and payment integration.</a:t>
+                <a:latin typeface="Aptos"/>
+              </a:rPr>
+              <a:t>01</a:t>
             </a:r>
           </a:p>
         </p:txBody>
@@ -4719,18 +4026,18 @@
         </p:nvSpPr>
         <p:spPr>
           <a:xfrm>
-            <a:off x="411480" y="320040"/>
-            <a:ext cx="11338560" cy="822960"/>
+            <a:off x="502920" y="384048"/>
+            <a:ext cx="1874519" cy="457200"/>
           </a:xfrm>
           <a:prstGeom prst="roundRect">
             <a:avLst/>
           </a:prstGeom>
           <a:solidFill>
-            <a:srgbClr val="F0FDFA"/>
+            <a:srgbClr val="ECFEFF"/>
           </a:solidFill>
           <a:ln>
             <a:solidFill>
-              <a:srgbClr val="CCFBF1"/>
+              <a:srgbClr val="A5F3FC"/>
             </a:solidFill>
           </a:ln>
         </p:spPr>
@@ -4764,51 +4071,88 @@
         </p:nvSpPr>
         <p:spPr>
           <a:xfrm>
-            <a:off x="685800" y="475488"/>
-            <a:ext cx="7772400" cy="411480"/>
-          </a:xfrm>
-          <a:prstGeom prst="rect">
-            <a:avLst/>
-          </a:prstGeom>
-          <a:noFill/>
-        </p:spPr>
-        <p:txBody>
-          <a:bodyPr wrap="none">
-            <a:spAutoFit/>
-          </a:bodyPr>
-          <a:lstStyle/>
-          <a:p>
-            <a:r>
-              <a:rPr sz="2800" b="1">
+            <a:off x="658368" y="493776"/>
+            <a:ext cx="1554480" cy="182880"/>
+          </a:xfrm>
+          <a:prstGeom prst="rect">
+            <a:avLst/>
+          </a:prstGeom>
+          <a:noFill/>
+        </p:spPr>
+        <p:txBody>
+          <a:bodyPr wrap="square">
+            <a:normAutofit/>
+          </a:bodyPr>
+          <a:lstStyle/>
+          <a:p>
+            <a:pPr algn="l"/>
+            <a:r>
+              <a:rPr sz="1100" b="1" i="0">
+                <a:solidFill>
+                  <a:srgbClr val="0D746F"/>
+                </a:solidFill>
+                <a:latin typeface="Aptos"/>
+              </a:rPr>
+              <a:t>THE PAIN</a:t>
+            </a:r>
+          </a:p>
+        </p:txBody>
+      </p:sp>
+      <p:sp>
+        <p:nvSpPr>
+          <p:cNvPr id="4" name="TextBox 3"/>
+          <p:cNvSpPr txBox="1"/>
+          <p:nvPr/>
+        </p:nvSpPr>
+        <p:spPr>
+          <a:xfrm>
+            <a:off x="640080" y="914400"/>
+            <a:ext cx="5943600" cy="822960"/>
+          </a:xfrm>
+          <a:prstGeom prst="rect">
+            <a:avLst/>
+          </a:prstGeom>
+          <a:noFill/>
+        </p:spPr>
+        <p:txBody>
+          <a:bodyPr wrap="square">
+            <a:normAutofit/>
+          </a:bodyPr>
+          <a:lstStyle/>
+          <a:p>
+            <a:pPr algn="l"/>
+            <a:r>
+              <a:rPr sz="2800" b="1" i="0">
                 <a:solidFill>
                   <a:srgbClr val="0F172A"/>
                 </a:solidFill>
-              </a:rPr>
-              <a:t>Problem</a:t>
-            </a:r>
-          </a:p>
-        </p:txBody>
-      </p:sp>
-      <p:sp>
-        <p:nvSpPr>
-          <p:cNvPr id="4" name="Rounded Rectangle 3"/>
+                <a:latin typeface="Aptos"/>
+              </a:rPr>
+              <a:t>Patients do not need more hospital tabs. They need a decision path.</a:t>
+            </a:r>
+          </a:p>
+        </p:txBody>
+      </p:sp>
+      <p:sp>
+        <p:nvSpPr>
+          <p:cNvPr id="5" name="Rounded Rectangle 4"/>
           <p:cNvSpPr/>
           <p:nvPr/>
         </p:nvSpPr>
         <p:spPr>
           <a:xfrm>
-            <a:off x="10058400" y="475488"/>
-            <a:ext cx="1097280" cy="310896"/>
+            <a:off x="685800" y="1783080"/>
+            <a:ext cx="4572000" cy="4251960"/>
           </a:xfrm>
           <a:prstGeom prst="roundRect">
             <a:avLst/>
           </a:prstGeom>
           <a:solidFill>
-            <a:srgbClr val="0D9488"/>
+            <a:srgbClr val="ECFEFF"/>
           </a:solidFill>
           <a:ln>
             <a:solidFill>
-              <a:srgbClr val="0D9488"/>
+              <a:srgbClr val="A5F3FC"/>
             </a:solidFill>
           </a:ln>
         </p:spPr>
@@ -4836,48 +4180,119 @@
       </p:sp>
       <p:sp>
         <p:nvSpPr>
-          <p:cNvPr id="5" name="TextBox 4"/>
-          <p:cNvSpPr txBox="1"/>
-          <p:nvPr/>
-        </p:nvSpPr>
-        <p:spPr>
-          <a:xfrm>
-            <a:off x="10058400" y="512064"/>
-            <a:ext cx="1097280" cy="228600"/>
-          </a:xfrm>
-          <a:prstGeom prst="rect">
-            <a:avLst/>
-          </a:prstGeom>
-          <a:noFill/>
-        </p:spPr>
-        <p:txBody>
-          <a:bodyPr wrap="none">
-            <a:spAutoFit/>
-          </a:bodyPr>
-          <a:lstStyle/>
-          <a:p>
-            <a:pPr algn="ctr"/>
-            <a:r>
-              <a:rPr sz="1200" b="1">
-                <a:solidFill>
-                  <a:srgbClr val="FFFFFF"/>
-                </a:solidFill>
-              </a:rPr>
-              <a:t>02</a:t>
-            </a:r>
-          </a:p>
-        </p:txBody>
-      </p:sp>
-      <p:sp>
-        <p:nvSpPr>
-          <p:cNvPr id="6" name="Rounded Rectangle 5"/>
+          <p:cNvPr id="6" name="TextBox 5"/>
+          <p:cNvSpPr txBox="1"/>
+          <p:nvPr/>
+        </p:nvSpPr>
+        <p:spPr>
+          <a:xfrm>
+            <a:off x="960120" y="2103120"/>
+            <a:ext cx="3840480" cy="320040"/>
+          </a:xfrm>
+          <a:prstGeom prst="rect">
+            <a:avLst/>
+          </a:prstGeom>
+          <a:noFill/>
+        </p:spPr>
+        <p:txBody>
+          <a:bodyPr wrap="square">
+            <a:normAutofit/>
+          </a:bodyPr>
+          <a:lstStyle/>
+          <a:p>
+            <a:pPr algn="l"/>
+            <a:r>
+              <a:rPr sz="1300" b="1" i="0">
+                <a:solidFill>
+                  <a:srgbClr val="0D746F"/>
+                </a:solidFill>
+                <a:latin typeface="Aptos"/>
+              </a:rPr>
+              <a:t>Real-world moment</a:t>
+            </a:r>
+          </a:p>
+        </p:txBody>
+      </p:sp>
+      <p:sp>
+        <p:nvSpPr>
+          <p:cNvPr id="7" name="TextBox 6"/>
+          <p:cNvSpPr txBox="1"/>
+          <p:nvPr/>
+        </p:nvSpPr>
+        <p:spPr>
+          <a:xfrm>
+            <a:off x="960120" y="2560320"/>
+            <a:ext cx="3749039" cy="1371600"/>
+          </a:xfrm>
+          <a:prstGeom prst="rect">
+            <a:avLst/>
+          </a:prstGeom>
+          <a:noFill/>
+        </p:spPr>
+        <p:txBody>
+          <a:bodyPr wrap="square">
+            <a:normAutofit/>
+          </a:bodyPr>
+          <a:lstStyle/>
+          <a:p>
+            <a:pPr algn="l"/>
+            <a:r>
+              <a:rPr sz="2400" b="1" i="0">
+                <a:solidFill>
+                  <a:srgbClr val="0F172A"/>
+                </a:solidFill>
+                <a:latin typeface="Aptos"/>
+              </a:rPr>
+              <a:t>A family knows the surgery type, but not which hospital is trustworthy, affordable, in-network, or even bookable today.</a:t>
+            </a:r>
+          </a:p>
+        </p:txBody>
+      </p:sp>
+      <p:sp>
+        <p:nvSpPr>
+          <p:cNvPr id="8" name="TextBox 7"/>
+          <p:cNvSpPr txBox="1"/>
+          <p:nvPr/>
+        </p:nvSpPr>
+        <p:spPr>
+          <a:xfrm>
+            <a:off x="960120" y="4251960"/>
+            <a:ext cx="3657600" cy="1051560"/>
+          </a:xfrm>
+          <a:prstGeom prst="rect">
+            <a:avLst/>
+          </a:prstGeom>
+          <a:noFill/>
+        </p:spPr>
+        <p:txBody>
+          <a:bodyPr wrap="square">
+            <a:normAutofit/>
+          </a:bodyPr>
+          <a:lstStyle/>
+          <a:p>
+            <a:pPr algn="l"/>
+            <a:r>
+              <a:rPr sz="1500" b="0" i="0">
+                <a:solidFill>
+                  <a:srgbClr val="475569"/>
+                </a:solidFill>
+                <a:latin typeface="Aptos"/>
+              </a:rPr>
+              <a:t>What follows is fragmented research, hidden pricing, insurance guesswork, and repeated manual calls before any real progress happens.</a:t>
+            </a:r>
+          </a:p>
+        </p:txBody>
+      </p:sp>
+      <p:sp>
+        <p:nvSpPr>
+          <p:cNvPr id="9" name="Rounded Rectangle 8"/>
           <p:cNvSpPr/>
           <p:nvPr/>
         </p:nvSpPr>
         <p:spPr>
           <a:xfrm>
-            <a:off x="640080" y="1417320"/>
-            <a:ext cx="10972800" cy="4846320"/>
+            <a:off x="5623560" y="1828800"/>
+            <a:ext cx="5486400" cy="1170432"/>
           </a:xfrm>
           <a:prstGeom prst="roundRect">
             <a:avLst/>
@@ -4887,7 +4302,7 @@
           </a:solidFill>
           <a:ln>
             <a:solidFill>
-              <a:srgbClr val="E2E8F0"/>
+              <a:srgbClr val="CBD5E1"/>
             </a:solidFill>
           </a:ln>
         </p:spPr>
@@ -4915,83 +4330,515 @@
       </p:sp>
       <p:sp>
         <p:nvSpPr>
-          <p:cNvPr id="7" name="TextBox 6"/>
-          <p:cNvSpPr txBox="1"/>
-          <p:nvPr/>
-        </p:nvSpPr>
-        <p:spPr>
-          <a:xfrm>
-            <a:off x="914400" y="1783080"/>
-            <a:ext cx="9875520" cy="3566160"/>
-          </a:xfrm>
-          <a:prstGeom prst="rect">
-            <a:avLst/>
-          </a:prstGeom>
-          <a:noFill/>
-        </p:spPr>
-        <p:txBody>
-          <a:bodyPr wrap="square">
-            <a:spAutoFit/>
-          </a:bodyPr>
-          <a:lstStyle/>
-          <a:p>
-            <a:pPr>
-              <a:spcAft>
-                <a:spcPts val="1000"/>
-              </a:spcAft>
-              <a:defRPr sz="2000">
+          <p:cNvPr id="10" name="Rounded Rectangle 9"/>
+          <p:cNvSpPr/>
+          <p:nvPr/>
+        </p:nvSpPr>
+        <p:spPr>
+          <a:xfrm>
+            <a:off x="5806440" y="2011680"/>
+            <a:ext cx="164592" cy="804672"/>
+          </a:xfrm>
+          <a:prstGeom prst="roundRect">
+            <a:avLst/>
+          </a:prstGeom>
+          <a:solidFill>
+            <a:srgbClr val="F59E0B"/>
+          </a:solidFill>
+          <a:ln>
+            <a:solidFill>
+              <a:srgbClr val="F59E0B"/>
+            </a:solidFill>
+          </a:ln>
+        </p:spPr>
+        <p:style>
+          <a:lnRef idx="1">
+            <a:schemeClr val="accent1"/>
+          </a:lnRef>
+          <a:fillRef idx="3">
+            <a:schemeClr val="accent1"/>
+          </a:fillRef>
+          <a:effectRef idx="2">
+            <a:schemeClr val="accent1"/>
+          </a:effectRef>
+          <a:fontRef idx="minor">
+            <a:schemeClr val="lt1"/>
+          </a:fontRef>
+        </p:style>
+        <p:txBody>
+          <a:bodyPr rtlCol="0" anchor="ctr"/>
+          <a:lstStyle/>
+          <a:p>
+            <a:pPr algn="ctr"/>
+          </a:p>
+        </p:txBody>
+      </p:sp>
+      <p:sp>
+        <p:nvSpPr>
+          <p:cNvPr id="11" name="TextBox 10"/>
+          <p:cNvSpPr txBox="1"/>
+          <p:nvPr/>
+        </p:nvSpPr>
+        <p:spPr>
+          <a:xfrm>
+            <a:off x="6126480" y="2011680"/>
+            <a:ext cx="2011680" cy="256032"/>
+          </a:xfrm>
+          <a:prstGeom prst="rect">
+            <a:avLst/>
+          </a:prstGeom>
+          <a:noFill/>
+        </p:spPr>
+        <p:txBody>
+          <a:bodyPr wrap="square">
+            <a:normAutofit/>
+          </a:bodyPr>
+          <a:lstStyle/>
+          <a:p>
+            <a:pPr algn="l"/>
+            <a:r>
+              <a:rPr sz="1700" b="1" i="0">
                 <a:solidFill>
                   <a:srgbClr val="0F172A"/>
                 </a:solidFill>
-              </a:defRPr>
-            </a:pPr>
-            <a:r>
-              <a:t>Hospital discovery is fragmented across search engines, aggregators, and hospital websites.</a:t>
-            </a:r>
-          </a:p>
-          <a:p>
-            <a:pPr>
-              <a:spcAft>
-                <a:spcPts val="1000"/>
-              </a:spcAft>
-              <a:defRPr sz="2000">
+                <a:latin typeface="Aptos"/>
+              </a:rPr>
+              <a:t>Opaque pricing</a:t>
+            </a:r>
+          </a:p>
+        </p:txBody>
+      </p:sp>
+      <p:sp>
+        <p:nvSpPr>
+          <p:cNvPr id="12" name="TextBox 11"/>
+          <p:cNvSpPr txBox="1"/>
+          <p:nvPr/>
+        </p:nvSpPr>
+        <p:spPr>
+          <a:xfrm>
+            <a:off x="6126480" y="2331720"/>
+            <a:ext cx="4480560" cy="438912"/>
+          </a:xfrm>
+          <a:prstGeom prst="rect">
+            <a:avLst/>
+          </a:prstGeom>
+          <a:noFill/>
+        </p:spPr>
+        <p:txBody>
+          <a:bodyPr wrap="square">
+            <a:normAutofit/>
+          </a:bodyPr>
+          <a:lstStyle/>
+          <a:p>
+            <a:pPr algn="l"/>
+            <a:r>
+              <a:rPr sz="1200" b="0" i="0">
+                <a:solidFill>
+                  <a:srgbClr val="475569"/>
+                </a:solidFill>
+                <a:latin typeface="Aptos"/>
+              </a:rPr>
+              <a:t>Patients cannot compare likely surgery costs with confidence.</a:t>
+            </a:r>
+          </a:p>
+        </p:txBody>
+      </p:sp>
+      <p:sp>
+        <p:nvSpPr>
+          <p:cNvPr id="13" name="Rounded Rectangle 12"/>
+          <p:cNvSpPr/>
+          <p:nvPr/>
+        </p:nvSpPr>
+        <p:spPr>
+          <a:xfrm>
+            <a:off x="5623560" y="3218688"/>
+            <a:ext cx="5486400" cy="1170432"/>
+          </a:xfrm>
+          <a:prstGeom prst="roundRect">
+            <a:avLst/>
+          </a:prstGeom>
+          <a:solidFill>
+            <a:srgbClr val="FFFFFF"/>
+          </a:solidFill>
+          <a:ln>
+            <a:solidFill>
+              <a:srgbClr val="CBD5E1"/>
+            </a:solidFill>
+          </a:ln>
+        </p:spPr>
+        <p:style>
+          <a:lnRef idx="1">
+            <a:schemeClr val="accent1"/>
+          </a:lnRef>
+          <a:fillRef idx="3">
+            <a:schemeClr val="accent1"/>
+          </a:fillRef>
+          <a:effectRef idx="2">
+            <a:schemeClr val="accent1"/>
+          </a:effectRef>
+          <a:fontRef idx="minor">
+            <a:schemeClr val="lt1"/>
+          </a:fontRef>
+        </p:style>
+        <p:txBody>
+          <a:bodyPr rtlCol="0" anchor="ctr"/>
+          <a:lstStyle/>
+          <a:p>
+            <a:pPr algn="ctr"/>
+          </a:p>
+        </p:txBody>
+      </p:sp>
+      <p:sp>
+        <p:nvSpPr>
+          <p:cNvPr id="14" name="Rounded Rectangle 13"/>
+          <p:cNvSpPr/>
+          <p:nvPr/>
+        </p:nvSpPr>
+        <p:spPr>
+          <a:xfrm>
+            <a:off x="5806440" y="3401568"/>
+            <a:ext cx="164592" cy="804672"/>
+          </a:xfrm>
+          <a:prstGeom prst="roundRect">
+            <a:avLst/>
+          </a:prstGeom>
+          <a:solidFill>
+            <a:srgbClr val="F43F5E"/>
+          </a:solidFill>
+          <a:ln>
+            <a:solidFill>
+              <a:srgbClr val="F43F5E"/>
+            </a:solidFill>
+          </a:ln>
+        </p:spPr>
+        <p:style>
+          <a:lnRef idx="1">
+            <a:schemeClr val="accent1"/>
+          </a:lnRef>
+          <a:fillRef idx="3">
+            <a:schemeClr val="accent1"/>
+          </a:fillRef>
+          <a:effectRef idx="2">
+            <a:schemeClr val="accent1"/>
+          </a:effectRef>
+          <a:fontRef idx="minor">
+            <a:schemeClr val="lt1"/>
+          </a:fontRef>
+        </p:style>
+        <p:txBody>
+          <a:bodyPr rtlCol="0" anchor="ctr"/>
+          <a:lstStyle/>
+          <a:p>
+            <a:pPr algn="ctr"/>
+          </a:p>
+        </p:txBody>
+      </p:sp>
+      <p:sp>
+        <p:nvSpPr>
+          <p:cNvPr id="15" name="TextBox 14"/>
+          <p:cNvSpPr txBox="1"/>
+          <p:nvPr/>
+        </p:nvSpPr>
+        <p:spPr>
+          <a:xfrm>
+            <a:off x="6126480" y="3401568"/>
+            <a:ext cx="2011680" cy="256032"/>
+          </a:xfrm>
+          <a:prstGeom prst="rect">
+            <a:avLst/>
+          </a:prstGeom>
+          <a:noFill/>
+        </p:spPr>
+        <p:txBody>
+          <a:bodyPr wrap="square">
+            <a:normAutofit/>
+          </a:bodyPr>
+          <a:lstStyle/>
+          <a:p>
+            <a:pPr algn="l"/>
+            <a:r>
+              <a:rPr sz="1700" b="1" i="0">
                 <a:solidFill>
                   <a:srgbClr val="0F172A"/>
                 </a:solidFill>
-              </a:defRPr>
-            </a:pPr>
-            <a:r>
-              <a:t>Price transparency is poor, so families cannot compare likely costs with confidence.</a:t>
-            </a:r>
-          </a:p>
-          <a:p>
-            <a:pPr>
-              <a:spcAft>
-                <a:spcPts val="1000"/>
-              </a:spcAft>
-              <a:defRPr sz="2000">
+                <a:latin typeface="Aptos"/>
+              </a:rPr>
+              <a:t>Insurance friction</a:t>
+            </a:r>
+          </a:p>
+        </p:txBody>
+      </p:sp>
+      <p:sp>
+        <p:nvSpPr>
+          <p:cNvPr id="16" name="TextBox 15"/>
+          <p:cNvSpPr txBox="1"/>
+          <p:nvPr/>
+        </p:nvSpPr>
+        <p:spPr>
+          <a:xfrm>
+            <a:off x="6126480" y="3721608"/>
+            <a:ext cx="4480560" cy="438912"/>
+          </a:xfrm>
+          <a:prstGeom prst="rect">
+            <a:avLst/>
+          </a:prstGeom>
+          <a:noFill/>
+        </p:spPr>
+        <p:txBody>
+          <a:bodyPr wrap="square">
+            <a:normAutofit/>
+          </a:bodyPr>
+          <a:lstStyle/>
+          <a:p>
+            <a:pPr algn="l"/>
+            <a:r>
+              <a:rPr sz="1200" b="0" i="0">
+                <a:solidFill>
+                  <a:srgbClr val="475569"/>
+                </a:solidFill>
+                <a:latin typeface="Aptos"/>
+              </a:rPr>
+              <a:t>Network and coverage checks take too long and break decision flow.</a:t>
+            </a:r>
+          </a:p>
+        </p:txBody>
+      </p:sp>
+      <p:sp>
+        <p:nvSpPr>
+          <p:cNvPr id="17" name="Rounded Rectangle 16"/>
+          <p:cNvSpPr/>
+          <p:nvPr/>
+        </p:nvSpPr>
+        <p:spPr>
+          <a:xfrm>
+            <a:off x="5623560" y="4608576"/>
+            <a:ext cx="5486400" cy="1170432"/>
+          </a:xfrm>
+          <a:prstGeom prst="roundRect">
+            <a:avLst/>
+          </a:prstGeom>
+          <a:solidFill>
+            <a:srgbClr val="FFFFFF"/>
+          </a:solidFill>
+          <a:ln>
+            <a:solidFill>
+              <a:srgbClr val="CBD5E1"/>
+            </a:solidFill>
+          </a:ln>
+        </p:spPr>
+        <p:style>
+          <a:lnRef idx="1">
+            <a:schemeClr val="accent1"/>
+          </a:lnRef>
+          <a:fillRef idx="3">
+            <a:schemeClr val="accent1"/>
+          </a:fillRef>
+          <a:effectRef idx="2">
+            <a:schemeClr val="accent1"/>
+          </a:effectRef>
+          <a:fontRef idx="minor">
+            <a:schemeClr val="lt1"/>
+          </a:fontRef>
+        </p:style>
+        <p:txBody>
+          <a:bodyPr rtlCol="0" anchor="ctr"/>
+          <a:lstStyle/>
+          <a:p>
+            <a:pPr algn="ctr"/>
+          </a:p>
+        </p:txBody>
+      </p:sp>
+      <p:sp>
+        <p:nvSpPr>
+          <p:cNvPr id="18" name="Rounded Rectangle 17"/>
+          <p:cNvSpPr/>
+          <p:nvPr/>
+        </p:nvSpPr>
+        <p:spPr>
+          <a:xfrm>
+            <a:off x="5806440" y="4791456"/>
+            <a:ext cx="164592" cy="804672"/>
+          </a:xfrm>
+          <a:prstGeom prst="roundRect">
+            <a:avLst/>
+          </a:prstGeom>
+          <a:solidFill>
+            <a:srgbClr val="05ABA5"/>
+          </a:solidFill>
+          <a:ln>
+            <a:solidFill>
+              <a:srgbClr val="05ABA5"/>
+            </a:solidFill>
+          </a:ln>
+        </p:spPr>
+        <p:style>
+          <a:lnRef idx="1">
+            <a:schemeClr val="accent1"/>
+          </a:lnRef>
+          <a:fillRef idx="3">
+            <a:schemeClr val="accent1"/>
+          </a:fillRef>
+          <a:effectRef idx="2">
+            <a:schemeClr val="accent1"/>
+          </a:effectRef>
+          <a:fontRef idx="minor">
+            <a:schemeClr val="lt1"/>
+          </a:fontRef>
+        </p:style>
+        <p:txBody>
+          <a:bodyPr rtlCol="0" anchor="ctr"/>
+          <a:lstStyle/>
+          <a:p>
+            <a:pPr algn="ctr"/>
+          </a:p>
+        </p:txBody>
+      </p:sp>
+      <p:sp>
+        <p:nvSpPr>
+          <p:cNvPr id="19" name="TextBox 18"/>
+          <p:cNvSpPr txBox="1"/>
+          <p:nvPr/>
+        </p:nvSpPr>
+        <p:spPr>
+          <a:xfrm>
+            <a:off x="6126480" y="4791456"/>
+            <a:ext cx="2011680" cy="256032"/>
+          </a:xfrm>
+          <a:prstGeom prst="rect">
+            <a:avLst/>
+          </a:prstGeom>
+          <a:noFill/>
+        </p:spPr>
+        <p:txBody>
+          <a:bodyPr wrap="square">
+            <a:normAutofit/>
+          </a:bodyPr>
+          <a:lstStyle/>
+          <a:p>
+            <a:pPr algn="l"/>
+            <a:r>
+              <a:rPr sz="1700" b="1" i="0">
                 <a:solidFill>
                   <a:srgbClr val="0F172A"/>
                 </a:solidFill>
-              </a:defRPr>
-            </a:pPr>
-            <a:r>
-              <a:t>Insurance network and coverage checks are confusing and time-consuming.</a:t>
-            </a:r>
-          </a:p>
-          <a:p>
-            <a:pPr>
-              <a:spcAft>
-                <a:spcPts val="1000"/>
-              </a:spcAft>
-              <a:defRPr sz="2000">
-                <a:solidFill>
-                  <a:srgbClr val="0F172A"/>
-                </a:solidFill>
-              </a:defRPr>
-            </a:pPr>
-            <a:r>
-              <a:t>Booking a consultation or surgery often requires manual calls and follow-ups.</a:t>
+                <a:latin typeface="Aptos"/>
+              </a:rPr>
+              <a:t>No clean booking path</a:t>
+            </a:r>
+          </a:p>
+        </p:txBody>
+      </p:sp>
+      <p:sp>
+        <p:nvSpPr>
+          <p:cNvPr id="20" name="TextBox 19"/>
+          <p:cNvSpPr txBox="1"/>
+          <p:nvPr/>
+        </p:nvSpPr>
+        <p:spPr>
+          <a:xfrm>
+            <a:off x="6126480" y="5111496"/>
+            <a:ext cx="4480560" cy="438912"/>
+          </a:xfrm>
+          <a:prstGeom prst="rect">
+            <a:avLst/>
+          </a:prstGeom>
+          <a:noFill/>
+        </p:spPr>
+        <p:txBody>
+          <a:bodyPr wrap="square">
+            <a:normAutofit/>
+          </a:bodyPr>
+          <a:lstStyle/>
+          <a:p>
+            <a:pPr algn="l"/>
+            <a:r>
+              <a:rPr sz="1200" b="0" i="0">
+                <a:solidFill>
+                  <a:srgbClr val="475569"/>
+                </a:solidFill>
+                <a:latin typeface="Aptos"/>
+              </a:rPr>
+              <a:t>Discovery and booking are disconnected, so conversion stalls.</a:t>
+            </a:r>
+          </a:p>
+        </p:txBody>
+      </p:sp>
+      <p:sp>
+        <p:nvSpPr>
+          <p:cNvPr id="21" name="Rounded Rectangle 20"/>
+          <p:cNvSpPr/>
+          <p:nvPr/>
+        </p:nvSpPr>
+        <p:spPr>
+          <a:xfrm>
+            <a:off x="10789920" y="502920"/>
+            <a:ext cx="868680" cy="384048"/>
+          </a:xfrm>
+          <a:prstGeom prst="roundRect">
+            <a:avLst/>
+          </a:prstGeom>
+          <a:solidFill>
+            <a:srgbClr val="05ABA5"/>
+          </a:solidFill>
+          <a:ln>
+            <a:solidFill>
+              <a:srgbClr val="05ABA5"/>
+            </a:solidFill>
+          </a:ln>
+        </p:spPr>
+        <p:style>
+          <a:lnRef idx="1">
+            <a:schemeClr val="accent1"/>
+          </a:lnRef>
+          <a:fillRef idx="3">
+            <a:schemeClr val="accent1"/>
+          </a:fillRef>
+          <a:effectRef idx="2">
+            <a:schemeClr val="accent1"/>
+          </a:effectRef>
+          <a:fontRef idx="minor">
+            <a:schemeClr val="lt1"/>
+          </a:fontRef>
+        </p:style>
+        <p:txBody>
+          <a:bodyPr rtlCol="0" anchor="ctr"/>
+          <a:lstStyle/>
+          <a:p>
+            <a:pPr algn="ctr"/>
+          </a:p>
+        </p:txBody>
+      </p:sp>
+      <p:sp>
+        <p:nvSpPr>
+          <p:cNvPr id="22" name="TextBox 21"/>
+          <p:cNvSpPr txBox="1"/>
+          <p:nvPr/>
+        </p:nvSpPr>
+        <p:spPr>
+          <a:xfrm>
+            <a:off x="10789920" y="530352"/>
+            <a:ext cx="868680" cy="256032"/>
+          </a:xfrm>
+          <a:prstGeom prst="rect">
+            <a:avLst/>
+          </a:prstGeom>
+          <a:noFill/>
+        </p:spPr>
+        <p:txBody>
+          <a:bodyPr wrap="square">
+            <a:normAutofit/>
+          </a:bodyPr>
+          <a:lstStyle/>
+          <a:p>
+            <a:pPr algn="ctr"/>
+            <a:r>
+              <a:rPr sz="1100" b="1" i="0">
+                <a:solidFill>
+                  <a:srgbClr val="FFFFFF"/>
+                </a:solidFill>
+                <a:latin typeface="Aptos"/>
+              </a:rPr>
+              <a:t>02</a:t>
             </a:r>
           </a:p>
         </p:txBody>
@@ -5010,7 +4857,7 @@
     <p:bg>
       <p:bgPr>
         <a:solidFill>
-          <a:srgbClr val="FFFFFF"/>
+          <a:srgbClr val="F8FAFC"/>
         </a:solidFill>
         <a:effectLst/>
       </p:bgPr>
@@ -5030,18 +4877,18 @@
         </p:nvSpPr>
         <p:spPr>
           <a:xfrm>
-            <a:off x="411480" y="320040"/>
-            <a:ext cx="11338560" cy="822960"/>
+            <a:off x="502920" y="384048"/>
+            <a:ext cx="1874519" cy="457200"/>
           </a:xfrm>
           <a:prstGeom prst="roundRect">
             <a:avLst/>
           </a:prstGeom>
           <a:solidFill>
-            <a:srgbClr val="F0FDFA"/>
+            <a:srgbClr val="ECFEFF"/>
           </a:solidFill>
           <a:ln>
             <a:solidFill>
-              <a:srgbClr val="CCFBF1"/>
+              <a:srgbClr val="A5F3FC"/>
             </a:solidFill>
           </a:ln>
         </p:spPr>
@@ -5075,51 +4922,123 @@
         </p:nvSpPr>
         <p:spPr>
           <a:xfrm>
-            <a:off x="685800" y="475488"/>
-            <a:ext cx="7772400" cy="411480"/>
-          </a:xfrm>
-          <a:prstGeom prst="rect">
-            <a:avLst/>
-          </a:prstGeom>
-          <a:noFill/>
-        </p:spPr>
-        <p:txBody>
-          <a:bodyPr wrap="none">
-            <a:spAutoFit/>
-          </a:bodyPr>
-          <a:lstStyle/>
-          <a:p>
-            <a:r>
-              <a:rPr sz="2800" b="1">
+            <a:off x="658368" y="493776"/>
+            <a:ext cx="1554480" cy="182880"/>
+          </a:xfrm>
+          <a:prstGeom prst="rect">
+            <a:avLst/>
+          </a:prstGeom>
+          <a:noFill/>
+        </p:spPr>
+        <p:txBody>
+          <a:bodyPr wrap="square">
+            <a:normAutofit/>
+          </a:bodyPr>
+          <a:lstStyle/>
+          <a:p>
+            <a:pPr algn="l"/>
+            <a:r>
+              <a:rPr sz="1100" b="1" i="0">
+                <a:solidFill>
+                  <a:srgbClr val="0D746F"/>
+                </a:solidFill>
+                <a:latin typeface="Aptos"/>
+              </a:rPr>
+              <a:t>THE PRODUCT</a:t>
+            </a:r>
+          </a:p>
+        </p:txBody>
+      </p:sp>
+      <p:sp>
+        <p:nvSpPr>
+          <p:cNvPr id="4" name="TextBox 3"/>
+          <p:cNvSpPr txBox="1"/>
+          <p:nvPr/>
+        </p:nvSpPr>
+        <p:spPr>
+          <a:xfrm>
+            <a:off x="640080" y="914400"/>
+            <a:ext cx="5486400" cy="822960"/>
+          </a:xfrm>
+          <a:prstGeom prst="rect">
+            <a:avLst/>
+          </a:prstGeom>
+          <a:noFill/>
+        </p:spPr>
+        <p:txBody>
+          <a:bodyPr wrap="square">
+            <a:normAutofit/>
+          </a:bodyPr>
+          <a:lstStyle/>
+          <a:p>
+            <a:pPr algn="l"/>
+            <a:r>
+              <a:rPr sz="2800" b="1" i="0">
                 <a:solidFill>
                   <a:srgbClr val="0F172A"/>
                 </a:solidFill>
-              </a:rPr>
-              <a:t>Solution</a:t>
-            </a:r>
-          </a:p>
-        </p:txBody>
-      </p:sp>
-      <p:sp>
-        <p:nvSpPr>
-          <p:cNvPr id="4" name="Rounded Rectangle 3"/>
+                <a:latin typeface="Aptos"/>
+              </a:rPr>
+              <a:t>SurgiFind turns surgery discovery into one connected workflow.</a:t>
+            </a:r>
+          </a:p>
+        </p:txBody>
+      </p:sp>
+      <p:sp>
+        <p:nvSpPr>
+          <p:cNvPr id="5" name="TextBox 4"/>
+          <p:cNvSpPr txBox="1"/>
+          <p:nvPr/>
+        </p:nvSpPr>
+        <p:spPr>
+          <a:xfrm>
+            <a:off x="640080" y="1572768"/>
+            <a:ext cx="5303520" cy="594360"/>
+          </a:xfrm>
+          <a:prstGeom prst="rect">
+            <a:avLst/>
+          </a:prstGeom>
+          <a:noFill/>
+        </p:spPr>
+        <p:txBody>
+          <a:bodyPr wrap="square">
+            <a:normAutofit/>
+          </a:bodyPr>
+          <a:lstStyle/>
+          <a:p>
+            <a:pPr algn="l"/>
+            <a:r>
+              <a:rPr sz="1500" b="0" i="0">
+                <a:solidFill>
+                  <a:srgbClr val="475569"/>
+                </a:solidFill>
+                <a:latin typeface="Aptos"/>
+              </a:rPr>
+              <a:t>Instead of asking patients to stitch together research, cost checks, insurance lookup, and booking, we orchestrate it in one place.</a:t>
+            </a:r>
+          </a:p>
+        </p:txBody>
+      </p:sp>
+      <p:sp>
+        <p:nvSpPr>
+          <p:cNvPr id="6" name="Rounded Rectangle 5"/>
           <p:cNvSpPr/>
           <p:nvPr/>
         </p:nvSpPr>
         <p:spPr>
           <a:xfrm>
-            <a:off x="10058400" y="475488"/>
-            <a:ext cx="1097280" cy="310896"/>
+            <a:off x="658368" y="2331720"/>
+            <a:ext cx="4754880" cy="3520440"/>
           </a:xfrm>
           <a:prstGeom prst="roundRect">
             <a:avLst/>
           </a:prstGeom>
           <a:solidFill>
-            <a:srgbClr val="0D9488"/>
+            <a:srgbClr val="FFFFFF"/>
           </a:solidFill>
           <a:ln>
             <a:solidFill>
-              <a:srgbClr val="0D9488"/>
+              <a:srgbClr val="CBD5E1"/>
             </a:solidFill>
           </a:ln>
         </p:spPr>
@@ -5147,48 +5066,187 @@
       </p:sp>
       <p:sp>
         <p:nvSpPr>
-          <p:cNvPr id="5" name="TextBox 4"/>
-          <p:cNvSpPr txBox="1"/>
-          <p:nvPr/>
-        </p:nvSpPr>
-        <p:spPr>
-          <a:xfrm>
-            <a:off x="10058400" y="512064"/>
-            <a:ext cx="1097280" cy="228600"/>
-          </a:xfrm>
-          <a:prstGeom prst="rect">
-            <a:avLst/>
-          </a:prstGeom>
-          <a:noFill/>
-        </p:spPr>
-        <p:txBody>
-          <a:bodyPr wrap="none">
-            <a:spAutoFit/>
-          </a:bodyPr>
-          <a:lstStyle/>
-          <a:p>
-            <a:pPr algn="ctr"/>
-            <a:r>
-              <a:rPr sz="1200" b="1">
-                <a:solidFill>
-                  <a:srgbClr val="FFFFFF"/>
-                </a:solidFill>
-              </a:rPr>
-              <a:t>03</a:t>
-            </a:r>
-          </a:p>
-        </p:txBody>
-      </p:sp>
-      <p:sp>
-        <p:nvSpPr>
-          <p:cNvPr id="6" name="Rounded Rectangle 5"/>
+          <p:cNvPr id="7" name="TextBox 6"/>
+          <p:cNvSpPr txBox="1"/>
+          <p:nvPr/>
+        </p:nvSpPr>
+        <p:spPr>
+          <a:xfrm>
+            <a:off x="932688" y="2651760"/>
+            <a:ext cx="4114800" cy="320040"/>
+          </a:xfrm>
+          <a:prstGeom prst="rect">
+            <a:avLst/>
+          </a:prstGeom>
+          <a:noFill/>
+        </p:spPr>
+        <p:txBody>
+          <a:bodyPr wrap="square">
+            <a:normAutofit/>
+          </a:bodyPr>
+          <a:lstStyle/>
+          <a:p>
+            <a:pPr algn="l"/>
+            <a:r>
+              <a:rPr sz="1300" b="1" i="0">
+                <a:solidFill>
+                  <a:srgbClr val="0D746F"/>
+                </a:solidFill>
+                <a:latin typeface="Aptos"/>
+              </a:rPr>
+              <a:t>The wedge</a:t>
+            </a:r>
+          </a:p>
+        </p:txBody>
+      </p:sp>
+      <p:sp>
+        <p:nvSpPr>
+          <p:cNvPr id="8" name="TextBox 7"/>
+          <p:cNvSpPr txBox="1"/>
+          <p:nvPr/>
+        </p:nvSpPr>
+        <p:spPr>
+          <a:xfrm>
+            <a:off x="932688" y="3017520"/>
+            <a:ext cx="3977639" cy="914400"/>
+          </a:xfrm>
+          <a:prstGeom prst="rect">
+            <a:avLst/>
+          </a:prstGeom>
+          <a:noFill/>
+        </p:spPr>
+        <p:txBody>
+          <a:bodyPr wrap="square">
+            <a:normAutofit/>
+          </a:bodyPr>
+          <a:lstStyle/>
+          <a:p>
+            <a:pPr algn="l"/>
+            <a:r>
+              <a:rPr sz="2600" b="1" i="0">
+                <a:solidFill>
+                  <a:srgbClr val="0F172A"/>
+                </a:solidFill>
+                <a:latin typeface="Aptos"/>
+              </a:rPr>
+              <a:t>Search + transparency + booking</a:t>
+            </a:r>
+          </a:p>
+        </p:txBody>
+      </p:sp>
+      <p:sp>
+        <p:nvSpPr>
+          <p:cNvPr id="9" name="TextBox 8"/>
+          <p:cNvSpPr txBox="1"/>
+          <p:nvPr/>
+        </p:nvSpPr>
+        <p:spPr>
+          <a:xfrm>
+            <a:off x="932688" y="3977639"/>
+            <a:ext cx="3840480" cy="1554480"/>
+          </a:xfrm>
+          <a:prstGeom prst="rect">
+            <a:avLst/>
+          </a:prstGeom>
+          <a:noFill/>
+        </p:spPr>
+        <p:txBody>
+          <a:bodyPr wrap="square">
+            <a:normAutofit/>
+          </a:bodyPr>
+          <a:lstStyle/>
+          <a:p>
+            <a:pPr>
+              <a:spcAft>
+                <a:spcPts val="800"/>
+              </a:spcAft>
+              <a:defRPr sz="1500">
+                <a:solidFill>
+                  <a:srgbClr val="0F172A"/>
+                </a:solidFill>
+              </a:defRPr>
+            </a:pPr>
+            <a:r>
+              <a:rPr>
+                <a:solidFill>
+                  <a:srgbClr val="0F172A"/>
+                </a:solidFill>
+              </a:rPr>
+              <a:t>Hospital and surgery search with filters</a:t>
+            </a:r>
+          </a:p>
+          <a:p>
+            <a:pPr>
+              <a:spcAft>
+                <a:spcPts val="800"/>
+              </a:spcAft>
+              <a:defRPr sz="1500">
+                <a:solidFill>
+                  <a:srgbClr val="0F172A"/>
+                </a:solidFill>
+              </a:defRPr>
+            </a:pPr>
+            <a:r>
+              <a:rPr>
+                <a:solidFill>
+                  <a:srgbClr val="0F172A"/>
+                </a:solidFill>
+              </a:rPr>
+              <a:t>Price and insurance context before action</a:t>
+            </a:r>
+          </a:p>
+          <a:p>
+            <a:pPr>
+              <a:spcAft>
+                <a:spcPts val="800"/>
+              </a:spcAft>
+              <a:defRPr sz="1500">
+                <a:solidFill>
+                  <a:srgbClr val="0F172A"/>
+                </a:solidFill>
+              </a:defRPr>
+            </a:pPr>
+            <a:r>
+              <a:rPr>
+                <a:solidFill>
+                  <a:srgbClr val="0F172A"/>
+                </a:solidFill>
+              </a:rPr>
+              <a:t>Chat guidance for natural-language discovery</a:t>
+            </a:r>
+          </a:p>
+          <a:p>
+            <a:pPr>
+              <a:spcAft>
+                <a:spcPts val="800"/>
+              </a:spcAft>
+              <a:defRPr sz="1500">
+                <a:solidFill>
+                  <a:srgbClr val="0F172A"/>
+                </a:solidFill>
+              </a:defRPr>
+            </a:pPr>
+            <a:r>
+              <a:rPr>
+                <a:solidFill>
+                  <a:srgbClr val="0F172A"/>
+                </a:solidFill>
+              </a:rPr>
+              <a:t>Authenticated booking and booking history</a:t>
+            </a:r>
+          </a:p>
+        </p:txBody>
+      </p:sp>
+      <p:sp>
+        <p:nvSpPr>
+          <p:cNvPr id="10" name="Rounded Rectangle 9"/>
           <p:cNvSpPr/>
           <p:nvPr/>
         </p:nvSpPr>
         <p:spPr>
           <a:xfrm>
-            <a:off x="640080" y="1417320"/>
-            <a:ext cx="10972800" cy="4846320"/>
+            <a:off x="5806440" y="2606040"/>
+            <a:ext cx="1325880" cy="2331720"/>
           </a:xfrm>
           <a:prstGeom prst="roundRect">
             <a:avLst/>
@@ -5198,7 +5256,7 @@
           </a:solidFill>
           <a:ln>
             <a:solidFill>
-              <a:srgbClr val="E2E8F0"/>
+              <a:srgbClr val="99F6E4"/>
             </a:solidFill>
           </a:ln>
         </p:spPr>
@@ -5226,98 +5284,920 @@
       </p:sp>
       <p:sp>
         <p:nvSpPr>
-          <p:cNvPr id="7" name="TextBox 6"/>
-          <p:cNvSpPr txBox="1"/>
-          <p:nvPr/>
-        </p:nvSpPr>
-        <p:spPr>
-          <a:xfrm>
-            <a:off x="914400" y="1783080"/>
-            <a:ext cx="9875520" cy="3566160"/>
-          </a:xfrm>
-          <a:prstGeom prst="rect">
-            <a:avLst/>
-          </a:prstGeom>
-          <a:noFill/>
-        </p:spPr>
-        <p:txBody>
-          <a:bodyPr wrap="square">
-            <a:spAutoFit/>
-          </a:bodyPr>
-          <a:lstStyle/>
-          <a:p>
-            <a:pPr>
-              <a:spcAft>
-                <a:spcPts val="1000"/>
-              </a:spcAft>
-              <a:defRPr sz="2000">
+          <p:cNvPr id="11" name="Rounded Rectangle 10"/>
+          <p:cNvSpPr/>
+          <p:nvPr/>
+        </p:nvSpPr>
+        <p:spPr>
+          <a:xfrm>
+            <a:off x="6117336" y="2816352"/>
+            <a:ext cx="713232" cy="384048"/>
+          </a:xfrm>
+          <a:prstGeom prst="roundRect">
+            <a:avLst/>
+          </a:prstGeom>
+          <a:solidFill>
+            <a:srgbClr val="05ABA5"/>
+          </a:solidFill>
+          <a:ln>
+            <a:solidFill>
+              <a:srgbClr val="05ABA5"/>
+            </a:solidFill>
+          </a:ln>
+        </p:spPr>
+        <p:style>
+          <a:lnRef idx="1">
+            <a:schemeClr val="accent1"/>
+          </a:lnRef>
+          <a:fillRef idx="3">
+            <a:schemeClr val="accent1"/>
+          </a:fillRef>
+          <a:effectRef idx="2">
+            <a:schemeClr val="accent1"/>
+          </a:effectRef>
+          <a:fontRef idx="minor">
+            <a:schemeClr val="lt1"/>
+          </a:fontRef>
+        </p:style>
+        <p:txBody>
+          <a:bodyPr rtlCol="0" anchor="ctr"/>
+          <a:lstStyle/>
+          <a:p>
+            <a:pPr algn="ctr"/>
+          </a:p>
+        </p:txBody>
+      </p:sp>
+      <p:sp>
+        <p:nvSpPr>
+          <p:cNvPr id="12" name="TextBox 11"/>
+          <p:cNvSpPr txBox="1"/>
+          <p:nvPr/>
+        </p:nvSpPr>
+        <p:spPr>
+          <a:xfrm>
+            <a:off x="6117336" y="2843784"/>
+            <a:ext cx="713232" cy="256032"/>
+          </a:xfrm>
+          <a:prstGeom prst="rect">
+            <a:avLst/>
+          </a:prstGeom>
+          <a:noFill/>
+        </p:spPr>
+        <p:txBody>
+          <a:bodyPr wrap="square">
+            <a:normAutofit/>
+          </a:bodyPr>
+          <a:lstStyle/>
+          <a:p>
+            <a:pPr algn="ctr"/>
+            <a:r>
+              <a:rPr sz="1100" b="1" i="0">
+                <a:solidFill>
+                  <a:srgbClr val="FFFFFF"/>
+                </a:solidFill>
+                <a:latin typeface="Aptos"/>
+              </a:rPr>
+              <a:t>01</a:t>
+            </a:r>
+          </a:p>
+        </p:txBody>
+      </p:sp>
+      <p:sp>
+        <p:nvSpPr>
+          <p:cNvPr id="13" name="TextBox 12"/>
+          <p:cNvSpPr txBox="1"/>
+          <p:nvPr/>
+        </p:nvSpPr>
+        <p:spPr>
+          <a:xfrm>
+            <a:off x="5971031" y="3456432"/>
+            <a:ext cx="960120" cy="320040"/>
+          </a:xfrm>
+          <a:prstGeom prst="rect">
+            <a:avLst/>
+          </a:prstGeom>
+          <a:noFill/>
+        </p:spPr>
+        <p:txBody>
+          <a:bodyPr wrap="square">
+            <a:normAutofit/>
+          </a:bodyPr>
+          <a:lstStyle/>
+          <a:p>
+            <a:pPr algn="ctr"/>
+            <a:r>
+              <a:rPr sz="1800" b="1" i="0">
                 <a:solidFill>
                   <a:srgbClr val="0F172A"/>
                 </a:solidFill>
-              </a:defRPr>
-            </a:pPr>
-            <a:r>
-              <a:t>Hospital and surgery search</a:t>
-            </a:r>
-          </a:p>
-          <a:p>
-            <a:pPr>
-              <a:spcAft>
-                <a:spcPts val="1000"/>
-              </a:spcAft>
-              <a:defRPr sz="2000">
+                <a:latin typeface="Aptos"/>
+              </a:rPr>
+              <a:t>Search</a:t>
+            </a:r>
+          </a:p>
+        </p:txBody>
+      </p:sp>
+      <p:sp>
+        <p:nvSpPr>
+          <p:cNvPr id="14" name="TextBox 13"/>
+          <p:cNvSpPr txBox="1"/>
+          <p:nvPr/>
+        </p:nvSpPr>
+        <p:spPr>
+          <a:xfrm>
+            <a:off x="5916168" y="3886200"/>
+            <a:ext cx="1078992" cy="685800"/>
+          </a:xfrm>
+          <a:prstGeom prst="rect">
+            <a:avLst/>
+          </a:prstGeom>
+          <a:noFill/>
+        </p:spPr>
+        <p:txBody>
+          <a:bodyPr wrap="square">
+            <a:normAutofit/>
+          </a:bodyPr>
+          <a:lstStyle/>
+          <a:p>
+            <a:pPr algn="ctr"/>
+            <a:r>
+              <a:rPr sz="1100" b="0" i="0">
+                <a:solidFill>
+                  <a:srgbClr val="475569"/>
+                </a:solidFill>
+                <a:latin typeface="Aptos"/>
+              </a:rPr>
+              <a:t>Surgery, city, budget, rating</a:t>
+            </a:r>
+          </a:p>
+        </p:txBody>
+      </p:sp>
+      <p:sp>
+        <p:nvSpPr>
+          <p:cNvPr id="15" name="TextBox 14"/>
+          <p:cNvSpPr txBox="1"/>
+          <p:nvPr/>
+        </p:nvSpPr>
+        <p:spPr>
+          <a:xfrm>
+            <a:off x="7159752" y="3675887"/>
+            <a:ext cx="320040" cy="228600"/>
+          </a:xfrm>
+          <a:prstGeom prst="rect">
+            <a:avLst/>
+          </a:prstGeom>
+          <a:noFill/>
+        </p:spPr>
+        <p:txBody>
+          <a:bodyPr wrap="square">
+            <a:normAutofit/>
+          </a:bodyPr>
+          <a:lstStyle/>
+          <a:p>
+            <a:pPr algn="ctr"/>
+            <a:r>
+              <a:rPr sz="2400" b="1" i="0">
+                <a:solidFill>
+                  <a:srgbClr val="0D746F"/>
+                </a:solidFill>
+                <a:latin typeface="Aptos"/>
+              </a:rPr>
+              <a:t>→</a:t>
+            </a:r>
+          </a:p>
+        </p:txBody>
+      </p:sp>
+      <p:sp>
+        <p:nvSpPr>
+          <p:cNvPr id="16" name="Rounded Rectangle 15"/>
+          <p:cNvSpPr/>
+          <p:nvPr/>
+        </p:nvSpPr>
+        <p:spPr>
+          <a:xfrm>
+            <a:off x="7287768" y="2606040"/>
+            <a:ext cx="1325880" cy="2331720"/>
+          </a:xfrm>
+          <a:prstGeom prst="roundRect">
+            <a:avLst/>
+          </a:prstGeom>
+          <a:solidFill>
+            <a:srgbClr val="FFFFFF"/>
+          </a:solidFill>
+          <a:ln>
+            <a:solidFill>
+              <a:srgbClr val="99F6E4"/>
+            </a:solidFill>
+          </a:ln>
+        </p:spPr>
+        <p:style>
+          <a:lnRef idx="1">
+            <a:schemeClr val="accent1"/>
+          </a:lnRef>
+          <a:fillRef idx="3">
+            <a:schemeClr val="accent1"/>
+          </a:fillRef>
+          <a:effectRef idx="2">
+            <a:schemeClr val="accent1"/>
+          </a:effectRef>
+          <a:fontRef idx="minor">
+            <a:schemeClr val="lt1"/>
+          </a:fontRef>
+        </p:style>
+        <p:txBody>
+          <a:bodyPr rtlCol="0" anchor="ctr"/>
+          <a:lstStyle/>
+          <a:p>
+            <a:pPr algn="ctr"/>
+          </a:p>
+        </p:txBody>
+      </p:sp>
+      <p:sp>
+        <p:nvSpPr>
+          <p:cNvPr id="17" name="Rounded Rectangle 16"/>
+          <p:cNvSpPr/>
+          <p:nvPr/>
+        </p:nvSpPr>
+        <p:spPr>
+          <a:xfrm>
+            <a:off x="7598664" y="2816352"/>
+            <a:ext cx="713232" cy="384048"/>
+          </a:xfrm>
+          <a:prstGeom prst="roundRect">
+            <a:avLst/>
+          </a:prstGeom>
+          <a:solidFill>
+            <a:srgbClr val="05ABA5"/>
+          </a:solidFill>
+          <a:ln>
+            <a:solidFill>
+              <a:srgbClr val="05ABA5"/>
+            </a:solidFill>
+          </a:ln>
+        </p:spPr>
+        <p:style>
+          <a:lnRef idx="1">
+            <a:schemeClr val="accent1"/>
+          </a:lnRef>
+          <a:fillRef idx="3">
+            <a:schemeClr val="accent1"/>
+          </a:fillRef>
+          <a:effectRef idx="2">
+            <a:schemeClr val="accent1"/>
+          </a:effectRef>
+          <a:fontRef idx="minor">
+            <a:schemeClr val="lt1"/>
+          </a:fontRef>
+        </p:style>
+        <p:txBody>
+          <a:bodyPr rtlCol="0" anchor="ctr"/>
+          <a:lstStyle/>
+          <a:p>
+            <a:pPr algn="ctr"/>
+          </a:p>
+        </p:txBody>
+      </p:sp>
+      <p:sp>
+        <p:nvSpPr>
+          <p:cNvPr id="18" name="TextBox 17"/>
+          <p:cNvSpPr txBox="1"/>
+          <p:nvPr/>
+        </p:nvSpPr>
+        <p:spPr>
+          <a:xfrm>
+            <a:off x="7598664" y="2843784"/>
+            <a:ext cx="713232" cy="256032"/>
+          </a:xfrm>
+          <a:prstGeom prst="rect">
+            <a:avLst/>
+          </a:prstGeom>
+          <a:noFill/>
+        </p:spPr>
+        <p:txBody>
+          <a:bodyPr wrap="square">
+            <a:normAutofit/>
+          </a:bodyPr>
+          <a:lstStyle/>
+          <a:p>
+            <a:pPr algn="ctr"/>
+            <a:r>
+              <a:rPr sz="1100" b="1" i="0">
+                <a:solidFill>
+                  <a:srgbClr val="FFFFFF"/>
+                </a:solidFill>
+                <a:latin typeface="Aptos"/>
+              </a:rPr>
+              <a:t>02</a:t>
+            </a:r>
+          </a:p>
+        </p:txBody>
+      </p:sp>
+      <p:sp>
+        <p:nvSpPr>
+          <p:cNvPr id="19" name="TextBox 18"/>
+          <p:cNvSpPr txBox="1"/>
+          <p:nvPr/>
+        </p:nvSpPr>
+        <p:spPr>
+          <a:xfrm>
+            <a:off x="7452360" y="3456432"/>
+            <a:ext cx="960120" cy="320040"/>
+          </a:xfrm>
+          <a:prstGeom prst="rect">
+            <a:avLst/>
+          </a:prstGeom>
+          <a:noFill/>
+        </p:spPr>
+        <p:txBody>
+          <a:bodyPr wrap="square">
+            <a:normAutofit/>
+          </a:bodyPr>
+          <a:lstStyle/>
+          <a:p>
+            <a:pPr algn="ctr"/>
+            <a:r>
+              <a:rPr sz="1800" b="1" i="0">
                 <a:solidFill>
                   <a:srgbClr val="0F172A"/>
                 </a:solidFill>
-              </a:defRPr>
-            </a:pPr>
-            <a:r>
-              <a:t>Cost range comparison</a:t>
-            </a:r>
-          </a:p>
-          <a:p>
-            <a:pPr>
-              <a:spcAft>
-                <a:spcPts val="1000"/>
-              </a:spcAft>
-              <a:defRPr sz="2000">
+                <a:latin typeface="Aptos"/>
+              </a:rPr>
+              <a:t>Compare</a:t>
+            </a:r>
+          </a:p>
+        </p:txBody>
+      </p:sp>
+      <p:sp>
+        <p:nvSpPr>
+          <p:cNvPr id="20" name="TextBox 19"/>
+          <p:cNvSpPr txBox="1"/>
+          <p:nvPr/>
+        </p:nvSpPr>
+        <p:spPr>
+          <a:xfrm>
+            <a:off x="7397496" y="3886200"/>
+            <a:ext cx="1078992" cy="685800"/>
+          </a:xfrm>
+          <a:prstGeom prst="rect">
+            <a:avLst/>
+          </a:prstGeom>
+          <a:noFill/>
+        </p:spPr>
+        <p:txBody>
+          <a:bodyPr wrap="square">
+            <a:normAutofit/>
+          </a:bodyPr>
+          <a:lstStyle/>
+          <a:p>
+            <a:pPr algn="ctr"/>
+            <a:r>
+              <a:rPr sz="1100" b="0" i="0">
+                <a:solidFill>
+                  <a:srgbClr val="475569"/>
+                </a:solidFill>
+                <a:latin typeface="Aptos"/>
+              </a:rPr>
+              <a:t>Hospital options and price ranges</a:t>
+            </a:r>
+          </a:p>
+        </p:txBody>
+      </p:sp>
+      <p:sp>
+        <p:nvSpPr>
+          <p:cNvPr id="21" name="TextBox 20"/>
+          <p:cNvSpPr txBox="1"/>
+          <p:nvPr/>
+        </p:nvSpPr>
+        <p:spPr>
+          <a:xfrm>
+            <a:off x="8641080" y="3675887"/>
+            <a:ext cx="320040" cy="228600"/>
+          </a:xfrm>
+          <a:prstGeom prst="rect">
+            <a:avLst/>
+          </a:prstGeom>
+          <a:noFill/>
+        </p:spPr>
+        <p:txBody>
+          <a:bodyPr wrap="square">
+            <a:normAutofit/>
+          </a:bodyPr>
+          <a:lstStyle/>
+          <a:p>
+            <a:pPr algn="ctr"/>
+            <a:r>
+              <a:rPr sz="2400" b="1" i="0">
+                <a:solidFill>
+                  <a:srgbClr val="0D746F"/>
+                </a:solidFill>
+                <a:latin typeface="Aptos"/>
+              </a:rPr>
+              <a:t>→</a:t>
+            </a:r>
+          </a:p>
+        </p:txBody>
+      </p:sp>
+      <p:sp>
+        <p:nvSpPr>
+          <p:cNvPr id="22" name="Rounded Rectangle 21"/>
+          <p:cNvSpPr/>
+          <p:nvPr/>
+        </p:nvSpPr>
+        <p:spPr>
+          <a:xfrm>
+            <a:off x="8769096" y="2606040"/>
+            <a:ext cx="1325880" cy="2331720"/>
+          </a:xfrm>
+          <a:prstGeom prst="roundRect">
+            <a:avLst/>
+          </a:prstGeom>
+          <a:solidFill>
+            <a:srgbClr val="FFFFFF"/>
+          </a:solidFill>
+          <a:ln>
+            <a:solidFill>
+              <a:srgbClr val="99F6E4"/>
+            </a:solidFill>
+          </a:ln>
+        </p:spPr>
+        <p:style>
+          <a:lnRef idx="1">
+            <a:schemeClr val="accent1"/>
+          </a:lnRef>
+          <a:fillRef idx="3">
+            <a:schemeClr val="accent1"/>
+          </a:fillRef>
+          <a:effectRef idx="2">
+            <a:schemeClr val="accent1"/>
+          </a:effectRef>
+          <a:fontRef idx="minor">
+            <a:schemeClr val="lt1"/>
+          </a:fontRef>
+        </p:style>
+        <p:txBody>
+          <a:bodyPr rtlCol="0" anchor="ctr"/>
+          <a:lstStyle/>
+          <a:p>
+            <a:pPr algn="ctr"/>
+          </a:p>
+        </p:txBody>
+      </p:sp>
+      <p:sp>
+        <p:nvSpPr>
+          <p:cNvPr id="23" name="Rounded Rectangle 22"/>
+          <p:cNvSpPr/>
+          <p:nvPr/>
+        </p:nvSpPr>
+        <p:spPr>
+          <a:xfrm>
+            <a:off x="9079992" y="2816352"/>
+            <a:ext cx="713232" cy="384048"/>
+          </a:xfrm>
+          <a:prstGeom prst="roundRect">
+            <a:avLst/>
+          </a:prstGeom>
+          <a:solidFill>
+            <a:srgbClr val="05ABA5"/>
+          </a:solidFill>
+          <a:ln>
+            <a:solidFill>
+              <a:srgbClr val="05ABA5"/>
+            </a:solidFill>
+          </a:ln>
+        </p:spPr>
+        <p:style>
+          <a:lnRef idx="1">
+            <a:schemeClr val="accent1"/>
+          </a:lnRef>
+          <a:fillRef idx="3">
+            <a:schemeClr val="accent1"/>
+          </a:fillRef>
+          <a:effectRef idx="2">
+            <a:schemeClr val="accent1"/>
+          </a:effectRef>
+          <a:fontRef idx="minor">
+            <a:schemeClr val="lt1"/>
+          </a:fontRef>
+        </p:style>
+        <p:txBody>
+          <a:bodyPr rtlCol="0" anchor="ctr"/>
+          <a:lstStyle/>
+          <a:p>
+            <a:pPr algn="ctr"/>
+          </a:p>
+        </p:txBody>
+      </p:sp>
+      <p:sp>
+        <p:nvSpPr>
+          <p:cNvPr id="24" name="TextBox 23"/>
+          <p:cNvSpPr txBox="1"/>
+          <p:nvPr/>
+        </p:nvSpPr>
+        <p:spPr>
+          <a:xfrm>
+            <a:off x="9079992" y="2843784"/>
+            <a:ext cx="713232" cy="256032"/>
+          </a:xfrm>
+          <a:prstGeom prst="rect">
+            <a:avLst/>
+          </a:prstGeom>
+          <a:noFill/>
+        </p:spPr>
+        <p:txBody>
+          <a:bodyPr wrap="square">
+            <a:normAutofit/>
+          </a:bodyPr>
+          <a:lstStyle/>
+          <a:p>
+            <a:pPr algn="ctr"/>
+            <a:r>
+              <a:rPr sz="1100" b="1" i="0">
+                <a:solidFill>
+                  <a:srgbClr val="FFFFFF"/>
+                </a:solidFill>
+                <a:latin typeface="Aptos"/>
+              </a:rPr>
+              <a:t>03</a:t>
+            </a:r>
+          </a:p>
+        </p:txBody>
+      </p:sp>
+      <p:sp>
+        <p:nvSpPr>
+          <p:cNvPr id="25" name="TextBox 24"/>
+          <p:cNvSpPr txBox="1"/>
+          <p:nvPr/>
+        </p:nvSpPr>
+        <p:spPr>
+          <a:xfrm>
+            <a:off x="8933688" y="3456432"/>
+            <a:ext cx="960120" cy="320040"/>
+          </a:xfrm>
+          <a:prstGeom prst="rect">
+            <a:avLst/>
+          </a:prstGeom>
+          <a:noFill/>
+        </p:spPr>
+        <p:txBody>
+          <a:bodyPr wrap="square">
+            <a:normAutofit/>
+          </a:bodyPr>
+          <a:lstStyle/>
+          <a:p>
+            <a:pPr algn="ctr"/>
+            <a:r>
+              <a:rPr sz="1800" b="1" i="0">
                 <a:solidFill>
                   <a:srgbClr val="0F172A"/>
                 </a:solidFill>
-              </a:defRPr>
-            </a:pPr>
-            <a:r>
-              <a:t>Insurance plan matching</a:t>
-            </a:r>
-          </a:p>
-          <a:p>
-            <a:pPr>
-              <a:spcAft>
-                <a:spcPts val="1000"/>
-              </a:spcAft>
-              <a:defRPr sz="2000">
+                <a:latin typeface="Aptos"/>
+              </a:rPr>
+              <a:t>Ask</a:t>
+            </a:r>
+          </a:p>
+        </p:txBody>
+      </p:sp>
+      <p:sp>
+        <p:nvSpPr>
+          <p:cNvPr id="26" name="TextBox 25"/>
+          <p:cNvSpPr txBox="1"/>
+          <p:nvPr/>
+        </p:nvSpPr>
+        <p:spPr>
+          <a:xfrm>
+            <a:off x="8878824" y="3886200"/>
+            <a:ext cx="1078992" cy="685800"/>
+          </a:xfrm>
+          <a:prstGeom prst="rect">
+            <a:avLst/>
+          </a:prstGeom>
+          <a:noFill/>
+        </p:spPr>
+        <p:txBody>
+          <a:bodyPr wrap="square">
+            <a:normAutofit/>
+          </a:bodyPr>
+          <a:lstStyle/>
+          <a:p>
+            <a:pPr algn="ctr"/>
+            <a:r>
+              <a:rPr sz="1100" b="0" i="0">
+                <a:solidFill>
+                  <a:srgbClr val="475569"/>
+                </a:solidFill>
+                <a:latin typeface="Aptos"/>
+              </a:rPr>
+              <a:t>Chat assistant for guided discovery</a:t>
+            </a:r>
+          </a:p>
+        </p:txBody>
+      </p:sp>
+      <p:sp>
+        <p:nvSpPr>
+          <p:cNvPr id="27" name="TextBox 26"/>
+          <p:cNvSpPr txBox="1"/>
+          <p:nvPr/>
+        </p:nvSpPr>
+        <p:spPr>
+          <a:xfrm>
+            <a:off x="10122408" y="3675887"/>
+            <a:ext cx="320040" cy="228600"/>
+          </a:xfrm>
+          <a:prstGeom prst="rect">
+            <a:avLst/>
+          </a:prstGeom>
+          <a:noFill/>
+        </p:spPr>
+        <p:txBody>
+          <a:bodyPr wrap="square">
+            <a:normAutofit/>
+          </a:bodyPr>
+          <a:lstStyle/>
+          <a:p>
+            <a:pPr algn="ctr"/>
+            <a:r>
+              <a:rPr sz="2400" b="1" i="0">
+                <a:solidFill>
+                  <a:srgbClr val="0D746F"/>
+                </a:solidFill>
+                <a:latin typeface="Aptos"/>
+              </a:rPr>
+              <a:t>→</a:t>
+            </a:r>
+          </a:p>
+        </p:txBody>
+      </p:sp>
+      <p:sp>
+        <p:nvSpPr>
+          <p:cNvPr id="28" name="Rounded Rectangle 27"/>
+          <p:cNvSpPr/>
+          <p:nvPr/>
+        </p:nvSpPr>
+        <p:spPr>
+          <a:xfrm>
+            <a:off x="10250424" y="2606040"/>
+            <a:ext cx="1325880" cy="2331720"/>
+          </a:xfrm>
+          <a:prstGeom prst="roundRect">
+            <a:avLst/>
+          </a:prstGeom>
+          <a:solidFill>
+            <a:srgbClr val="FFFFFF"/>
+          </a:solidFill>
+          <a:ln>
+            <a:solidFill>
+              <a:srgbClr val="99F6E4"/>
+            </a:solidFill>
+          </a:ln>
+        </p:spPr>
+        <p:style>
+          <a:lnRef idx="1">
+            <a:schemeClr val="accent1"/>
+          </a:lnRef>
+          <a:fillRef idx="3">
+            <a:schemeClr val="accent1"/>
+          </a:fillRef>
+          <a:effectRef idx="2">
+            <a:schemeClr val="accent1"/>
+          </a:effectRef>
+          <a:fontRef idx="minor">
+            <a:schemeClr val="lt1"/>
+          </a:fontRef>
+        </p:style>
+        <p:txBody>
+          <a:bodyPr rtlCol="0" anchor="ctr"/>
+          <a:lstStyle/>
+          <a:p>
+            <a:pPr algn="ctr"/>
+          </a:p>
+        </p:txBody>
+      </p:sp>
+      <p:sp>
+        <p:nvSpPr>
+          <p:cNvPr id="29" name="Rounded Rectangle 28"/>
+          <p:cNvSpPr/>
+          <p:nvPr/>
+        </p:nvSpPr>
+        <p:spPr>
+          <a:xfrm>
+            <a:off x="10561320" y="2816352"/>
+            <a:ext cx="713232" cy="384048"/>
+          </a:xfrm>
+          <a:prstGeom prst="roundRect">
+            <a:avLst/>
+          </a:prstGeom>
+          <a:solidFill>
+            <a:srgbClr val="05ABA5"/>
+          </a:solidFill>
+          <a:ln>
+            <a:solidFill>
+              <a:srgbClr val="05ABA5"/>
+            </a:solidFill>
+          </a:ln>
+        </p:spPr>
+        <p:style>
+          <a:lnRef idx="1">
+            <a:schemeClr val="accent1"/>
+          </a:lnRef>
+          <a:fillRef idx="3">
+            <a:schemeClr val="accent1"/>
+          </a:fillRef>
+          <a:effectRef idx="2">
+            <a:schemeClr val="accent1"/>
+          </a:effectRef>
+          <a:fontRef idx="minor">
+            <a:schemeClr val="lt1"/>
+          </a:fontRef>
+        </p:style>
+        <p:txBody>
+          <a:bodyPr rtlCol="0" anchor="ctr"/>
+          <a:lstStyle/>
+          <a:p>
+            <a:pPr algn="ctr"/>
+          </a:p>
+        </p:txBody>
+      </p:sp>
+      <p:sp>
+        <p:nvSpPr>
+          <p:cNvPr id="30" name="TextBox 29"/>
+          <p:cNvSpPr txBox="1"/>
+          <p:nvPr/>
+        </p:nvSpPr>
+        <p:spPr>
+          <a:xfrm>
+            <a:off x="10561320" y="2843784"/>
+            <a:ext cx="713232" cy="256032"/>
+          </a:xfrm>
+          <a:prstGeom prst="rect">
+            <a:avLst/>
+          </a:prstGeom>
+          <a:noFill/>
+        </p:spPr>
+        <p:txBody>
+          <a:bodyPr wrap="square">
+            <a:normAutofit/>
+          </a:bodyPr>
+          <a:lstStyle/>
+          <a:p>
+            <a:pPr algn="ctr"/>
+            <a:r>
+              <a:rPr sz="1100" b="1" i="0">
+                <a:solidFill>
+                  <a:srgbClr val="FFFFFF"/>
+                </a:solidFill>
+                <a:latin typeface="Aptos"/>
+              </a:rPr>
+              <a:t>04</a:t>
+            </a:r>
+          </a:p>
+        </p:txBody>
+      </p:sp>
+      <p:sp>
+        <p:nvSpPr>
+          <p:cNvPr id="31" name="TextBox 30"/>
+          <p:cNvSpPr txBox="1"/>
+          <p:nvPr/>
+        </p:nvSpPr>
+        <p:spPr>
+          <a:xfrm>
+            <a:off x="10415016" y="3456432"/>
+            <a:ext cx="960120" cy="320040"/>
+          </a:xfrm>
+          <a:prstGeom prst="rect">
+            <a:avLst/>
+          </a:prstGeom>
+          <a:noFill/>
+        </p:spPr>
+        <p:txBody>
+          <a:bodyPr wrap="square">
+            <a:normAutofit/>
+          </a:bodyPr>
+          <a:lstStyle/>
+          <a:p>
+            <a:pPr algn="ctr"/>
+            <a:r>
+              <a:rPr sz="1800" b="1" i="0">
                 <a:solidFill>
                   <a:srgbClr val="0F172A"/>
                 </a:solidFill>
-              </a:defRPr>
-            </a:pPr>
-            <a:r>
-              <a:t>Conversational guidance</a:t>
-            </a:r>
-          </a:p>
-          <a:p>
-            <a:pPr>
-              <a:spcAft>
-                <a:spcPts val="1000"/>
-              </a:spcAft>
-              <a:defRPr sz="2000">
-                <a:solidFill>
-                  <a:srgbClr val="0F172A"/>
-                </a:solidFill>
-              </a:defRPr>
-            </a:pPr>
-            <a:r>
-              <a:t>Authenticated booking and booking history</a:t>
+                <a:latin typeface="Aptos"/>
+              </a:rPr>
+              <a:t>Book</a:t>
+            </a:r>
+          </a:p>
+        </p:txBody>
+      </p:sp>
+      <p:sp>
+        <p:nvSpPr>
+          <p:cNvPr id="32" name="TextBox 31"/>
+          <p:cNvSpPr txBox="1"/>
+          <p:nvPr/>
+        </p:nvSpPr>
+        <p:spPr>
+          <a:xfrm>
+            <a:off x="10360152" y="3886200"/>
+            <a:ext cx="1078992" cy="685800"/>
+          </a:xfrm>
+          <a:prstGeom prst="rect">
+            <a:avLst/>
+          </a:prstGeom>
+          <a:noFill/>
+        </p:spPr>
+        <p:txBody>
+          <a:bodyPr wrap="square">
+            <a:normAutofit/>
+          </a:bodyPr>
+          <a:lstStyle/>
+          <a:p>
+            <a:pPr algn="ctr"/>
+            <a:r>
+              <a:rPr sz="1100" b="0" i="0">
+                <a:solidFill>
+                  <a:srgbClr val="475569"/>
+                </a:solidFill>
+                <a:latin typeface="Aptos"/>
+              </a:rPr>
+              <a:t>Reserve a consultation or surgery slot</a:t>
+            </a:r>
+          </a:p>
+        </p:txBody>
+      </p:sp>
+      <p:sp>
+        <p:nvSpPr>
+          <p:cNvPr id="33" name="Rounded Rectangle 32"/>
+          <p:cNvSpPr/>
+          <p:nvPr/>
+        </p:nvSpPr>
+        <p:spPr>
+          <a:xfrm>
+            <a:off x="10789920" y="502920"/>
+            <a:ext cx="868680" cy="384048"/>
+          </a:xfrm>
+          <a:prstGeom prst="roundRect">
+            <a:avLst/>
+          </a:prstGeom>
+          <a:solidFill>
+            <a:srgbClr val="05ABA5"/>
+          </a:solidFill>
+          <a:ln>
+            <a:solidFill>
+              <a:srgbClr val="05ABA5"/>
+            </a:solidFill>
+          </a:ln>
+        </p:spPr>
+        <p:style>
+          <a:lnRef idx="1">
+            <a:schemeClr val="accent1"/>
+          </a:lnRef>
+          <a:fillRef idx="3">
+            <a:schemeClr val="accent1"/>
+          </a:fillRef>
+          <a:effectRef idx="2">
+            <a:schemeClr val="accent1"/>
+          </a:effectRef>
+          <a:fontRef idx="minor">
+            <a:schemeClr val="lt1"/>
+          </a:fontRef>
+        </p:style>
+        <p:txBody>
+          <a:bodyPr rtlCol="0" anchor="ctr"/>
+          <a:lstStyle/>
+          <a:p>
+            <a:pPr algn="ctr"/>
+          </a:p>
+        </p:txBody>
+      </p:sp>
+      <p:sp>
+        <p:nvSpPr>
+          <p:cNvPr id="34" name="TextBox 33"/>
+          <p:cNvSpPr txBox="1"/>
+          <p:nvPr/>
+        </p:nvSpPr>
+        <p:spPr>
+          <a:xfrm>
+            <a:off x="10789920" y="530352"/>
+            <a:ext cx="868680" cy="256032"/>
+          </a:xfrm>
+          <a:prstGeom prst="rect">
+            <a:avLst/>
+          </a:prstGeom>
+          <a:noFill/>
+        </p:spPr>
+        <p:txBody>
+          <a:bodyPr wrap="square">
+            <a:normAutofit/>
+          </a:bodyPr>
+          <a:lstStyle/>
+          <a:p>
+            <a:pPr algn="ctr"/>
+            <a:r>
+              <a:rPr sz="1100" b="1" i="0">
+                <a:solidFill>
+                  <a:srgbClr val="FFFFFF"/>
+                </a:solidFill>
+                <a:latin typeface="Aptos"/>
+              </a:rPr>
+              <a:t>03</a:t>
             </a:r>
           </a:p>
         </p:txBody>
@@ -5336,7 +6216,7 @@
     <p:bg>
       <p:bgPr>
         <a:solidFill>
-          <a:srgbClr val="FFFFFF"/>
+          <a:srgbClr val="0A1626"/>
         </a:solidFill>
         <a:effectLst/>
       </p:bgPr>
@@ -5356,18 +6236,18 @@
         </p:nvSpPr>
         <p:spPr>
           <a:xfrm>
-            <a:off x="411480" y="320040"/>
-            <a:ext cx="11338560" cy="822960"/>
+            <a:off x="502920" y="384048"/>
+            <a:ext cx="1874519" cy="457200"/>
           </a:xfrm>
           <a:prstGeom prst="roundRect">
             <a:avLst/>
           </a:prstGeom>
           <a:solidFill>
-            <a:srgbClr val="F0FDFA"/>
+            <a:srgbClr val="122D42"/>
           </a:solidFill>
           <a:ln>
             <a:solidFill>
-              <a:srgbClr val="CCFBF1"/>
+              <a:srgbClr val="2DD4BF"/>
             </a:solidFill>
           </a:ln>
         </p:spPr>
@@ -5401,51 +6281,123 @@
         </p:nvSpPr>
         <p:spPr>
           <a:xfrm>
-            <a:off x="685800" y="475488"/>
-            <a:ext cx="7772400" cy="411480"/>
-          </a:xfrm>
-          <a:prstGeom prst="rect">
-            <a:avLst/>
-          </a:prstGeom>
-          <a:noFill/>
-        </p:spPr>
-        <p:txBody>
-          <a:bodyPr wrap="none">
-            <a:spAutoFit/>
-          </a:bodyPr>
-          <a:lstStyle/>
-          <a:p>
-            <a:r>
-              <a:rPr sz="2800" b="1">
-                <a:solidFill>
-                  <a:srgbClr val="0F172A"/>
-                </a:solidFill>
-              </a:rPr>
-              <a:t>Product Flow</a:t>
-            </a:r>
-          </a:p>
-        </p:txBody>
-      </p:sp>
-      <p:sp>
-        <p:nvSpPr>
-          <p:cNvPr id="4" name="Rounded Rectangle 3"/>
+            <a:off x="658368" y="493776"/>
+            <a:ext cx="1554480" cy="182880"/>
+          </a:xfrm>
+          <a:prstGeom prst="rect">
+            <a:avLst/>
+          </a:prstGeom>
+          <a:noFill/>
+        </p:spPr>
+        <p:txBody>
+          <a:bodyPr wrap="square">
+            <a:normAutofit/>
+          </a:bodyPr>
+          <a:lstStyle/>
+          <a:p>
+            <a:pPr algn="l"/>
+            <a:r>
+              <a:rPr sz="1100" b="1" i="0">
+                <a:solidFill>
+                  <a:srgbClr val="99F6E4"/>
+                </a:solidFill>
+                <a:latin typeface="Aptos"/>
+              </a:rPr>
+              <a:t>LIVE DEMO ARC</a:t>
+            </a:r>
+          </a:p>
+        </p:txBody>
+      </p:sp>
+      <p:sp>
+        <p:nvSpPr>
+          <p:cNvPr id="4" name="TextBox 3"/>
+          <p:cNvSpPr txBox="1"/>
+          <p:nvPr/>
+        </p:nvSpPr>
+        <p:spPr>
+          <a:xfrm>
+            <a:off x="640080" y="914400"/>
+            <a:ext cx="5943600" cy="822960"/>
+          </a:xfrm>
+          <a:prstGeom prst="rect">
+            <a:avLst/>
+          </a:prstGeom>
+          <a:noFill/>
+        </p:spPr>
+        <p:txBody>
+          <a:bodyPr wrap="square">
+            <a:normAutofit/>
+          </a:bodyPr>
+          <a:lstStyle/>
+          <a:p>
+            <a:pPr algn="l"/>
+            <a:r>
+              <a:rPr sz="2800" b="1" i="0">
+                <a:solidFill>
+                  <a:srgbClr val="FFFFFF"/>
+                </a:solidFill>
+                <a:latin typeface="Aptos"/>
+              </a:rPr>
+              <a:t>What judges will see in under two minutes</a:t>
+            </a:r>
+          </a:p>
+        </p:txBody>
+      </p:sp>
+      <p:sp>
+        <p:nvSpPr>
+          <p:cNvPr id="5" name="TextBox 4"/>
+          <p:cNvSpPr txBox="1"/>
+          <p:nvPr/>
+        </p:nvSpPr>
+        <p:spPr>
+          <a:xfrm>
+            <a:off x="640080" y="1554480"/>
+            <a:ext cx="5669280" cy="548640"/>
+          </a:xfrm>
+          <a:prstGeom prst="rect">
+            <a:avLst/>
+          </a:prstGeom>
+          <a:noFill/>
+        </p:spPr>
+        <p:txBody>
+          <a:bodyPr wrap="square">
+            <a:normAutofit/>
+          </a:bodyPr>
+          <a:lstStyle/>
+          <a:p>
+            <a:pPr algn="l"/>
+            <a:r>
+              <a:rPr sz="1500" b="0" i="0">
+                <a:solidFill>
+                  <a:srgbClr val="BFDBFE"/>
+                </a:solidFill>
+                <a:latin typeface="Aptos"/>
+              </a:rPr>
+              <a:t>A clean flow beats feature overload. The story is discovery to action.</a:t>
+            </a:r>
+          </a:p>
+        </p:txBody>
+      </p:sp>
+      <p:sp>
+        <p:nvSpPr>
+          <p:cNvPr id="6" name="Rounded Rectangle 5"/>
           <p:cNvSpPr/>
           <p:nvPr/>
         </p:nvSpPr>
         <p:spPr>
           <a:xfrm>
-            <a:off x="10058400" y="475488"/>
-            <a:ext cx="1097280" cy="310896"/>
+            <a:off x="731520" y="2423160"/>
+            <a:ext cx="2651760" cy="2606040"/>
           </a:xfrm>
           <a:prstGeom prst="roundRect">
             <a:avLst/>
           </a:prstGeom>
           <a:solidFill>
-            <a:srgbClr val="0D9488"/>
+            <a:srgbClr val="0F2236"/>
           </a:solidFill>
           <a:ln>
             <a:solidFill>
-              <a:srgbClr val="0D9488"/>
+              <a:srgbClr val="2DD4BF"/>
             </a:solidFill>
           </a:ln>
         </p:spPr>
@@ -5473,48 +6425,14 @@
       </p:sp>
       <p:sp>
         <p:nvSpPr>
-          <p:cNvPr id="5" name="TextBox 4"/>
-          <p:cNvSpPr txBox="1"/>
-          <p:nvPr/>
-        </p:nvSpPr>
-        <p:spPr>
-          <a:xfrm>
-            <a:off x="10058400" y="512064"/>
-            <a:ext cx="1097280" cy="228600"/>
-          </a:xfrm>
-          <a:prstGeom prst="rect">
-            <a:avLst/>
-          </a:prstGeom>
-          <a:noFill/>
-        </p:spPr>
-        <p:txBody>
-          <a:bodyPr wrap="none">
-            <a:spAutoFit/>
-          </a:bodyPr>
-          <a:lstStyle/>
-          <a:p>
-            <a:pPr algn="ctr"/>
-            <a:r>
-              <a:rPr sz="1200" b="1">
-                <a:solidFill>
-                  <a:srgbClr val="FFFFFF"/>
-                </a:solidFill>
-              </a:rPr>
-              <a:t>04</a:t>
-            </a:r>
-          </a:p>
-        </p:txBody>
-      </p:sp>
-      <p:sp>
-        <p:nvSpPr>
-          <p:cNvPr id="6" name="Rounded Rectangle 5"/>
+          <p:cNvPr id="7" name="Rounded Rectangle 6"/>
           <p:cNvSpPr/>
           <p:nvPr/>
         </p:nvSpPr>
         <p:spPr>
           <a:xfrm>
-            <a:off x="640080" y="1417320"/>
-            <a:ext cx="10972800" cy="4846320"/>
+            <a:off x="896112" y="2651760"/>
+            <a:ext cx="548640" cy="384048"/>
           </a:xfrm>
           <a:prstGeom prst="roundRect">
             <a:avLst/>
@@ -5524,7 +6442,7 @@
           </a:solidFill>
           <a:ln>
             <a:solidFill>
-              <a:srgbClr val="E2E8F0"/>
+              <a:srgbClr val="FFFFFF"/>
             </a:solidFill>
           </a:ln>
         </p:spPr>
@@ -5552,113 +6470,955 @@
       </p:sp>
       <p:sp>
         <p:nvSpPr>
-          <p:cNvPr id="7" name="TextBox 6"/>
-          <p:cNvSpPr txBox="1"/>
-          <p:nvPr/>
-        </p:nvSpPr>
-        <p:spPr>
-          <a:xfrm>
-            <a:off x="914400" y="1783080"/>
-            <a:ext cx="9875520" cy="3566160"/>
-          </a:xfrm>
-          <a:prstGeom prst="rect">
-            <a:avLst/>
-          </a:prstGeom>
-          <a:noFill/>
-        </p:spPr>
-        <p:txBody>
-          <a:bodyPr wrap="square">
-            <a:spAutoFit/>
-          </a:bodyPr>
-          <a:lstStyle/>
-          <a:p>
-            <a:pPr>
-              <a:spcAft>
-                <a:spcPts val="1000"/>
-              </a:spcAft>
-              <a:defRPr sz="2000">
+          <p:cNvPr id="8" name="TextBox 7"/>
+          <p:cNvSpPr txBox="1"/>
+          <p:nvPr/>
+        </p:nvSpPr>
+        <p:spPr>
+          <a:xfrm>
+            <a:off x="896112" y="2679191"/>
+            <a:ext cx="548640" cy="256032"/>
+          </a:xfrm>
+          <a:prstGeom prst="rect">
+            <a:avLst/>
+          </a:prstGeom>
+          <a:noFill/>
+        </p:spPr>
+        <p:txBody>
+          <a:bodyPr wrap="square">
+            <a:normAutofit/>
+          </a:bodyPr>
+          <a:lstStyle/>
+          <a:p>
+            <a:pPr algn="ctr"/>
+            <a:r>
+              <a:rPr sz="1100" b="1" i="0">
+                <a:solidFill>
+                  <a:srgbClr val="0D746F"/>
+                </a:solidFill>
+                <a:latin typeface="Aptos"/>
+              </a:rPr>
+              <a:t>1</a:t>
+            </a:r>
+          </a:p>
+        </p:txBody>
+      </p:sp>
+      <p:sp>
+        <p:nvSpPr>
+          <p:cNvPr id="9" name="TextBox 8"/>
+          <p:cNvSpPr txBox="1"/>
+          <p:nvPr/>
+        </p:nvSpPr>
+        <p:spPr>
+          <a:xfrm>
+            <a:off x="896112" y="3154680"/>
+            <a:ext cx="2011680" cy="274320"/>
+          </a:xfrm>
+          <a:prstGeom prst="rect">
+            <a:avLst/>
+          </a:prstGeom>
+          <a:noFill/>
+        </p:spPr>
+        <p:txBody>
+          <a:bodyPr wrap="square">
+            <a:normAutofit/>
+          </a:bodyPr>
+          <a:lstStyle/>
+          <a:p>
+            <a:pPr algn="l"/>
+            <a:r>
+              <a:rPr sz="2000" b="1" i="0">
+                <a:solidFill>
+                  <a:srgbClr val="FFFFFF"/>
+                </a:solidFill>
+                <a:latin typeface="Aptos"/>
+              </a:rPr>
+              <a:t>Search</a:t>
+            </a:r>
+          </a:p>
+        </p:txBody>
+      </p:sp>
+      <p:sp>
+        <p:nvSpPr>
+          <p:cNvPr id="10" name="TextBox 9"/>
+          <p:cNvSpPr txBox="1"/>
+          <p:nvPr/>
+        </p:nvSpPr>
+        <p:spPr>
+          <a:xfrm>
+            <a:off x="896112" y="3611880"/>
+            <a:ext cx="2148840" cy="868680"/>
+          </a:xfrm>
+          <a:prstGeom prst="rect">
+            <a:avLst/>
+          </a:prstGeom>
+          <a:noFill/>
+        </p:spPr>
+        <p:txBody>
+          <a:bodyPr wrap="square">
+            <a:normAutofit/>
+          </a:bodyPr>
+          <a:lstStyle/>
+          <a:p>
+            <a:pPr algn="l"/>
+            <a:r>
+              <a:rPr sz="1300" b="0" i="0">
+                <a:solidFill>
+                  <a:srgbClr val="CBD5E1"/>
+                </a:solidFill>
+                <a:latin typeface="Aptos"/>
+              </a:rPr>
+              <a:t>Find surgery options by city, budget, and rating.</a:t>
+            </a:r>
+          </a:p>
+        </p:txBody>
+      </p:sp>
+      <p:sp>
+        <p:nvSpPr>
+          <p:cNvPr id="11" name="TextBox 10"/>
+          <p:cNvSpPr txBox="1"/>
+          <p:nvPr/>
+        </p:nvSpPr>
+        <p:spPr>
+          <a:xfrm>
+            <a:off x="3456432" y="3502152"/>
+            <a:ext cx="274320" cy="228600"/>
+          </a:xfrm>
+          <a:prstGeom prst="rect">
+            <a:avLst/>
+          </a:prstGeom>
+          <a:noFill/>
+        </p:spPr>
+        <p:txBody>
+          <a:bodyPr wrap="square">
+            <a:normAutofit/>
+          </a:bodyPr>
+          <a:lstStyle/>
+          <a:p>
+            <a:pPr algn="ctr"/>
+            <a:r>
+              <a:rPr sz="2400" b="1" i="0">
+                <a:solidFill>
+                  <a:srgbClr val="5EEAD4"/>
+                </a:solidFill>
+                <a:latin typeface="Aptos"/>
+              </a:rPr>
+              <a:t>→</a:t>
+            </a:r>
+          </a:p>
+        </p:txBody>
+      </p:sp>
+      <p:sp>
+        <p:nvSpPr>
+          <p:cNvPr id="12" name="Rounded Rectangle 11"/>
+          <p:cNvSpPr/>
+          <p:nvPr/>
+        </p:nvSpPr>
+        <p:spPr>
+          <a:xfrm>
+            <a:off x="3611880" y="2423160"/>
+            <a:ext cx="2651760" cy="2606040"/>
+          </a:xfrm>
+          <a:prstGeom prst="roundRect">
+            <a:avLst/>
+          </a:prstGeom>
+          <a:solidFill>
+            <a:srgbClr val="0F2236"/>
+          </a:solidFill>
+          <a:ln>
+            <a:solidFill>
+              <a:srgbClr val="2DD4BF"/>
+            </a:solidFill>
+          </a:ln>
+        </p:spPr>
+        <p:style>
+          <a:lnRef idx="1">
+            <a:schemeClr val="accent1"/>
+          </a:lnRef>
+          <a:fillRef idx="3">
+            <a:schemeClr val="accent1"/>
+          </a:fillRef>
+          <a:effectRef idx="2">
+            <a:schemeClr val="accent1"/>
+          </a:effectRef>
+          <a:fontRef idx="minor">
+            <a:schemeClr val="lt1"/>
+          </a:fontRef>
+        </p:style>
+        <p:txBody>
+          <a:bodyPr rtlCol="0" anchor="ctr"/>
+          <a:lstStyle/>
+          <a:p>
+            <a:pPr algn="ctr"/>
+          </a:p>
+        </p:txBody>
+      </p:sp>
+      <p:sp>
+        <p:nvSpPr>
+          <p:cNvPr id="13" name="Rounded Rectangle 12"/>
+          <p:cNvSpPr/>
+          <p:nvPr/>
+        </p:nvSpPr>
+        <p:spPr>
+          <a:xfrm>
+            <a:off x="3776472" y="2651760"/>
+            <a:ext cx="548640" cy="384048"/>
+          </a:xfrm>
+          <a:prstGeom prst="roundRect">
+            <a:avLst/>
+          </a:prstGeom>
+          <a:solidFill>
+            <a:srgbClr val="FFFFFF"/>
+          </a:solidFill>
+          <a:ln>
+            <a:solidFill>
+              <a:srgbClr val="FFFFFF"/>
+            </a:solidFill>
+          </a:ln>
+        </p:spPr>
+        <p:style>
+          <a:lnRef idx="1">
+            <a:schemeClr val="accent1"/>
+          </a:lnRef>
+          <a:fillRef idx="3">
+            <a:schemeClr val="accent1"/>
+          </a:fillRef>
+          <a:effectRef idx="2">
+            <a:schemeClr val="accent1"/>
+          </a:effectRef>
+          <a:fontRef idx="minor">
+            <a:schemeClr val="lt1"/>
+          </a:fontRef>
+        </p:style>
+        <p:txBody>
+          <a:bodyPr rtlCol="0" anchor="ctr"/>
+          <a:lstStyle/>
+          <a:p>
+            <a:pPr algn="ctr"/>
+          </a:p>
+        </p:txBody>
+      </p:sp>
+      <p:sp>
+        <p:nvSpPr>
+          <p:cNvPr id="14" name="TextBox 13"/>
+          <p:cNvSpPr txBox="1"/>
+          <p:nvPr/>
+        </p:nvSpPr>
+        <p:spPr>
+          <a:xfrm>
+            <a:off x="3776472" y="2679191"/>
+            <a:ext cx="548640" cy="256032"/>
+          </a:xfrm>
+          <a:prstGeom prst="rect">
+            <a:avLst/>
+          </a:prstGeom>
+          <a:noFill/>
+        </p:spPr>
+        <p:txBody>
+          <a:bodyPr wrap="square">
+            <a:normAutofit/>
+          </a:bodyPr>
+          <a:lstStyle/>
+          <a:p>
+            <a:pPr algn="ctr"/>
+            <a:r>
+              <a:rPr sz="1100" b="1" i="0">
+                <a:solidFill>
+                  <a:srgbClr val="0D746F"/>
+                </a:solidFill>
+                <a:latin typeface="Aptos"/>
+              </a:rPr>
+              <a:t>2</a:t>
+            </a:r>
+          </a:p>
+        </p:txBody>
+      </p:sp>
+      <p:sp>
+        <p:nvSpPr>
+          <p:cNvPr id="15" name="TextBox 14"/>
+          <p:cNvSpPr txBox="1"/>
+          <p:nvPr/>
+        </p:nvSpPr>
+        <p:spPr>
+          <a:xfrm>
+            <a:off x="3776472" y="3154680"/>
+            <a:ext cx="2011680" cy="274320"/>
+          </a:xfrm>
+          <a:prstGeom prst="rect">
+            <a:avLst/>
+          </a:prstGeom>
+          <a:noFill/>
+        </p:spPr>
+        <p:txBody>
+          <a:bodyPr wrap="square">
+            <a:normAutofit/>
+          </a:bodyPr>
+          <a:lstStyle/>
+          <a:p>
+            <a:pPr algn="l"/>
+            <a:r>
+              <a:rPr sz="2000" b="1" i="0">
+                <a:solidFill>
+                  <a:srgbClr val="FFFFFF"/>
+                </a:solidFill>
+                <a:latin typeface="Aptos"/>
+              </a:rPr>
+              <a:t>Hospital</a:t>
+            </a:r>
+          </a:p>
+        </p:txBody>
+      </p:sp>
+      <p:sp>
+        <p:nvSpPr>
+          <p:cNvPr id="16" name="TextBox 15"/>
+          <p:cNvSpPr txBox="1"/>
+          <p:nvPr/>
+        </p:nvSpPr>
+        <p:spPr>
+          <a:xfrm>
+            <a:off x="3776472" y="3611880"/>
+            <a:ext cx="2148840" cy="868680"/>
+          </a:xfrm>
+          <a:prstGeom prst="rect">
+            <a:avLst/>
+          </a:prstGeom>
+          <a:noFill/>
+        </p:spPr>
+        <p:txBody>
+          <a:bodyPr wrap="square">
+            <a:normAutofit/>
+          </a:bodyPr>
+          <a:lstStyle/>
+          <a:p>
+            <a:pPr algn="l"/>
+            <a:r>
+              <a:rPr sz="1300" b="0" i="0">
+                <a:solidFill>
+                  <a:srgbClr val="CBD5E1"/>
+                </a:solidFill>
+                <a:latin typeface="Aptos"/>
+              </a:rPr>
+              <a:t>Open detail page and show pricing + slot context.</a:t>
+            </a:r>
+          </a:p>
+        </p:txBody>
+      </p:sp>
+      <p:sp>
+        <p:nvSpPr>
+          <p:cNvPr id="17" name="TextBox 16"/>
+          <p:cNvSpPr txBox="1"/>
+          <p:nvPr/>
+        </p:nvSpPr>
+        <p:spPr>
+          <a:xfrm>
+            <a:off x="6336792" y="3502152"/>
+            <a:ext cx="274320" cy="228600"/>
+          </a:xfrm>
+          <a:prstGeom prst="rect">
+            <a:avLst/>
+          </a:prstGeom>
+          <a:noFill/>
+        </p:spPr>
+        <p:txBody>
+          <a:bodyPr wrap="square">
+            <a:normAutofit/>
+          </a:bodyPr>
+          <a:lstStyle/>
+          <a:p>
+            <a:pPr algn="ctr"/>
+            <a:r>
+              <a:rPr sz="2400" b="1" i="0">
+                <a:solidFill>
+                  <a:srgbClr val="5EEAD4"/>
+                </a:solidFill>
+                <a:latin typeface="Aptos"/>
+              </a:rPr>
+              <a:t>→</a:t>
+            </a:r>
+          </a:p>
+        </p:txBody>
+      </p:sp>
+      <p:sp>
+        <p:nvSpPr>
+          <p:cNvPr id="18" name="Rounded Rectangle 17"/>
+          <p:cNvSpPr/>
+          <p:nvPr/>
+        </p:nvSpPr>
+        <p:spPr>
+          <a:xfrm>
+            <a:off x="6492240" y="2423160"/>
+            <a:ext cx="2651760" cy="2606040"/>
+          </a:xfrm>
+          <a:prstGeom prst="roundRect">
+            <a:avLst/>
+          </a:prstGeom>
+          <a:solidFill>
+            <a:srgbClr val="0F2236"/>
+          </a:solidFill>
+          <a:ln>
+            <a:solidFill>
+              <a:srgbClr val="2DD4BF"/>
+            </a:solidFill>
+          </a:ln>
+        </p:spPr>
+        <p:style>
+          <a:lnRef idx="1">
+            <a:schemeClr val="accent1"/>
+          </a:lnRef>
+          <a:fillRef idx="3">
+            <a:schemeClr val="accent1"/>
+          </a:fillRef>
+          <a:effectRef idx="2">
+            <a:schemeClr val="accent1"/>
+          </a:effectRef>
+          <a:fontRef idx="minor">
+            <a:schemeClr val="lt1"/>
+          </a:fontRef>
+        </p:style>
+        <p:txBody>
+          <a:bodyPr rtlCol="0" anchor="ctr"/>
+          <a:lstStyle/>
+          <a:p>
+            <a:pPr algn="ctr"/>
+          </a:p>
+        </p:txBody>
+      </p:sp>
+      <p:sp>
+        <p:nvSpPr>
+          <p:cNvPr id="19" name="Rounded Rectangle 18"/>
+          <p:cNvSpPr/>
+          <p:nvPr/>
+        </p:nvSpPr>
+        <p:spPr>
+          <a:xfrm>
+            <a:off x="6656831" y="2651760"/>
+            <a:ext cx="548640" cy="384048"/>
+          </a:xfrm>
+          <a:prstGeom prst="roundRect">
+            <a:avLst/>
+          </a:prstGeom>
+          <a:solidFill>
+            <a:srgbClr val="FFFFFF"/>
+          </a:solidFill>
+          <a:ln>
+            <a:solidFill>
+              <a:srgbClr val="FFFFFF"/>
+            </a:solidFill>
+          </a:ln>
+        </p:spPr>
+        <p:style>
+          <a:lnRef idx="1">
+            <a:schemeClr val="accent1"/>
+          </a:lnRef>
+          <a:fillRef idx="3">
+            <a:schemeClr val="accent1"/>
+          </a:fillRef>
+          <a:effectRef idx="2">
+            <a:schemeClr val="accent1"/>
+          </a:effectRef>
+          <a:fontRef idx="minor">
+            <a:schemeClr val="lt1"/>
+          </a:fontRef>
+        </p:style>
+        <p:txBody>
+          <a:bodyPr rtlCol="0" anchor="ctr"/>
+          <a:lstStyle/>
+          <a:p>
+            <a:pPr algn="ctr"/>
+          </a:p>
+        </p:txBody>
+      </p:sp>
+      <p:sp>
+        <p:nvSpPr>
+          <p:cNvPr id="20" name="TextBox 19"/>
+          <p:cNvSpPr txBox="1"/>
+          <p:nvPr/>
+        </p:nvSpPr>
+        <p:spPr>
+          <a:xfrm>
+            <a:off x="6656831" y="2679191"/>
+            <a:ext cx="548640" cy="256032"/>
+          </a:xfrm>
+          <a:prstGeom prst="rect">
+            <a:avLst/>
+          </a:prstGeom>
+          <a:noFill/>
+        </p:spPr>
+        <p:txBody>
+          <a:bodyPr wrap="square">
+            <a:normAutofit/>
+          </a:bodyPr>
+          <a:lstStyle/>
+          <a:p>
+            <a:pPr algn="ctr"/>
+            <a:r>
+              <a:rPr sz="1100" b="1" i="0">
+                <a:solidFill>
+                  <a:srgbClr val="0D746F"/>
+                </a:solidFill>
+                <a:latin typeface="Aptos"/>
+              </a:rPr>
+              <a:t>3</a:t>
+            </a:r>
+          </a:p>
+        </p:txBody>
+      </p:sp>
+      <p:sp>
+        <p:nvSpPr>
+          <p:cNvPr id="21" name="TextBox 20"/>
+          <p:cNvSpPr txBox="1"/>
+          <p:nvPr/>
+        </p:nvSpPr>
+        <p:spPr>
+          <a:xfrm>
+            <a:off x="6656831" y="3154680"/>
+            <a:ext cx="2011680" cy="274320"/>
+          </a:xfrm>
+          <a:prstGeom prst="rect">
+            <a:avLst/>
+          </a:prstGeom>
+          <a:noFill/>
+        </p:spPr>
+        <p:txBody>
+          <a:bodyPr wrap="square">
+            <a:normAutofit/>
+          </a:bodyPr>
+          <a:lstStyle/>
+          <a:p>
+            <a:pPr algn="l"/>
+            <a:r>
+              <a:rPr sz="2000" b="1" i="0">
+                <a:solidFill>
+                  <a:srgbClr val="FFFFFF"/>
+                </a:solidFill>
+                <a:latin typeface="Aptos"/>
+              </a:rPr>
+              <a:t>Chat</a:t>
+            </a:r>
+          </a:p>
+        </p:txBody>
+      </p:sp>
+      <p:sp>
+        <p:nvSpPr>
+          <p:cNvPr id="22" name="TextBox 21"/>
+          <p:cNvSpPr txBox="1"/>
+          <p:nvPr/>
+        </p:nvSpPr>
+        <p:spPr>
+          <a:xfrm>
+            <a:off x="6656831" y="3611880"/>
+            <a:ext cx="2148840" cy="868680"/>
+          </a:xfrm>
+          <a:prstGeom prst="rect">
+            <a:avLst/>
+          </a:prstGeom>
+          <a:noFill/>
+        </p:spPr>
+        <p:txBody>
+          <a:bodyPr wrap="square">
+            <a:normAutofit/>
+          </a:bodyPr>
+          <a:lstStyle/>
+          <a:p>
+            <a:pPr algn="l"/>
+            <a:r>
+              <a:rPr sz="1300" b="0" i="0">
+                <a:solidFill>
+                  <a:srgbClr val="CBD5E1"/>
+                </a:solidFill>
+                <a:latin typeface="Aptos"/>
+              </a:rPr>
+              <a:t>Ask in plain language and get guided matches.</a:t>
+            </a:r>
+          </a:p>
+        </p:txBody>
+      </p:sp>
+      <p:sp>
+        <p:nvSpPr>
+          <p:cNvPr id="23" name="TextBox 22"/>
+          <p:cNvSpPr txBox="1"/>
+          <p:nvPr/>
+        </p:nvSpPr>
+        <p:spPr>
+          <a:xfrm>
+            <a:off x="9217152" y="3502152"/>
+            <a:ext cx="274320" cy="228600"/>
+          </a:xfrm>
+          <a:prstGeom prst="rect">
+            <a:avLst/>
+          </a:prstGeom>
+          <a:noFill/>
+        </p:spPr>
+        <p:txBody>
+          <a:bodyPr wrap="square">
+            <a:normAutofit/>
+          </a:bodyPr>
+          <a:lstStyle/>
+          <a:p>
+            <a:pPr algn="ctr"/>
+            <a:r>
+              <a:rPr sz="2400" b="1" i="0">
+                <a:solidFill>
+                  <a:srgbClr val="5EEAD4"/>
+                </a:solidFill>
+                <a:latin typeface="Aptos"/>
+              </a:rPr>
+              <a:t>→</a:t>
+            </a:r>
+          </a:p>
+        </p:txBody>
+      </p:sp>
+      <p:sp>
+        <p:nvSpPr>
+          <p:cNvPr id="24" name="Rounded Rectangle 23"/>
+          <p:cNvSpPr/>
+          <p:nvPr/>
+        </p:nvSpPr>
+        <p:spPr>
+          <a:xfrm>
+            <a:off x="9372600" y="2423160"/>
+            <a:ext cx="2651760" cy="2606040"/>
+          </a:xfrm>
+          <a:prstGeom prst="roundRect">
+            <a:avLst/>
+          </a:prstGeom>
+          <a:solidFill>
+            <a:srgbClr val="0F2236"/>
+          </a:solidFill>
+          <a:ln>
+            <a:solidFill>
+              <a:srgbClr val="2DD4BF"/>
+            </a:solidFill>
+          </a:ln>
+        </p:spPr>
+        <p:style>
+          <a:lnRef idx="1">
+            <a:schemeClr val="accent1"/>
+          </a:lnRef>
+          <a:fillRef idx="3">
+            <a:schemeClr val="accent1"/>
+          </a:fillRef>
+          <a:effectRef idx="2">
+            <a:schemeClr val="accent1"/>
+          </a:effectRef>
+          <a:fontRef idx="minor">
+            <a:schemeClr val="lt1"/>
+          </a:fontRef>
+        </p:style>
+        <p:txBody>
+          <a:bodyPr rtlCol="0" anchor="ctr"/>
+          <a:lstStyle/>
+          <a:p>
+            <a:pPr algn="ctr"/>
+          </a:p>
+        </p:txBody>
+      </p:sp>
+      <p:sp>
+        <p:nvSpPr>
+          <p:cNvPr id="25" name="Rounded Rectangle 24"/>
+          <p:cNvSpPr/>
+          <p:nvPr/>
+        </p:nvSpPr>
+        <p:spPr>
+          <a:xfrm>
+            <a:off x="9537192" y="2651760"/>
+            <a:ext cx="548640" cy="384048"/>
+          </a:xfrm>
+          <a:prstGeom prst="roundRect">
+            <a:avLst/>
+          </a:prstGeom>
+          <a:solidFill>
+            <a:srgbClr val="FFFFFF"/>
+          </a:solidFill>
+          <a:ln>
+            <a:solidFill>
+              <a:srgbClr val="FFFFFF"/>
+            </a:solidFill>
+          </a:ln>
+        </p:spPr>
+        <p:style>
+          <a:lnRef idx="1">
+            <a:schemeClr val="accent1"/>
+          </a:lnRef>
+          <a:fillRef idx="3">
+            <a:schemeClr val="accent1"/>
+          </a:fillRef>
+          <a:effectRef idx="2">
+            <a:schemeClr val="accent1"/>
+          </a:effectRef>
+          <a:fontRef idx="minor">
+            <a:schemeClr val="lt1"/>
+          </a:fontRef>
+        </p:style>
+        <p:txBody>
+          <a:bodyPr rtlCol="0" anchor="ctr"/>
+          <a:lstStyle/>
+          <a:p>
+            <a:pPr algn="ctr"/>
+          </a:p>
+        </p:txBody>
+      </p:sp>
+      <p:sp>
+        <p:nvSpPr>
+          <p:cNvPr id="26" name="TextBox 25"/>
+          <p:cNvSpPr txBox="1"/>
+          <p:nvPr/>
+        </p:nvSpPr>
+        <p:spPr>
+          <a:xfrm>
+            <a:off x="9537192" y="2679191"/>
+            <a:ext cx="548640" cy="256032"/>
+          </a:xfrm>
+          <a:prstGeom prst="rect">
+            <a:avLst/>
+          </a:prstGeom>
+          <a:noFill/>
+        </p:spPr>
+        <p:txBody>
+          <a:bodyPr wrap="square">
+            <a:normAutofit/>
+          </a:bodyPr>
+          <a:lstStyle/>
+          <a:p>
+            <a:pPr algn="ctr"/>
+            <a:r>
+              <a:rPr sz="1100" b="1" i="0">
+                <a:solidFill>
+                  <a:srgbClr val="0D746F"/>
+                </a:solidFill>
+                <a:latin typeface="Aptos"/>
+              </a:rPr>
+              <a:t>4</a:t>
+            </a:r>
+          </a:p>
+        </p:txBody>
+      </p:sp>
+      <p:sp>
+        <p:nvSpPr>
+          <p:cNvPr id="27" name="TextBox 26"/>
+          <p:cNvSpPr txBox="1"/>
+          <p:nvPr/>
+        </p:nvSpPr>
+        <p:spPr>
+          <a:xfrm>
+            <a:off x="9537192" y="3154680"/>
+            <a:ext cx="2011680" cy="274320"/>
+          </a:xfrm>
+          <a:prstGeom prst="rect">
+            <a:avLst/>
+          </a:prstGeom>
+          <a:noFill/>
+        </p:spPr>
+        <p:txBody>
+          <a:bodyPr wrap="square">
+            <a:normAutofit/>
+          </a:bodyPr>
+          <a:lstStyle/>
+          <a:p>
+            <a:pPr algn="l"/>
+            <a:r>
+              <a:rPr sz="2000" b="1" i="0">
+                <a:solidFill>
+                  <a:srgbClr val="FFFFFF"/>
+                </a:solidFill>
+                <a:latin typeface="Aptos"/>
+              </a:rPr>
+              <a:t>Book</a:t>
+            </a:r>
+          </a:p>
+        </p:txBody>
+      </p:sp>
+      <p:sp>
+        <p:nvSpPr>
+          <p:cNvPr id="28" name="TextBox 27"/>
+          <p:cNvSpPr txBox="1"/>
+          <p:nvPr/>
+        </p:nvSpPr>
+        <p:spPr>
+          <a:xfrm>
+            <a:off x="9537192" y="3611880"/>
+            <a:ext cx="2148840" cy="868680"/>
+          </a:xfrm>
+          <a:prstGeom prst="rect">
+            <a:avLst/>
+          </a:prstGeom>
+          <a:noFill/>
+        </p:spPr>
+        <p:txBody>
+          <a:bodyPr wrap="square">
+            <a:normAutofit/>
+          </a:bodyPr>
+          <a:lstStyle/>
+          <a:p>
+            <a:pPr algn="l"/>
+            <a:r>
+              <a:rPr sz="1300" b="0" i="0">
+                <a:solidFill>
+                  <a:srgbClr val="CBD5E1"/>
+                </a:solidFill>
+                <a:latin typeface="Aptos"/>
+              </a:rPr>
+              <a:t>Confirm a slot, then show booking history and cancellation.</a:t>
+            </a:r>
+          </a:p>
+        </p:txBody>
+      </p:sp>
+      <p:sp>
+        <p:nvSpPr>
+          <p:cNvPr id="29" name="Rounded Rectangle 28"/>
+          <p:cNvSpPr/>
+          <p:nvPr/>
+        </p:nvSpPr>
+        <p:spPr>
+          <a:xfrm>
+            <a:off x="749808" y="5394960"/>
+            <a:ext cx="10652760" cy="822960"/>
+          </a:xfrm>
+          <a:prstGeom prst="roundRect">
+            <a:avLst/>
+          </a:prstGeom>
+          <a:solidFill>
+            <a:srgbClr val="091D2E"/>
+          </a:solidFill>
+          <a:ln>
+            <a:solidFill>
+              <a:srgbClr val="164E63"/>
+            </a:solidFill>
+          </a:ln>
+        </p:spPr>
+        <p:style>
+          <a:lnRef idx="1">
+            <a:schemeClr val="accent1"/>
+          </a:lnRef>
+          <a:fillRef idx="3">
+            <a:schemeClr val="accent1"/>
+          </a:fillRef>
+          <a:effectRef idx="2">
+            <a:schemeClr val="accent1"/>
+          </a:effectRef>
+          <a:fontRef idx="minor">
+            <a:schemeClr val="lt1"/>
+          </a:fontRef>
+        </p:style>
+        <p:txBody>
+          <a:bodyPr rtlCol="0" anchor="ctr"/>
+          <a:lstStyle/>
+          <a:p>
+            <a:pPr algn="ctr"/>
+          </a:p>
+        </p:txBody>
+      </p:sp>
+      <p:sp>
+        <p:nvSpPr>
+          <p:cNvPr id="30" name="TextBox 29"/>
+          <p:cNvSpPr txBox="1"/>
+          <p:nvPr/>
+        </p:nvSpPr>
+        <p:spPr>
+          <a:xfrm>
+            <a:off x="987552" y="5641848"/>
+            <a:ext cx="9966960" cy="228600"/>
+          </a:xfrm>
+          <a:prstGeom prst="rect">
+            <a:avLst/>
+          </a:prstGeom>
+          <a:noFill/>
+        </p:spPr>
+        <p:txBody>
+          <a:bodyPr wrap="square">
+            <a:normAutofit/>
+          </a:bodyPr>
+          <a:lstStyle/>
+          <a:p>
+            <a:pPr algn="ctr"/>
+            <a:r>
+              <a:rPr sz="1400" b="1" i="0">
+                <a:solidFill>
+                  <a:srgbClr val="FFFFFF"/>
+                </a:solidFill>
+                <a:latin typeface="Aptos"/>
+              </a:rPr>
+              <a:t>Key message: we are not showing isolated pages; we are showing a patient journey that reaches a real booking outcome.</a:t>
+            </a:r>
+          </a:p>
+        </p:txBody>
+      </p:sp>
+      <p:sp>
+        <p:nvSpPr>
+          <p:cNvPr id="31" name="Rounded Rectangle 30"/>
+          <p:cNvSpPr/>
+          <p:nvPr/>
+        </p:nvSpPr>
+        <p:spPr>
+          <a:xfrm>
+            <a:off x="10789920" y="502920"/>
+            <a:ext cx="868680" cy="384048"/>
+          </a:xfrm>
+          <a:prstGeom prst="roundRect">
+            <a:avLst/>
+          </a:prstGeom>
+          <a:solidFill>
+            <a:srgbClr val="5EEAD4"/>
+          </a:solidFill>
+          <a:ln>
+            <a:solidFill>
+              <a:srgbClr val="5EEAD4"/>
+            </a:solidFill>
+          </a:ln>
+        </p:spPr>
+        <p:style>
+          <a:lnRef idx="1">
+            <a:schemeClr val="accent1"/>
+          </a:lnRef>
+          <a:fillRef idx="3">
+            <a:schemeClr val="accent1"/>
+          </a:fillRef>
+          <a:effectRef idx="2">
+            <a:schemeClr val="accent1"/>
+          </a:effectRef>
+          <a:fontRef idx="minor">
+            <a:schemeClr val="lt1"/>
+          </a:fontRef>
+        </p:style>
+        <p:txBody>
+          <a:bodyPr rtlCol="0" anchor="ctr"/>
+          <a:lstStyle/>
+          <a:p>
+            <a:pPr algn="ctr"/>
+          </a:p>
+        </p:txBody>
+      </p:sp>
+      <p:sp>
+        <p:nvSpPr>
+          <p:cNvPr id="32" name="TextBox 31"/>
+          <p:cNvSpPr txBox="1"/>
+          <p:nvPr/>
+        </p:nvSpPr>
+        <p:spPr>
+          <a:xfrm>
+            <a:off x="10789920" y="530352"/>
+            <a:ext cx="868680" cy="256032"/>
+          </a:xfrm>
+          <a:prstGeom prst="rect">
+            <a:avLst/>
+          </a:prstGeom>
+          <a:noFill/>
+        </p:spPr>
+        <p:txBody>
+          <a:bodyPr wrap="square">
+            <a:normAutofit/>
+          </a:bodyPr>
+          <a:lstStyle/>
+          <a:p>
+            <a:pPr algn="ctr"/>
+            <a:r>
+              <a:rPr sz="1100" b="1" i="0">
                 <a:solidFill>
                   <a:srgbClr val="0F172A"/>
                 </a:solidFill>
-              </a:defRPr>
-            </a:pPr>
-            <a:r>
-              <a:t>Search by surgery, city, budget, rating, or hospital type.</a:t>
-            </a:r>
-          </a:p>
-          <a:p>
-            <a:pPr>
-              <a:spcAft>
-                <a:spcPts val="1000"/>
-              </a:spcAft>
-              <a:defRPr sz="2000">
-                <a:solidFill>
-                  <a:srgbClr val="0F172A"/>
-                </a:solidFill>
-              </a:defRPr>
-            </a:pPr>
-            <a:r>
-              <a:t>Compare hospitals with price ranges and availability.</a:t>
-            </a:r>
-          </a:p>
-          <a:p>
-            <a:pPr>
-              <a:spcAft>
-                <a:spcPts val="1000"/>
-              </a:spcAft>
-              <a:defRPr sz="2000">
-                <a:solidFill>
-                  <a:srgbClr val="0F172A"/>
-                </a:solidFill>
-              </a:defRPr>
-            </a:pPr>
-            <a:r>
-              <a:t>Use the chat assistant in natural language.</a:t>
-            </a:r>
-          </a:p>
-          <a:p>
-            <a:pPr>
-              <a:spcAft>
-                <a:spcPts val="1000"/>
-              </a:spcAft>
-              <a:defRPr sz="2000">
-                <a:solidFill>
-                  <a:srgbClr val="0F172A"/>
-                </a:solidFill>
-              </a:defRPr>
-            </a:pPr>
-            <a:r>
-              <a:t>Review matching insurance plans.</a:t>
-            </a:r>
-          </a:p>
-          <a:p>
-            <a:pPr>
-              <a:spcAft>
-                <a:spcPts val="1000"/>
-              </a:spcAft>
-              <a:defRPr sz="2000">
-                <a:solidFill>
-                  <a:srgbClr val="0F172A"/>
-                </a:solidFill>
-              </a:defRPr>
-            </a:pPr>
-            <a:r>
-              <a:t>Book a consultation or surgery slot securely.</a:t>
-            </a:r>
-          </a:p>
-          <a:p>
-            <a:pPr>
-              <a:spcAft>
-                <a:spcPts val="1000"/>
-              </a:spcAft>
-              <a:defRPr sz="2000">
-                <a:solidFill>
-                  <a:srgbClr val="0F172A"/>
-                </a:solidFill>
-              </a:defRPr>
-            </a:pPr>
-            <a:r>
-              <a:t>Track or cancel the booking from booking history.</a:t>
+                <a:latin typeface="Aptos"/>
+              </a:rPr>
+              <a:t>04</a:t>
             </a:r>
           </a:p>
         </p:txBody>
@@ -5697,18 +7457,18 @@
         </p:nvSpPr>
         <p:spPr>
           <a:xfrm>
-            <a:off x="411480" y="320040"/>
-            <a:ext cx="11338560" cy="822960"/>
+            <a:off x="502920" y="384048"/>
+            <a:ext cx="1874519" cy="457200"/>
           </a:xfrm>
           <a:prstGeom prst="roundRect">
             <a:avLst/>
           </a:prstGeom>
           <a:solidFill>
-            <a:srgbClr val="F0FDFA"/>
+            <a:srgbClr val="ECFEFF"/>
           </a:solidFill>
           <a:ln>
             <a:solidFill>
-              <a:srgbClr val="CCFBF1"/>
+              <a:srgbClr val="A5F3FC"/>
             </a:solidFill>
           </a:ln>
         </p:spPr>
@@ -5742,51 +7502,88 @@
         </p:nvSpPr>
         <p:spPr>
           <a:xfrm>
-            <a:off x="685800" y="475488"/>
-            <a:ext cx="7772400" cy="411480"/>
-          </a:xfrm>
-          <a:prstGeom prst="rect">
-            <a:avLst/>
-          </a:prstGeom>
-          <a:noFill/>
-        </p:spPr>
-        <p:txBody>
-          <a:bodyPr wrap="none">
-            <a:spAutoFit/>
-          </a:bodyPr>
-          <a:lstStyle/>
-          <a:p>
-            <a:r>
-              <a:rPr sz="2800" b="1">
+            <a:off x="658368" y="493776"/>
+            <a:ext cx="1554480" cy="182880"/>
+          </a:xfrm>
+          <a:prstGeom prst="rect">
+            <a:avLst/>
+          </a:prstGeom>
+          <a:noFill/>
+        </p:spPr>
+        <p:txBody>
+          <a:bodyPr wrap="square">
+            <a:normAutofit/>
+          </a:bodyPr>
+          <a:lstStyle/>
+          <a:p>
+            <a:pPr algn="l"/>
+            <a:r>
+              <a:rPr sz="1100" b="1" i="0">
+                <a:solidFill>
+                  <a:srgbClr val="0D746F"/>
+                </a:solidFill>
+                <a:latin typeface="Aptos"/>
+              </a:rPr>
+              <a:t>WHY THIS CAN WIN</a:t>
+            </a:r>
+          </a:p>
+        </p:txBody>
+      </p:sp>
+      <p:sp>
+        <p:nvSpPr>
+          <p:cNvPr id="4" name="TextBox 3"/>
+          <p:cNvSpPr txBox="1"/>
+          <p:nvPr/>
+        </p:nvSpPr>
+        <p:spPr>
+          <a:xfrm>
+            <a:off x="640080" y="914400"/>
+            <a:ext cx="5669280" cy="822960"/>
+          </a:xfrm>
+          <a:prstGeom prst="rect">
+            <a:avLst/>
+          </a:prstGeom>
+          <a:noFill/>
+        </p:spPr>
+        <p:txBody>
+          <a:bodyPr wrap="square">
+            <a:normAutofit/>
+          </a:bodyPr>
+          <a:lstStyle/>
+          <a:p>
+            <a:pPr algn="l"/>
+            <a:r>
+              <a:rPr sz="2800" b="1" i="0">
                 <a:solidFill>
                   <a:srgbClr val="0F172A"/>
                 </a:solidFill>
-              </a:rPr>
-              <a:t>Key Features</a:t>
-            </a:r>
-          </a:p>
-        </p:txBody>
-      </p:sp>
-      <p:sp>
-        <p:nvSpPr>
-          <p:cNvPr id="4" name="Rounded Rectangle 3"/>
+                <a:latin typeface="Aptos"/>
+              </a:rPr>
+              <a:t>Most tools stop at discovery. SurgiFind continues to decision and action.</a:t>
+            </a:r>
+          </a:p>
+        </p:txBody>
+      </p:sp>
+      <p:sp>
+        <p:nvSpPr>
+          <p:cNvPr id="5" name="Rounded Rectangle 4"/>
           <p:cNvSpPr/>
           <p:nvPr/>
         </p:nvSpPr>
         <p:spPr>
           <a:xfrm>
-            <a:off x="10058400" y="475488"/>
-            <a:ext cx="1097280" cy="310896"/>
+            <a:off x="749808" y="1965960"/>
+            <a:ext cx="3520440" cy="2971800"/>
           </a:xfrm>
           <a:prstGeom prst="roundRect">
             <a:avLst/>
           </a:prstGeom>
           <a:solidFill>
-            <a:srgbClr val="0D9488"/>
+            <a:srgbClr val="ECFEFF"/>
           </a:solidFill>
           <a:ln>
             <a:solidFill>
-              <a:srgbClr val="0D9488"/>
+              <a:srgbClr val="CBD5E1"/>
             </a:solidFill>
           </a:ln>
         </p:spPr>
@@ -5814,58 +7611,94 @@
       </p:sp>
       <p:sp>
         <p:nvSpPr>
-          <p:cNvPr id="5" name="TextBox 4"/>
-          <p:cNvSpPr txBox="1"/>
-          <p:nvPr/>
-        </p:nvSpPr>
-        <p:spPr>
-          <a:xfrm>
-            <a:off x="10058400" y="512064"/>
-            <a:ext cx="1097280" cy="228600"/>
-          </a:xfrm>
-          <a:prstGeom prst="rect">
-            <a:avLst/>
-          </a:prstGeom>
-          <a:noFill/>
-        </p:spPr>
-        <p:txBody>
-          <a:bodyPr wrap="none">
-            <a:spAutoFit/>
-          </a:bodyPr>
-          <a:lstStyle/>
-          <a:p>
-            <a:pPr algn="ctr"/>
-            <a:r>
-              <a:rPr sz="1200" b="1">
-                <a:solidFill>
-                  <a:srgbClr val="FFFFFF"/>
-                </a:solidFill>
-              </a:rPr>
-              <a:t>05</a:t>
-            </a:r>
-          </a:p>
-        </p:txBody>
-      </p:sp>
-      <p:sp>
-        <p:nvSpPr>
-          <p:cNvPr id="6" name="Rounded Rectangle 5"/>
+          <p:cNvPr id="6" name="TextBox 5"/>
+          <p:cNvSpPr txBox="1"/>
+          <p:nvPr/>
+        </p:nvSpPr>
+        <p:spPr>
+          <a:xfrm>
+            <a:off x="950976" y="2258568"/>
+            <a:ext cx="2560320" cy="320040"/>
+          </a:xfrm>
+          <a:prstGeom prst="rect">
+            <a:avLst/>
+          </a:prstGeom>
+          <a:noFill/>
+        </p:spPr>
+        <p:txBody>
+          <a:bodyPr wrap="square">
+            <a:normAutofit/>
+          </a:bodyPr>
+          <a:lstStyle/>
+          <a:p>
+            <a:pPr algn="l"/>
+            <a:r>
+              <a:rPr sz="2100" b="1" i="0">
+                <a:solidFill>
+                  <a:srgbClr val="0F172A"/>
+                </a:solidFill>
+                <a:latin typeface="Aptos"/>
+              </a:rPr>
+              <a:t>Discovery</a:t>
+            </a:r>
+          </a:p>
+        </p:txBody>
+      </p:sp>
+      <p:sp>
+        <p:nvSpPr>
+          <p:cNvPr id="7" name="TextBox 6"/>
+          <p:cNvSpPr txBox="1"/>
+          <p:nvPr/>
+        </p:nvSpPr>
+        <p:spPr>
+          <a:xfrm>
+            <a:off x="950976" y="2743200"/>
+            <a:ext cx="2834640" cy="914400"/>
+          </a:xfrm>
+          <a:prstGeom prst="rect">
+            <a:avLst/>
+          </a:prstGeom>
+          <a:noFill/>
+        </p:spPr>
+        <p:txBody>
+          <a:bodyPr wrap="square">
+            <a:normAutofit/>
+          </a:bodyPr>
+          <a:lstStyle/>
+          <a:p>
+            <a:pPr algn="l"/>
+            <a:r>
+              <a:rPr sz="1400" b="0" i="0">
+                <a:solidFill>
+                  <a:srgbClr val="475569"/>
+                </a:solidFill>
+                <a:latin typeface="Aptos"/>
+              </a:rPr>
+              <a:t>Search hospitals by surgery, city, budget, rating, and type.</a:t>
+            </a:r>
+          </a:p>
+        </p:txBody>
+      </p:sp>
+      <p:sp>
+        <p:nvSpPr>
+          <p:cNvPr id="8" name="Rounded Rectangle 7"/>
           <p:cNvSpPr/>
           <p:nvPr/>
         </p:nvSpPr>
         <p:spPr>
           <a:xfrm>
-            <a:off x="640080" y="1417320"/>
-            <a:ext cx="10972800" cy="4846320"/>
+            <a:off x="4517136" y="1965960"/>
+            <a:ext cx="3520440" cy="2971800"/>
           </a:xfrm>
           <a:prstGeom prst="roundRect">
             <a:avLst/>
           </a:prstGeom>
           <a:solidFill>
-            <a:srgbClr val="FFFFFF"/>
+            <a:srgbClr val="ECFDF5"/>
           </a:solidFill>
           <a:ln>
             <a:solidFill>
-              <a:srgbClr val="E2E8F0"/>
+              <a:srgbClr val="CBD5E1"/>
             </a:solidFill>
           </a:ln>
         </p:spPr>
@@ -5893,98 +7726,345 @@
       </p:sp>
       <p:sp>
         <p:nvSpPr>
-          <p:cNvPr id="7" name="TextBox 6"/>
-          <p:cNvSpPr txBox="1"/>
-          <p:nvPr/>
-        </p:nvSpPr>
-        <p:spPr>
-          <a:xfrm>
-            <a:off x="914400" y="1783080"/>
-            <a:ext cx="9875520" cy="3566160"/>
-          </a:xfrm>
-          <a:prstGeom prst="rect">
-            <a:avLst/>
-          </a:prstGeom>
-          <a:noFill/>
-        </p:spPr>
-        <p:txBody>
-          <a:bodyPr wrap="square">
-            <a:spAutoFit/>
-          </a:bodyPr>
-          <a:lstStyle/>
-          <a:p>
-            <a:pPr>
-              <a:spcAft>
-                <a:spcPts val="1000"/>
-              </a:spcAft>
-              <a:defRPr sz="2000">
+          <p:cNvPr id="9" name="TextBox 8"/>
+          <p:cNvSpPr txBox="1"/>
+          <p:nvPr/>
+        </p:nvSpPr>
+        <p:spPr>
+          <a:xfrm>
+            <a:off x="4718304" y="2258568"/>
+            <a:ext cx="2560320" cy="320040"/>
+          </a:xfrm>
+          <a:prstGeom prst="rect">
+            <a:avLst/>
+          </a:prstGeom>
+          <a:noFill/>
+        </p:spPr>
+        <p:txBody>
+          <a:bodyPr wrap="square">
+            <a:normAutofit/>
+          </a:bodyPr>
+          <a:lstStyle/>
+          <a:p>
+            <a:pPr algn="l"/>
+            <a:r>
+              <a:rPr sz="2100" b="1" i="0">
                 <a:solidFill>
                   <a:srgbClr val="0F172A"/>
                 </a:solidFill>
-              </a:defRPr>
-            </a:pPr>
-            <a:r>
-              <a:t>Smart surgery search with filters</a:t>
-            </a:r>
-          </a:p>
-          <a:p>
-            <a:pPr>
-              <a:spcAft>
-                <a:spcPts val="1000"/>
-              </a:spcAft>
-              <a:defRPr sz="2000">
+                <a:latin typeface="Aptos"/>
+              </a:rPr>
+              <a:t>Decision</a:t>
+            </a:r>
+          </a:p>
+        </p:txBody>
+      </p:sp>
+      <p:sp>
+        <p:nvSpPr>
+          <p:cNvPr id="10" name="TextBox 9"/>
+          <p:cNvSpPr txBox="1"/>
+          <p:nvPr/>
+        </p:nvSpPr>
+        <p:spPr>
+          <a:xfrm>
+            <a:off x="4718304" y="2743200"/>
+            <a:ext cx="2834640" cy="914400"/>
+          </a:xfrm>
+          <a:prstGeom prst="rect">
+            <a:avLst/>
+          </a:prstGeom>
+          <a:noFill/>
+        </p:spPr>
+        <p:txBody>
+          <a:bodyPr wrap="square">
+            <a:normAutofit/>
+          </a:bodyPr>
+          <a:lstStyle/>
+          <a:p>
+            <a:pPr algn="l"/>
+            <a:r>
+              <a:rPr sz="1400" b="0" i="0">
+                <a:solidFill>
+                  <a:srgbClr val="475569"/>
+                </a:solidFill>
+                <a:latin typeface="Aptos"/>
+              </a:rPr>
+              <a:t>Give price clarity, insurance relevance, and conversational support.</a:t>
+            </a:r>
+          </a:p>
+        </p:txBody>
+      </p:sp>
+      <p:sp>
+        <p:nvSpPr>
+          <p:cNvPr id="11" name="Rounded Rectangle 10"/>
+          <p:cNvSpPr/>
+          <p:nvPr/>
+        </p:nvSpPr>
+        <p:spPr>
+          <a:xfrm>
+            <a:off x="8284464" y="1965960"/>
+            <a:ext cx="3520440" cy="2971800"/>
+          </a:xfrm>
+          <a:prstGeom prst="roundRect">
+            <a:avLst/>
+          </a:prstGeom>
+          <a:solidFill>
+            <a:srgbClr val="FFF7ED"/>
+          </a:solidFill>
+          <a:ln>
+            <a:solidFill>
+              <a:srgbClr val="CBD5E1"/>
+            </a:solidFill>
+          </a:ln>
+        </p:spPr>
+        <p:style>
+          <a:lnRef idx="1">
+            <a:schemeClr val="accent1"/>
+          </a:lnRef>
+          <a:fillRef idx="3">
+            <a:schemeClr val="accent1"/>
+          </a:fillRef>
+          <a:effectRef idx="2">
+            <a:schemeClr val="accent1"/>
+          </a:effectRef>
+          <a:fontRef idx="minor">
+            <a:schemeClr val="lt1"/>
+          </a:fontRef>
+        </p:style>
+        <p:txBody>
+          <a:bodyPr rtlCol="0" anchor="ctr"/>
+          <a:lstStyle/>
+          <a:p>
+            <a:pPr algn="ctr"/>
+          </a:p>
+        </p:txBody>
+      </p:sp>
+      <p:sp>
+        <p:nvSpPr>
+          <p:cNvPr id="12" name="TextBox 11"/>
+          <p:cNvSpPr txBox="1"/>
+          <p:nvPr/>
+        </p:nvSpPr>
+        <p:spPr>
+          <a:xfrm>
+            <a:off x="8485632" y="2258568"/>
+            <a:ext cx="2560320" cy="320040"/>
+          </a:xfrm>
+          <a:prstGeom prst="rect">
+            <a:avLst/>
+          </a:prstGeom>
+          <a:noFill/>
+        </p:spPr>
+        <p:txBody>
+          <a:bodyPr wrap="square">
+            <a:normAutofit/>
+          </a:bodyPr>
+          <a:lstStyle/>
+          <a:p>
+            <a:pPr algn="l"/>
+            <a:r>
+              <a:rPr sz="2100" b="1" i="0">
                 <a:solidFill>
                   <a:srgbClr val="0F172A"/>
                 </a:solidFill>
-              </a:defRPr>
-            </a:pPr>
-            <a:r>
-              <a:t>Conversational assistant with direct search and symptom-assisted guidance</a:t>
-            </a:r>
-          </a:p>
-          <a:p>
-            <a:pPr>
-              <a:spcAft>
-                <a:spcPts val="1000"/>
-              </a:spcAft>
-              <a:defRPr sz="2000">
-                <a:solidFill>
-                  <a:srgbClr val="0F172A"/>
-                </a:solidFill>
-              </a:defRPr>
-            </a:pPr>
-            <a:r>
-              <a:t>Insurance matching against covered surgeries and network hospitals</a:t>
-            </a:r>
-          </a:p>
-          <a:p>
-            <a:pPr>
-              <a:spcAft>
-                <a:spcPts val="1000"/>
-              </a:spcAft>
-              <a:defRPr sz="2000">
-                <a:solidFill>
-                  <a:srgbClr val="0F172A"/>
-                </a:solidFill>
-              </a:defRPr>
-            </a:pPr>
-            <a:r>
-              <a:t>Secure authentication with booking history</a:t>
-            </a:r>
-          </a:p>
-          <a:p>
-            <a:pPr>
-              <a:spcAft>
-                <a:spcPts val="1000"/>
-              </a:spcAft>
-              <a:defRPr sz="2000">
-                <a:solidFill>
-                  <a:srgbClr val="0F172A"/>
-                </a:solidFill>
-              </a:defRPr>
-            </a:pPr>
-            <a:r>
-              <a:t>Slot reservation flow with cancellation support</a:t>
+                <a:latin typeface="Aptos"/>
+              </a:rPr>
+              <a:t>Action</a:t>
+            </a:r>
+          </a:p>
+        </p:txBody>
+      </p:sp>
+      <p:sp>
+        <p:nvSpPr>
+          <p:cNvPr id="13" name="TextBox 12"/>
+          <p:cNvSpPr txBox="1"/>
+          <p:nvPr/>
+        </p:nvSpPr>
+        <p:spPr>
+          <a:xfrm>
+            <a:off x="8485632" y="2743200"/>
+            <a:ext cx="2834640" cy="914400"/>
+          </a:xfrm>
+          <a:prstGeom prst="rect">
+            <a:avLst/>
+          </a:prstGeom>
+          <a:noFill/>
+        </p:spPr>
+        <p:txBody>
+          <a:bodyPr wrap="square">
+            <a:normAutofit/>
+          </a:bodyPr>
+          <a:lstStyle/>
+          <a:p>
+            <a:pPr algn="l"/>
+            <a:r>
+              <a:rPr sz="1400" b="0" i="0">
+                <a:solidFill>
+                  <a:srgbClr val="475569"/>
+                </a:solidFill>
+                <a:latin typeface="Aptos"/>
+              </a:rPr>
+              <a:t>Convert intent into secure booking, history, and cancellation.</a:t>
+            </a:r>
+          </a:p>
+        </p:txBody>
+      </p:sp>
+      <p:sp>
+        <p:nvSpPr>
+          <p:cNvPr id="14" name="Rounded Rectangle 13"/>
+          <p:cNvSpPr/>
+          <p:nvPr/>
+        </p:nvSpPr>
+        <p:spPr>
+          <a:xfrm>
+            <a:off x="749808" y="5257800"/>
+            <a:ext cx="10972800" cy="822960"/>
+          </a:xfrm>
+          <a:prstGeom prst="roundRect">
+            <a:avLst/>
+          </a:prstGeom>
+          <a:solidFill>
+            <a:srgbClr val="0F172A"/>
+          </a:solidFill>
+          <a:ln>
+            <a:solidFill>
+              <a:srgbClr val="0F172A"/>
+            </a:solidFill>
+          </a:ln>
+        </p:spPr>
+        <p:style>
+          <a:lnRef idx="1">
+            <a:schemeClr val="accent1"/>
+          </a:lnRef>
+          <a:fillRef idx="3">
+            <a:schemeClr val="accent1"/>
+          </a:fillRef>
+          <a:effectRef idx="2">
+            <a:schemeClr val="accent1"/>
+          </a:effectRef>
+          <a:fontRef idx="minor">
+            <a:schemeClr val="lt1"/>
+          </a:fontRef>
+        </p:style>
+        <p:txBody>
+          <a:bodyPr rtlCol="0" anchor="ctr"/>
+          <a:lstStyle/>
+          <a:p>
+            <a:pPr algn="ctr"/>
+          </a:p>
+        </p:txBody>
+      </p:sp>
+      <p:sp>
+        <p:nvSpPr>
+          <p:cNvPr id="15" name="TextBox 14"/>
+          <p:cNvSpPr txBox="1"/>
+          <p:nvPr/>
+        </p:nvSpPr>
+        <p:spPr>
+          <a:xfrm>
+            <a:off x="1051560" y="5513832"/>
+            <a:ext cx="10287000" cy="210312"/>
+          </a:xfrm>
+          <a:prstGeom prst="rect">
+            <a:avLst/>
+          </a:prstGeom>
+          <a:noFill/>
+        </p:spPr>
+        <p:txBody>
+          <a:bodyPr wrap="square">
+            <a:normAutofit/>
+          </a:bodyPr>
+          <a:lstStyle/>
+          <a:p>
+            <a:pPr algn="ctr"/>
+            <a:r>
+              <a:rPr sz="1600" b="1" i="0">
+                <a:solidFill>
+                  <a:srgbClr val="FFFFFF"/>
+                </a:solidFill>
+                <a:latin typeface="Aptos"/>
+              </a:rPr>
+              <a:t>This is a workflow product, not just an information product. That is the core differentiator.</a:t>
+            </a:r>
+          </a:p>
+        </p:txBody>
+      </p:sp>
+      <p:sp>
+        <p:nvSpPr>
+          <p:cNvPr id="16" name="Rounded Rectangle 15"/>
+          <p:cNvSpPr/>
+          <p:nvPr/>
+        </p:nvSpPr>
+        <p:spPr>
+          <a:xfrm>
+            <a:off x="10789920" y="502920"/>
+            <a:ext cx="868680" cy="384048"/>
+          </a:xfrm>
+          <a:prstGeom prst="roundRect">
+            <a:avLst/>
+          </a:prstGeom>
+          <a:solidFill>
+            <a:srgbClr val="05ABA5"/>
+          </a:solidFill>
+          <a:ln>
+            <a:solidFill>
+              <a:srgbClr val="05ABA5"/>
+            </a:solidFill>
+          </a:ln>
+        </p:spPr>
+        <p:style>
+          <a:lnRef idx="1">
+            <a:schemeClr val="accent1"/>
+          </a:lnRef>
+          <a:fillRef idx="3">
+            <a:schemeClr val="accent1"/>
+          </a:fillRef>
+          <a:effectRef idx="2">
+            <a:schemeClr val="accent1"/>
+          </a:effectRef>
+          <a:fontRef idx="minor">
+            <a:schemeClr val="lt1"/>
+          </a:fontRef>
+        </p:style>
+        <p:txBody>
+          <a:bodyPr rtlCol="0" anchor="ctr"/>
+          <a:lstStyle/>
+          <a:p>
+            <a:pPr algn="ctr"/>
+          </a:p>
+        </p:txBody>
+      </p:sp>
+      <p:sp>
+        <p:nvSpPr>
+          <p:cNvPr id="17" name="TextBox 16"/>
+          <p:cNvSpPr txBox="1"/>
+          <p:nvPr/>
+        </p:nvSpPr>
+        <p:spPr>
+          <a:xfrm>
+            <a:off x="10789920" y="530352"/>
+            <a:ext cx="868680" cy="256032"/>
+          </a:xfrm>
+          <a:prstGeom prst="rect">
+            <a:avLst/>
+          </a:prstGeom>
+          <a:noFill/>
+        </p:spPr>
+        <p:txBody>
+          <a:bodyPr wrap="square">
+            <a:normAutofit/>
+          </a:bodyPr>
+          <a:lstStyle/>
+          <a:p>
+            <a:pPr algn="ctr"/>
+            <a:r>
+              <a:rPr sz="1100" b="1" i="0">
+                <a:solidFill>
+                  <a:srgbClr val="FFFFFF"/>
+                </a:solidFill>
+                <a:latin typeface="Aptos"/>
+              </a:rPr>
+              <a:t>05</a:t>
             </a:r>
           </a:p>
         </p:txBody>
@@ -6003,7 +8083,7 @@
     <p:bg>
       <p:bgPr>
         <a:solidFill>
-          <a:srgbClr val="FFFFFF"/>
+          <a:srgbClr val="F8FAFC"/>
         </a:solidFill>
         <a:effectLst/>
       </p:bgPr>
@@ -6023,18 +8103,18 @@
         </p:nvSpPr>
         <p:spPr>
           <a:xfrm>
-            <a:off x="411480" y="320040"/>
-            <a:ext cx="11338560" cy="822960"/>
+            <a:off x="502920" y="384048"/>
+            <a:ext cx="1874519" cy="457200"/>
           </a:xfrm>
           <a:prstGeom prst="roundRect">
             <a:avLst/>
           </a:prstGeom>
           <a:solidFill>
-            <a:srgbClr val="F0FDFA"/>
+            <a:srgbClr val="ECFEFF"/>
           </a:solidFill>
           <a:ln>
             <a:solidFill>
-              <a:srgbClr val="CCFBF1"/>
+              <a:srgbClr val="A5F3FC"/>
             </a:solidFill>
           </a:ln>
         </p:spPr>
@@ -6068,51 +8148,123 @@
         </p:nvSpPr>
         <p:spPr>
           <a:xfrm>
-            <a:off x="685800" y="475488"/>
-            <a:ext cx="7772400" cy="411480"/>
-          </a:xfrm>
-          <a:prstGeom prst="rect">
-            <a:avLst/>
-          </a:prstGeom>
-          <a:noFill/>
-        </p:spPr>
-        <p:txBody>
-          <a:bodyPr wrap="none">
-            <a:spAutoFit/>
-          </a:bodyPr>
-          <a:lstStyle/>
-          <a:p>
-            <a:r>
-              <a:rPr sz="2800" b="1">
+            <a:off x="658368" y="493776"/>
+            <a:ext cx="1554480" cy="182880"/>
+          </a:xfrm>
+          <a:prstGeom prst="rect">
+            <a:avLst/>
+          </a:prstGeom>
+          <a:noFill/>
+        </p:spPr>
+        <p:txBody>
+          <a:bodyPr wrap="square">
+            <a:normAutofit/>
+          </a:bodyPr>
+          <a:lstStyle/>
+          <a:p>
+            <a:pPr algn="l"/>
+            <a:r>
+              <a:rPr sz="1100" b="1" i="0">
+                <a:solidFill>
+                  <a:srgbClr val="0D746F"/>
+                </a:solidFill>
+                <a:latin typeface="Aptos"/>
+              </a:rPr>
+              <a:t>VALUE CREATION</a:t>
+            </a:r>
+          </a:p>
+        </p:txBody>
+      </p:sp>
+      <p:sp>
+        <p:nvSpPr>
+          <p:cNvPr id="4" name="TextBox 3"/>
+          <p:cNvSpPr txBox="1"/>
+          <p:nvPr/>
+        </p:nvSpPr>
+        <p:spPr>
+          <a:xfrm>
+            <a:off x="640080" y="914400"/>
+            <a:ext cx="5029200" cy="822960"/>
+          </a:xfrm>
+          <a:prstGeom prst="rect">
+            <a:avLst/>
+          </a:prstGeom>
+          <a:noFill/>
+        </p:spPr>
+        <p:txBody>
+          <a:bodyPr wrap="square">
+            <a:normAutofit/>
+          </a:bodyPr>
+          <a:lstStyle/>
+          <a:p>
+            <a:pPr algn="l"/>
+            <a:r>
+              <a:rPr sz="2800" b="1" i="0">
                 <a:solidFill>
                   <a:srgbClr val="0F172A"/>
                 </a:solidFill>
-              </a:rPr>
-              <a:t>Business Potential</a:t>
-            </a:r>
-          </a:p>
-        </p:txBody>
-      </p:sp>
-      <p:sp>
-        <p:nvSpPr>
-          <p:cNvPr id="4" name="Rounded Rectangle 3"/>
+                <a:latin typeface="Aptos"/>
+              </a:rPr>
+              <a:t>Why this is bigger than a demo</a:t>
+            </a:r>
+          </a:p>
+        </p:txBody>
+      </p:sp>
+      <p:sp>
+        <p:nvSpPr>
+          <p:cNvPr id="5" name="TextBox 4"/>
+          <p:cNvSpPr txBox="1"/>
+          <p:nvPr/>
+        </p:nvSpPr>
+        <p:spPr>
+          <a:xfrm>
+            <a:off x="640080" y="1572768"/>
+            <a:ext cx="4937760" cy="594360"/>
+          </a:xfrm>
+          <a:prstGeom prst="rect">
+            <a:avLst/>
+          </a:prstGeom>
+          <a:noFill/>
+        </p:spPr>
+        <p:txBody>
+          <a:bodyPr wrap="square">
+            <a:normAutofit/>
+          </a:bodyPr>
+          <a:lstStyle/>
+          <a:p>
+            <a:pPr algn="l"/>
+            <a:r>
+              <a:rPr sz="1500" b="0" i="0">
+                <a:solidFill>
+                  <a:srgbClr val="475569"/>
+                </a:solidFill>
+                <a:latin typeface="Aptos"/>
+              </a:rPr>
+              <a:t>SurgiFind creates value for the three parties that matter in planned care.</a:t>
+            </a:r>
+          </a:p>
+        </p:txBody>
+      </p:sp>
+      <p:sp>
+        <p:nvSpPr>
+          <p:cNvPr id="6" name="Rounded Rectangle 5"/>
           <p:cNvSpPr/>
           <p:nvPr/>
         </p:nvSpPr>
         <p:spPr>
           <a:xfrm>
-            <a:off x="10058400" y="475488"/>
-            <a:ext cx="1097280" cy="310896"/>
+            <a:off x="749808" y="2377440"/>
+            <a:ext cx="3529584" cy="2926080"/>
           </a:xfrm>
           <a:prstGeom prst="roundRect">
             <a:avLst/>
           </a:prstGeom>
           <a:solidFill>
-            <a:srgbClr val="0D9488"/>
+            <a:srgbClr val="FFFFFF"/>
           </a:solidFill>
           <a:ln>
             <a:solidFill>
-              <a:srgbClr val="0D9488"/>
+              <a:srgbClr val="CBD5E1"/>
             </a:solidFill>
           </a:ln>
         </p:spPr>
@@ -6140,48 +8292,132 @@
       </p:sp>
       <p:sp>
         <p:nvSpPr>
-          <p:cNvPr id="5" name="TextBox 4"/>
-          <p:cNvSpPr txBox="1"/>
-          <p:nvPr/>
-        </p:nvSpPr>
-        <p:spPr>
-          <a:xfrm>
-            <a:off x="10058400" y="512064"/>
-            <a:ext cx="1097280" cy="228600"/>
-          </a:xfrm>
-          <a:prstGeom prst="rect">
-            <a:avLst/>
-          </a:prstGeom>
-          <a:noFill/>
-        </p:spPr>
-        <p:txBody>
-          <a:bodyPr wrap="none">
-            <a:spAutoFit/>
-          </a:bodyPr>
-          <a:lstStyle/>
-          <a:p>
-            <a:pPr algn="ctr"/>
-            <a:r>
-              <a:rPr sz="1200" b="1">
-                <a:solidFill>
-                  <a:srgbClr val="FFFFFF"/>
-                </a:solidFill>
-              </a:rPr>
-              <a:t>06</a:t>
-            </a:r>
-          </a:p>
-        </p:txBody>
-      </p:sp>
-      <p:sp>
-        <p:nvSpPr>
-          <p:cNvPr id="6" name="Rounded Rectangle 5"/>
+          <p:cNvPr id="7" name="TextBox 6"/>
+          <p:cNvSpPr txBox="1"/>
+          <p:nvPr/>
+        </p:nvSpPr>
+        <p:spPr>
+          <a:xfrm>
+            <a:off x="969264" y="2697480"/>
+            <a:ext cx="2286000" cy="292608"/>
+          </a:xfrm>
+          <a:prstGeom prst="rect">
+            <a:avLst/>
+          </a:prstGeom>
+          <a:noFill/>
+        </p:spPr>
+        <p:txBody>
+          <a:bodyPr wrap="square">
+            <a:normAutofit/>
+          </a:bodyPr>
+          <a:lstStyle/>
+          <a:p>
+            <a:pPr algn="l"/>
+            <a:r>
+              <a:rPr sz="2100" b="1" i="0">
+                <a:solidFill>
+                  <a:srgbClr val="0F172A"/>
+                </a:solidFill>
+                <a:latin typeface="Aptos"/>
+              </a:rPr>
+              <a:t>Patients</a:t>
+            </a:r>
+          </a:p>
+        </p:txBody>
+      </p:sp>
+      <p:sp>
+        <p:nvSpPr>
+          <p:cNvPr id="8" name="TextBox 7"/>
+          <p:cNvSpPr txBox="1"/>
+          <p:nvPr/>
+        </p:nvSpPr>
+        <p:spPr>
+          <a:xfrm>
+            <a:off x="914400" y="3154680"/>
+            <a:ext cx="2926080" cy="1737360"/>
+          </a:xfrm>
+          <a:prstGeom prst="rect">
+            <a:avLst/>
+          </a:prstGeom>
+          <a:noFill/>
+        </p:spPr>
+        <p:txBody>
+          <a:bodyPr wrap="square">
+            <a:normAutofit/>
+          </a:bodyPr>
+          <a:lstStyle/>
+          <a:p>
+            <a:pPr>
+              <a:spcAft>
+                <a:spcPts val="800"/>
+              </a:spcAft>
+              <a:defRPr sz="1500">
+                <a:solidFill>
+                  <a:srgbClr val="0F172A"/>
+                </a:solidFill>
+              </a:defRPr>
+            </a:pPr>
+            <a:r>
+              <a:rPr>
+                <a:solidFill>
+                  <a:srgbClr val="0F172A"/>
+                </a:solidFill>
+              </a:rPr>
+              <a:t>Less confusion before surgery</a:t>
+            </a:r>
+          </a:p>
+          <a:p>
+            <a:pPr>
+              <a:spcAft>
+                <a:spcPts val="800"/>
+              </a:spcAft>
+              <a:defRPr sz="1500">
+                <a:solidFill>
+                  <a:srgbClr val="0F172A"/>
+                </a:solidFill>
+              </a:defRPr>
+            </a:pPr>
+            <a:r>
+              <a:rPr>
+                <a:solidFill>
+                  <a:srgbClr val="0F172A"/>
+                </a:solidFill>
+              </a:rPr>
+              <a:t>Faster shortlist creation</a:t>
+            </a:r>
+          </a:p>
+          <a:p>
+            <a:pPr>
+              <a:spcAft>
+                <a:spcPts val="800"/>
+              </a:spcAft>
+              <a:defRPr sz="1500">
+                <a:solidFill>
+                  <a:srgbClr val="0F172A"/>
+                </a:solidFill>
+              </a:defRPr>
+            </a:pPr>
+            <a:r>
+              <a:rPr>
+                <a:solidFill>
+                  <a:srgbClr val="0F172A"/>
+                </a:solidFill>
+              </a:rPr>
+              <a:t>Clarity on cost and booking</a:t>
+            </a:r>
+          </a:p>
+        </p:txBody>
+      </p:sp>
+      <p:sp>
+        <p:nvSpPr>
+          <p:cNvPr id="9" name="Rounded Rectangle 8"/>
           <p:cNvSpPr/>
           <p:nvPr/>
         </p:nvSpPr>
         <p:spPr>
           <a:xfrm>
-            <a:off x="640080" y="1417320"/>
-            <a:ext cx="10972800" cy="4846320"/>
+            <a:off x="4480560" y="2377440"/>
+            <a:ext cx="3529584" cy="2926080"/>
           </a:xfrm>
           <a:prstGeom prst="roundRect">
             <a:avLst/>
@@ -6191,7 +8427,7 @@
           </a:solidFill>
           <a:ln>
             <a:solidFill>
-              <a:srgbClr val="E2E8F0"/>
+              <a:srgbClr val="CBD5E1"/>
             </a:solidFill>
           </a:ln>
         </p:spPr>
@@ -6219,98 +8455,441 @@
       </p:sp>
       <p:sp>
         <p:nvSpPr>
-          <p:cNvPr id="7" name="TextBox 6"/>
-          <p:cNvSpPr txBox="1"/>
-          <p:nvPr/>
-        </p:nvSpPr>
-        <p:spPr>
-          <a:xfrm>
-            <a:off x="914400" y="1783080"/>
-            <a:ext cx="9875520" cy="3566160"/>
-          </a:xfrm>
-          <a:prstGeom prst="rect">
-            <a:avLst/>
-          </a:prstGeom>
-          <a:noFill/>
-        </p:spPr>
-        <p:txBody>
-          <a:bodyPr wrap="square">
-            <a:spAutoFit/>
+          <p:cNvPr id="10" name="TextBox 9"/>
+          <p:cNvSpPr txBox="1"/>
+          <p:nvPr/>
+        </p:nvSpPr>
+        <p:spPr>
+          <a:xfrm>
+            <a:off x="4700016" y="2697480"/>
+            <a:ext cx="2286000" cy="292608"/>
+          </a:xfrm>
+          <a:prstGeom prst="rect">
+            <a:avLst/>
+          </a:prstGeom>
+          <a:noFill/>
+        </p:spPr>
+        <p:txBody>
+          <a:bodyPr wrap="square">
+            <a:normAutofit/>
+          </a:bodyPr>
+          <a:lstStyle/>
+          <a:p>
+            <a:pPr algn="l"/>
+            <a:r>
+              <a:rPr sz="2100" b="1" i="0">
+                <a:solidFill>
+                  <a:srgbClr val="0F172A"/>
+                </a:solidFill>
+                <a:latin typeface="Aptos"/>
+              </a:rPr>
+              <a:t>Hospitals</a:t>
+            </a:r>
+          </a:p>
+        </p:txBody>
+      </p:sp>
+      <p:sp>
+        <p:nvSpPr>
+          <p:cNvPr id="11" name="TextBox 10"/>
+          <p:cNvSpPr txBox="1"/>
+          <p:nvPr/>
+        </p:nvSpPr>
+        <p:spPr>
+          <a:xfrm>
+            <a:off x="4645152" y="3154680"/>
+            <a:ext cx="2926080" cy="1737360"/>
+          </a:xfrm>
+          <a:prstGeom prst="rect">
+            <a:avLst/>
+          </a:prstGeom>
+          <a:noFill/>
+        </p:spPr>
+        <p:txBody>
+          <a:bodyPr wrap="square">
+            <a:normAutofit/>
           </a:bodyPr>
           <a:lstStyle/>
           <a:p>
             <a:pPr>
               <a:spcAft>
-                <a:spcPts val="1000"/>
+                <a:spcPts val="800"/>
               </a:spcAft>
-              <a:defRPr sz="2000">
+              <a:defRPr sz="1500">
                 <a:solidFill>
                   <a:srgbClr val="0F172A"/>
                 </a:solidFill>
               </a:defRPr>
             </a:pPr>
             <a:r>
-              <a:t>Lead generation fees from hospitals</a:t>
+              <a:rPr>
+                <a:solidFill>
+                  <a:srgbClr val="0F172A"/>
+                </a:solidFill>
+              </a:rPr>
+              <a:t>Qualified high-intent leads</a:t>
             </a:r>
           </a:p>
           <a:p>
             <a:pPr>
               <a:spcAft>
-                <a:spcPts val="1000"/>
+                <a:spcPts val="800"/>
               </a:spcAft>
-              <a:defRPr sz="2000">
+              <a:defRPr sz="1500">
                 <a:solidFill>
                   <a:srgbClr val="0F172A"/>
                 </a:solidFill>
               </a:defRPr>
             </a:pPr>
             <a:r>
-              <a:t>Premium listings or sponsored discovery placement</a:t>
+              <a:rPr>
+                <a:solidFill>
+                  <a:srgbClr val="0F172A"/>
+                </a:solidFill>
+              </a:rPr>
+              <a:t>Better booking conversion</a:t>
             </a:r>
           </a:p>
           <a:p>
             <a:pPr>
               <a:spcAft>
-                <a:spcPts val="1000"/>
+                <a:spcPts val="800"/>
               </a:spcAft>
-              <a:defRPr sz="2000">
+              <a:defRPr sz="1500">
                 <a:solidFill>
                   <a:srgbClr val="0F172A"/>
                 </a:solidFill>
               </a:defRPr>
             </a:pPr>
             <a:r>
-              <a:t>Booking conversion commissions</a:t>
-            </a:r>
-          </a:p>
+              <a:rPr>
+                <a:solidFill>
+                  <a:srgbClr val="0F172A"/>
+                </a:solidFill>
+              </a:rPr>
+              <a:t>Lower manual follow-up load</a:t>
+            </a:r>
+          </a:p>
+        </p:txBody>
+      </p:sp>
+      <p:sp>
+        <p:nvSpPr>
+          <p:cNvPr id="12" name="Rounded Rectangle 11"/>
+          <p:cNvSpPr/>
+          <p:nvPr/>
+        </p:nvSpPr>
+        <p:spPr>
+          <a:xfrm>
+            <a:off x="8211312" y="2377440"/>
+            <a:ext cx="3529584" cy="2926080"/>
+          </a:xfrm>
+          <a:prstGeom prst="roundRect">
+            <a:avLst/>
+          </a:prstGeom>
+          <a:solidFill>
+            <a:srgbClr val="FFFFFF"/>
+          </a:solidFill>
+          <a:ln>
+            <a:solidFill>
+              <a:srgbClr val="CBD5E1"/>
+            </a:solidFill>
+          </a:ln>
+        </p:spPr>
+        <p:style>
+          <a:lnRef idx="1">
+            <a:schemeClr val="accent1"/>
+          </a:lnRef>
+          <a:fillRef idx="3">
+            <a:schemeClr val="accent1"/>
+          </a:fillRef>
+          <a:effectRef idx="2">
+            <a:schemeClr val="accent1"/>
+          </a:effectRef>
+          <a:fontRef idx="minor">
+            <a:schemeClr val="lt1"/>
+          </a:fontRef>
+        </p:style>
+        <p:txBody>
+          <a:bodyPr rtlCol="0" anchor="ctr"/>
+          <a:lstStyle/>
+          <a:p>
+            <a:pPr algn="ctr"/>
+          </a:p>
+        </p:txBody>
+      </p:sp>
+      <p:sp>
+        <p:nvSpPr>
+          <p:cNvPr id="13" name="TextBox 12"/>
+          <p:cNvSpPr txBox="1"/>
+          <p:nvPr/>
+        </p:nvSpPr>
+        <p:spPr>
+          <a:xfrm>
+            <a:off x="8430768" y="2697480"/>
+            <a:ext cx="2286000" cy="292608"/>
+          </a:xfrm>
+          <a:prstGeom prst="rect">
+            <a:avLst/>
+          </a:prstGeom>
+          <a:noFill/>
+        </p:spPr>
+        <p:txBody>
+          <a:bodyPr wrap="square">
+            <a:normAutofit/>
+          </a:bodyPr>
+          <a:lstStyle/>
+          <a:p>
+            <a:pPr algn="l"/>
+            <a:r>
+              <a:rPr sz="2100" b="1" i="0">
+                <a:solidFill>
+                  <a:srgbClr val="0F172A"/>
+                </a:solidFill>
+                <a:latin typeface="Aptos"/>
+              </a:rPr>
+              <a:t>Partners</a:t>
+            </a:r>
+          </a:p>
+        </p:txBody>
+      </p:sp>
+      <p:sp>
+        <p:nvSpPr>
+          <p:cNvPr id="14" name="TextBox 13"/>
+          <p:cNvSpPr txBox="1"/>
+          <p:nvPr/>
+        </p:nvSpPr>
+        <p:spPr>
+          <a:xfrm>
+            <a:off x="8375904" y="3154680"/>
+            <a:ext cx="2926080" cy="1737360"/>
+          </a:xfrm>
+          <a:prstGeom prst="rect">
+            <a:avLst/>
+          </a:prstGeom>
+          <a:noFill/>
+        </p:spPr>
+        <p:txBody>
+          <a:bodyPr wrap="square">
+            <a:normAutofit/>
+          </a:bodyPr>
+          <a:lstStyle/>
           <a:p>
             <a:pPr>
               <a:spcAft>
-                <a:spcPts val="1000"/>
+                <a:spcPts val="800"/>
               </a:spcAft>
-              <a:defRPr sz="2000">
+              <a:defRPr sz="1500">
                 <a:solidFill>
                   <a:srgbClr val="0F172A"/>
                 </a:solidFill>
               </a:defRPr>
             </a:pPr>
             <a:r>
-              <a:t>Insurance partnership and referral workflows</a:t>
+              <a:rPr>
+                <a:solidFill>
+                  <a:srgbClr val="0F172A"/>
+                </a:solidFill>
+              </a:rPr>
+              <a:t>Insurance relevance</a:t>
             </a:r>
           </a:p>
           <a:p>
             <a:pPr>
               <a:spcAft>
-                <a:spcPts val="1000"/>
+                <a:spcPts val="800"/>
               </a:spcAft>
-              <a:defRPr sz="2000">
+              <a:defRPr sz="1500">
                 <a:solidFill>
                   <a:srgbClr val="0F172A"/>
                 </a:solidFill>
               </a:defRPr>
             </a:pPr>
             <a:r>
-              <a:t>Care navigation subscriptions for high-intent users</a:t>
+              <a:rPr>
+                <a:solidFill>
+                  <a:srgbClr val="0F172A"/>
+                </a:solidFill>
+              </a:rPr>
+              <a:t>Future referral workflows</a:t>
+            </a:r>
+          </a:p>
+          <a:p>
+            <a:pPr>
+              <a:spcAft>
+                <a:spcPts val="800"/>
+              </a:spcAft>
+              <a:defRPr sz="1500">
+                <a:solidFill>
+                  <a:srgbClr val="0F172A"/>
+                </a:solidFill>
+              </a:defRPr>
+            </a:pPr>
+            <a:r>
+              <a:rPr>
+                <a:solidFill>
+                  <a:srgbClr val="0F172A"/>
+                </a:solidFill>
+              </a:rPr>
+              <a:t>Operational integration potential</a:t>
+            </a:r>
+          </a:p>
+        </p:txBody>
+      </p:sp>
+      <p:sp>
+        <p:nvSpPr>
+          <p:cNvPr id="15" name="Rounded Rectangle 14"/>
+          <p:cNvSpPr/>
+          <p:nvPr/>
+        </p:nvSpPr>
+        <p:spPr>
+          <a:xfrm>
+            <a:off x="749808" y="5486400"/>
+            <a:ext cx="10972800" cy="566928"/>
+          </a:xfrm>
+          <a:prstGeom prst="roundRect">
+            <a:avLst/>
+          </a:prstGeom>
+          <a:solidFill>
+            <a:srgbClr val="ECFEFF"/>
+          </a:solidFill>
+          <a:ln>
+            <a:solidFill>
+              <a:srgbClr val="A5F3FC"/>
+            </a:solidFill>
+          </a:ln>
+        </p:spPr>
+        <p:style>
+          <a:lnRef idx="1">
+            <a:schemeClr val="accent1"/>
+          </a:lnRef>
+          <a:fillRef idx="3">
+            <a:schemeClr val="accent1"/>
+          </a:fillRef>
+          <a:effectRef idx="2">
+            <a:schemeClr val="accent1"/>
+          </a:effectRef>
+          <a:fontRef idx="minor">
+            <a:schemeClr val="lt1"/>
+          </a:fontRef>
+        </p:style>
+        <p:txBody>
+          <a:bodyPr rtlCol="0" anchor="ctr"/>
+          <a:lstStyle/>
+          <a:p>
+            <a:pPr algn="ctr"/>
+          </a:p>
+        </p:txBody>
+      </p:sp>
+      <p:sp>
+        <p:nvSpPr>
+          <p:cNvPr id="16" name="TextBox 15"/>
+          <p:cNvSpPr txBox="1"/>
+          <p:nvPr/>
+        </p:nvSpPr>
+        <p:spPr>
+          <a:xfrm>
+            <a:off x="1005840" y="5650992"/>
+            <a:ext cx="10332720" cy="182880"/>
+          </a:xfrm>
+          <a:prstGeom prst="rect">
+            <a:avLst/>
+          </a:prstGeom>
+          <a:noFill/>
+        </p:spPr>
+        <p:txBody>
+          <a:bodyPr wrap="square">
+            <a:normAutofit/>
+          </a:bodyPr>
+          <a:lstStyle/>
+          <a:p>
+            <a:pPr algn="ctr"/>
+            <a:r>
+              <a:rPr sz="1400" b="1" i="0">
+                <a:solidFill>
+                  <a:srgbClr val="0D746F"/>
+                </a:solidFill>
+                <a:latin typeface="Aptos"/>
+              </a:rPr>
+              <a:t>Revenue paths: lead generation, premium listings, booking commissions, and care navigation partnerships.</a:t>
+            </a:r>
+          </a:p>
+        </p:txBody>
+      </p:sp>
+      <p:sp>
+        <p:nvSpPr>
+          <p:cNvPr id="17" name="Rounded Rectangle 16"/>
+          <p:cNvSpPr/>
+          <p:nvPr/>
+        </p:nvSpPr>
+        <p:spPr>
+          <a:xfrm>
+            <a:off x="10789920" y="502920"/>
+            <a:ext cx="868680" cy="384048"/>
+          </a:xfrm>
+          <a:prstGeom prst="roundRect">
+            <a:avLst/>
+          </a:prstGeom>
+          <a:solidFill>
+            <a:srgbClr val="05ABA5"/>
+          </a:solidFill>
+          <a:ln>
+            <a:solidFill>
+              <a:srgbClr val="05ABA5"/>
+            </a:solidFill>
+          </a:ln>
+        </p:spPr>
+        <p:style>
+          <a:lnRef idx="1">
+            <a:schemeClr val="accent1"/>
+          </a:lnRef>
+          <a:fillRef idx="3">
+            <a:schemeClr val="accent1"/>
+          </a:fillRef>
+          <a:effectRef idx="2">
+            <a:schemeClr val="accent1"/>
+          </a:effectRef>
+          <a:fontRef idx="minor">
+            <a:schemeClr val="lt1"/>
+          </a:fontRef>
+        </p:style>
+        <p:txBody>
+          <a:bodyPr rtlCol="0" anchor="ctr"/>
+          <a:lstStyle/>
+          <a:p>
+            <a:pPr algn="ctr"/>
+          </a:p>
+        </p:txBody>
+      </p:sp>
+      <p:sp>
+        <p:nvSpPr>
+          <p:cNvPr id="18" name="TextBox 17"/>
+          <p:cNvSpPr txBox="1"/>
+          <p:nvPr/>
+        </p:nvSpPr>
+        <p:spPr>
+          <a:xfrm>
+            <a:off x="10789920" y="530352"/>
+            <a:ext cx="868680" cy="256032"/>
+          </a:xfrm>
+          <a:prstGeom prst="rect">
+            <a:avLst/>
+          </a:prstGeom>
+          <a:noFill/>
+        </p:spPr>
+        <p:txBody>
+          <a:bodyPr wrap="square">
+            <a:normAutofit/>
+          </a:bodyPr>
+          <a:lstStyle/>
+          <a:p>
+            <a:pPr algn="ctr"/>
+            <a:r>
+              <a:rPr sz="1100" b="1" i="0">
+                <a:solidFill>
+                  <a:srgbClr val="FFFFFF"/>
+                </a:solidFill>
+                <a:latin typeface="Aptos"/>
+              </a:rPr>
+              <a:t>06</a:t>
             </a:r>
           </a:p>
         </p:txBody>
@@ -6329,7 +8908,7 @@
     <p:bg>
       <p:bgPr>
         <a:solidFill>
-          <a:srgbClr val="FFFFFF"/>
+          <a:srgbClr val="0A1626"/>
         </a:solidFill>
         <a:effectLst/>
       </p:bgPr>
@@ -6349,18 +8928,18 @@
         </p:nvSpPr>
         <p:spPr>
           <a:xfrm>
-            <a:off x="411480" y="320040"/>
-            <a:ext cx="11338560" cy="822960"/>
+            <a:off x="502920" y="384048"/>
+            <a:ext cx="1874519" cy="457200"/>
           </a:xfrm>
           <a:prstGeom prst="roundRect">
             <a:avLst/>
           </a:prstGeom>
           <a:solidFill>
-            <a:srgbClr val="F0FDFA"/>
+            <a:srgbClr val="122D42"/>
           </a:solidFill>
           <a:ln>
             <a:solidFill>
-              <a:srgbClr val="CCFBF1"/>
+              <a:srgbClr val="2DD4BF"/>
             </a:solidFill>
           </a:ln>
         </p:spPr>
@@ -6394,51 +8973,123 @@
         </p:nvSpPr>
         <p:spPr>
           <a:xfrm>
-            <a:off x="685800" y="475488"/>
-            <a:ext cx="7772400" cy="411480"/>
-          </a:xfrm>
-          <a:prstGeom prst="rect">
-            <a:avLst/>
-          </a:prstGeom>
-          <a:noFill/>
-        </p:spPr>
-        <p:txBody>
-          <a:bodyPr wrap="none">
-            <a:spAutoFit/>
-          </a:bodyPr>
-          <a:lstStyle/>
-          <a:p>
-            <a:r>
-              <a:rPr sz="2800" b="1">
-                <a:solidFill>
-                  <a:srgbClr val="0F172A"/>
-                </a:solidFill>
-              </a:rPr>
-              <a:t>Next Steps</a:t>
-            </a:r>
-          </a:p>
-        </p:txBody>
-      </p:sp>
-      <p:sp>
-        <p:nvSpPr>
-          <p:cNvPr id="4" name="Rounded Rectangle 3"/>
+            <a:off x="658368" y="493776"/>
+            <a:ext cx="1554480" cy="182880"/>
+          </a:xfrm>
+          <a:prstGeom prst="rect">
+            <a:avLst/>
+          </a:prstGeom>
+          <a:noFill/>
+        </p:spPr>
+        <p:txBody>
+          <a:bodyPr wrap="square">
+            <a:normAutofit/>
+          </a:bodyPr>
+          <a:lstStyle/>
+          <a:p>
+            <a:pPr algn="l"/>
+            <a:r>
+              <a:rPr sz="1100" b="1" i="0">
+                <a:solidFill>
+                  <a:srgbClr val="99F6E4"/>
+                </a:solidFill>
+                <a:latin typeface="Aptos"/>
+              </a:rPr>
+              <a:t>NEXT 90 DAYS</a:t>
+            </a:r>
+          </a:p>
+        </p:txBody>
+      </p:sp>
+      <p:sp>
+        <p:nvSpPr>
+          <p:cNvPr id="4" name="TextBox 3"/>
+          <p:cNvSpPr txBox="1"/>
+          <p:nvPr/>
+        </p:nvSpPr>
+        <p:spPr>
+          <a:xfrm>
+            <a:off x="640080" y="914400"/>
+            <a:ext cx="5669280" cy="822960"/>
+          </a:xfrm>
+          <a:prstGeom prst="rect">
+            <a:avLst/>
+          </a:prstGeom>
+          <a:noFill/>
+        </p:spPr>
+        <p:txBody>
+          <a:bodyPr wrap="square">
+            <a:normAutofit/>
+          </a:bodyPr>
+          <a:lstStyle/>
+          <a:p>
+            <a:pPr algn="l"/>
+            <a:r>
+              <a:rPr sz="2800" b="1" i="0">
+                <a:solidFill>
+                  <a:srgbClr val="FFFFFF"/>
+                </a:solidFill>
+                <a:latin typeface="Aptos"/>
+              </a:rPr>
+              <a:t>We know exactly what comes after the prototype</a:t>
+            </a:r>
+          </a:p>
+        </p:txBody>
+      </p:sp>
+      <p:sp>
+        <p:nvSpPr>
+          <p:cNvPr id="5" name="TextBox 4"/>
+          <p:cNvSpPr txBox="1"/>
+          <p:nvPr/>
+        </p:nvSpPr>
+        <p:spPr>
+          <a:xfrm>
+            <a:off x="640080" y="1554480"/>
+            <a:ext cx="5303520" cy="548640"/>
+          </a:xfrm>
+          <a:prstGeom prst="rect">
+            <a:avLst/>
+          </a:prstGeom>
+          <a:noFill/>
+        </p:spPr>
+        <p:txBody>
+          <a:bodyPr wrap="square">
+            <a:normAutofit/>
+          </a:bodyPr>
+          <a:lstStyle/>
+          <a:p>
+            <a:pPr algn="l"/>
+            <a:r>
+              <a:rPr sz="1500" b="0" i="0">
+                <a:solidFill>
+                  <a:srgbClr val="BFDBFE"/>
+                </a:solidFill>
+                <a:latin typeface="Aptos"/>
+              </a:rPr>
+              <a:t>The path forward is payments, production cloud operations, and stronger platform controls.</a:t>
+            </a:r>
+          </a:p>
+        </p:txBody>
+      </p:sp>
+      <p:sp>
+        <p:nvSpPr>
+          <p:cNvPr id="6" name="Rounded Rectangle 5"/>
           <p:cNvSpPr/>
           <p:nvPr/>
         </p:nvSpPr>
         <p:spPr>
           <a:xfrm>
-            <a:off x="10058400" y="475488"/>
-            <a:ext cx="1097280" cy="310896"/>
+            <a:off x="749808" y="2240280"/>
+            <a:ext cx="2578608" cy="1600200"/>
           </a:xfrm>
           <a:prstGeom prst="roundRect">
             <a:avLst/>
           </a:prstGeom>
           <a:solidFill>
-            <a:srgbClr val="0D9488"/>
+            <a:srgbClr val="0F2236"/>
           </a:solidFill>
           <a:ln>
             <a:solidFill>
-              <a:srgbClr val="0D9488"/>
+              <a:srgbClr val="2DD4BF"/>
             </a:solidFill>
           </a:ln>
         </p:spPr>
@@ -6466,48 +9117,429 @@
       </p:sp>
       <p:sp>
         <p:nvSpPr>
-          <p:cNvPr id="5" name="TextBox 4"/>
-          <p:cNvSpPr txBox="1"/>
-          <p:nvPr/>
-        </p:nvSpPr>
-        <p:spPr>
-          <a:xfrm>
-            <a:off x="10058400" y="512064"/>
-            <a:ext cx="1097280" cy="228600"/>
-          </a:xfrm>
-          <a:prstGeom prst="rect">
-            <a:avLst/>
-          </a:prstGeom>
-          <a:noFill/>
-        </p:spPr>
-        <p:txBody>
-          <a:bodyPr wrap="none">
-            <a:spAutoFit/>
-          </a:bodyPr>
-          <a:lstStyle/>
-          <a:p>
-            <a:pPr algn="ctr"/>
-            <a:r>
-              <a:rPr sz="1200" b="1">
+          <p:cNvPr id="7" name="TextBox 6"/>
+          <p:cNvSpPr txBox="1"/>
+          <p:nvPr/>
+        </p:nvSpPr>
+        <p:spPr>
+          <a:xfrm>
+            <a:off x="914400" y="2542032"/>
+            <a:ext cx="1645920" cy="274320"/>
+          </a:xfrm>
+          <a:prstGeom prst="rect">
+            <a:avLst/>
+          </a:prstGeom>
+          <a:noFill/>
+        </p:spPr>
+        <p:txBody>
+          <a:bodyPr wrap="square">
+            <a:normAutofit/>
+          </a:bodyPr>
+          <a:lstStyle/>
+          <a:p>
+            <a:pPr algn="l"/>
+            <a:r>
+              <a:rPr sz="1800" b="1" i="0">
                 <a:solidFill>
                   <a:srgbClr val="FFFFFF"/>
                 </a:solidFill>
-              </a:rPr>
-              <a:t>07</a:t>
-            </a:r>
-          </a:p>
-        </p:txBody>
-      </p:sp>
-      <p:sp>
-        <p:nvSpPr>
-          <p:cNvPr id="6" name="Rounded Rectangle 5"/>
+                <a:latin typeface="Aptos"/>
+              </a:rPr>
+              <a:t>Payments</a:t>
+            </a:r>
+          </a:p>
+        </p:txBody>
+      </p:sp>
+      <p:sp>
+        <p:nvSpPr>
+          <p:cNvPr id="8" name="TextBox 7"/>
+          <p:cNvSpPr txBox="1"/>
+          <p:nvPr/>
+        </p:nvSpPr>
+        <p:spPr>
+          <a:xfrm>
+            <a:off x="914400" y="2971800"/>
+            <a:ext cx="2011680" cy="685800"/>
+          </a:xfrm>
+          <a:prstGeom prst="rect">
+            <a:avLst/>
+          </a:prstGeom>
+          <a:noFill/>
+        </p:spPr>
+        <p:txBody>
+          <a:bodyPr wrap="square">
+            <a:normAutofit/>
+          </a:bodyPr>
+          <a:lstStyle/>
+          <a:p>
+            <a:pPr algn="l"/>
+            <a:r>
+              <a:rPr sz="1200" b="0" i="0">
+                <a:solidFill>
+                  <a:srgbClr val="CBD5E1"/>
+                </a:solidFill>
+                <a:latin typeface="Aptos"/>
+              </a:rPr>
+              <a:t>Deposits, confirmations, refunds, receipts</a:t>
+            </a:r>
+          </a:p>
+        </p:txBody>
+      </p:sp>
+      <p:sp>
+        <p:nvSpPr>
+          <p:cNvPr id="9" name="Rounded Rectangle 8"/>
           <p:cNvSpPr/>
           <p:nvPr/>
         </p:nvSpPr>
         <p:spPr>
           <a:xfrm>
-            <a:off x="640080" y="1417320"/>
-            <a:ext cx="10972800" cy="4846320"/>
+            <a:off x="3538727" y="2240280"/>
+            <a:ext cx="2578608" cy="1600200"/>
+          </a:xfrm>
+          <a:prstGeom prst="roundRect">
+            <a:avLst/>
+          </a:prstGeom>
+          <a:solidFill>
+            <a:srgbClr val="0F2236"/>
+          </a:solidFill>
+          <a:ln>
+            <a:solidFill>
+              <a:srgbClr val="2DD4BF"/>
+            </a:solidFill>
+          </a:ln>
+        </p:spPr>
+        <p:style>
+          <a:lnRef idx="1">
+            <a:schemeClr val="accent1"/>
+          </a:lnRef>
+          <a:fillRef idx="3">
+            <a:schemeClr val="accent1"/>
+          </a:fillRef>
+          <a:effectRef idx="2">
+            <a:schemeClr val="accent1"/>
+          </a:effectRef>
+          <a:fontRef idx="minor">
+            <a:schemeClr val="lt1"/>
+          </a:fontRef>
+        </p:style>
+        <p:txBody>
+          <a:bodyPr rtlCol="0" anchor="ctr"/>
+          <a:lstStyle/>
+          <a:p>
+            <a:pPr algn="ctr"/>
+          </a:p>
+        </p:txBody>
+      </p:sp>
+      <p:sp>
+        <p:nvSpPr>
+          <p:cNvPr id="10" name="TextBox 9"/>
+          <p:cNvSpPr txBox="1"/>
+          <p:nvPr/>
+        </p:nvSpPr>
+        <p:spPr>
+          <a:xfrm>
+            <a:off x="3703320" y="2542032"/>
+            <a:ext cx="1645920" cy="274320"/>
+          </a:xfrm>
+          <a:prstGeom prst="rect">
+            <a:avLst/>
+          </a:prstGeom>
+          <a:noFill/>
+        </p:spPr>
+        <p:txBody>
+          <a:bodyPr wrap="square">
+            <a:normAutofit/>
+          </a:bodyPr>
+          <a:lstStyle/>
+          <a:p>
+            <a:pPr algn="l"/>
+            <a:r>
+              <a:rPr sz="1800" b="1" i="0">
+                <a:solidFill>
+                  <a:srgbClr val="FFFFFF"/>
+                </a:solidFill>
+                <a:latin typeface="Aptos"/>
+              </a:rPr>
+              <a:t>Cloud</a:t>
+            </a:r>
+          </a:p>
+        </p:txBody>
+      </p:sp>
+      <p:sp>
+        <p:nvSpPr>
+          <p:cNvPr id="11" name="TextBox 10"/>
+          <p:cNvSpPr txBox="1"/>
+          <p:nvPr/>
+        </p:nvSpPr>
+        <p:spPr>
+          <a:xfrm>
+            <a:off x="3703320" y="2971800"/>
+            <a:ext cx="2011680" cy="685800"/>
+          </a:xfrm>
+          <a:prstGeom prst="rect">
+            <a:avLst/>
+          </a:prstGeom>
+          <a:noFill/>
+        </p:spPr>
+        <p:txBody>
+          <a:bodyPr wrap="square">
+            <a:normAutofit/>
+          </a:bodyPr>
+          <a:lstStyle/>
+          <a:p>
+            <a:pPr algn="l"/>
+            <a:r>
+              <a:rPr sz="1200" b="0" i="0">
+                <a:solidFill>
+                  <a:srgbClr val="CBD5E1"/>
+                </a:solidFill>
+                <a:latin typeface="Aptos"/>
+              </a:rPr>
+              <a:t>Vercel deployment, CI/CD, managed secrets</a:t>
+            </a:r>
+          </a:p>
+        </p:txBody>
+      </p:sp>
+      <p:sp>
+        <p:nvSpPr>
+          <p:cNvPr id="12" name="Rounded Rectangle 11"/>
+          <p:cNvSpPr/>
+          <p:nvPr/>
+        </p:nvSpPr>
+        <p:spPr>
+          <a:xfrm>
+            <a:off x="6327648" y="2240280"/>
+            <a:ext cx="2578608" cy="1600200"/>
+          </a:xfrm>
+          <a:prstGeom prst="roundRect">
+            <a:avLst/>
+          </a:prstGeom>
+          <a:solidFill>
+            <a:srgbClr val="0F2236"/>
+          </a:solidFill>
+          <a:ln>
+            <a:solidFill>
+              <a:srgbClr val="2DD4BF"/>
+            </a:solidFill>
+          </a:ln>
+        </p:spPr>
+        <p:style>
+          <a:lnRef idx="1">
+            <a:schemeClr val="accent1"/>
+          </a:lnRef>
+          <a:fillRef idx="3">
+            <a:schemeClr val="accent1"/>
+          </a:fillRef>
+          <a:effectRef idx="2">
+            <a:schemeClr val="accent1"/>
+          </a:effectRef>
+          <a:fontRef idx="minor">
+            <a:schemeClr val="lt1"/>
+          </a:fontRef>
+        </p:style>
+        <p:txBody>
+          <a:bodyPr rtlCol="0" anchor="ctr"/>
+          <a:lstStyle/>
+          <a:p>
+            <a:pPr algn="ctr"/>
+          </a:p>
+        </p:txBody>
+      </p:sp>
+      <p:sp>
+        <p:nvSpPr>
+          <p:cNvPr id="13" name="TextBox 12"/>
+          <p:cNvSpPr txBox="1"/>
+          <p:nvPr/>
+        </p:nvSpPr>
+        <p:spPr>
+          <a:xfrm>
+            <a:off x="6492240" y="2542032"/>
+            <a:ext cx="1645920" cy="274320"/>
+          </a:xfrm>
+          <a:prstGeom prst="rect">
+            <a:avLst/>
+          </a:prstGeom>
+          <a:noFill/>
+        </p:spPr>
+        <p:txBody>
+          <a:bodyPr wrap="square">
+            <a:normAutofit/>
+          </a:bodyPr>
+          <a:lstStyle/>
+          <a:p>
+            <a:pPr algn="l"/>
+            <a:r>
+              <a:rPr sz="1800" b="1" i="0">
+                <a:solidFill>
+                  <a:srgbClr val="FFFFFF"/>
+                </a:solidFill>
+                <a:latin typeface="Aptos"/>
+              </a:rPr>
+              <a:t>Security</a:t>
+            </a:r>
+          </a:p>
+        </p:txBody>
+      </p:sp>
+      <p:sp>
+        <p:nvSpPr>
+          <p:cNvPr id="14" name="TextBox 13"/>
+          <p:cNvSpPr txBox="1"/>
+          <p:nvPr/>
+        </p:nvSpPr>
+        <p:spPr>
+          <a:xfrm>
+            <a:off x="6492240" y="2971800"/>
+            <a:ext cx="2011680" cy="685800"/>
+          </a:xfrm>
+          <a:prstGeom prst="rect">
+            <a:avLst/>
+          </a:prstGeom>
+          <a:noFill/>
+        </p:spPr>
+        <p:txBody>
+          <a:bodyPr wrap="square">
+            <a:normAutofit/>
+          </a:bodyPr>
+          <a:lstStyle/>
+          <a:p>
+            <a:pPr algn="l"/>
+            <a:r>
+              <a:rPr sz="1200" b="0" i="0">
+                <a:solidFill>
+                  <a:srgbClr val="CBD5E1"/>
+                </a:solidFill>
+                <a:latin typeface="Aptos"/>
+              </a:rPr>
+              <a:t>Rate limiting, WAF, audit logging</a:t>
+            </a:r>
+          </a:p>
+        </p:txBody>
+      </p:sp>
+      <p:sp>
+        <p:nvSpPr>
+          <p:cNvPr id="15" name="Rounded Rectangle 14"/>
+          <p:cNvSpPr/>
+          <p:nvPr/>
+        </p:nvSpPr>
+        <p:spPr>
+          <a:xfrm>
+            <a:off x="9116567" y="2240280"/>
+            <a:ext cx="2578608" cy="1600200"/>
+          </a:xfrm>
+          <a:prstGeom prst="roundRect">
+            <a:avLst/>
+          </a:prstGeom>
+          <a:solidFill>
+            <a:srgbClr val="0F2236"/>
+          </a:solidFill>
+          <a:ln>
+            <a:solidFill>
+              <a:srgbClr val="2DD4BF"/>
+            </a:solidFill>
+          </a:ln>
+        </p:spPr>
+        <p:style>
+          <a:lnRef idx="1">
+            <a:schemeClr val="accent1"/>
+          </a:lnRef>
+          <a:fillRef idx="3">
+            <a:schemeClr val="accent1"/>
+          </a:fillRef>
+          <a:effectRef idx="2">
+            <a:schemeClr val="accent1"/>
+          </a:effectRef>
+          <a:fontRef idx="minor">
+            <a:schemeClr val="lt1"/>
+          </a:fontRef>
+        </p:style>
+        <p:txBody>
+          <a:bodyPr rtlCol="0" anchor="ctr"/>
+          <a:lstStyle/>
+          <a:p>
+            <a:pPr algn="ctr"/>
+          </a:p>
+        </p:txBody>
+      </p:sp>
+      <p:sp>
+        <p:nvSpPr>
+          <p:cNvPr id="16" name="TextBox 15"/>
+          <p:cNvSpPr txBox="1"/>
+          <p:nvPr/>
+        </p:nvSpPr>
+        <p:spPr>
+          <a:xfrm>
+            <a:off x="9281159" y="2542032"/>
+            <a:ext cx="1645920" cy="274320"/>
+          </a:xfrm>
+          <a:prstGeom prst="rect">
+            <a:avLst/>
+          </a:prstGeom>
+          <a:noFill/>
+        </p:spPr>
+        <p:txBody>
+          <a:bodyPr wrap="square">
+            <a:normAutofit/>
+          </a:bodyPr>
+          <a:lstStyle/>
+          <a:p>
+            <a:pPr algn="l"/>
+            <a:r>
+              <a:rPr sz="1800" b="1" i="0">
+                <a:solidFill>
+                  <a:srgbClr val="FFFFFF"/>
+                </a:solidFill>
+                <a:latin typeface="Aptos"/>
+              </a:rPr>
+              <a:t>Scale</a:t>
+            </a:r>
+          </a:p>
+        </p:txBody>
+      </p:sp>
+      <p:sp>
+        <p:nvSpPr>
+          <p:cNvPr id="17" name="TextBox 16"/>
+          <p:cNvSpPr txBox="1"/>
+          <p:nvPr/>
+        </p:nvSpPr>
+        <p:spPr>
+          <a:xfrm>
+            <a:off x="9281159" y="2971800"/>
+            <a:ext cx="2011680" cy="685800"/>
+          </a:xfrm>
+          <a:prstGeom prst="rect">
+            <a:avLst/>
+          </a:prstGeom>
+          <a:noFill/>
+        </p:spPr>
+        <p:txBody>
+          <a:bodyPr wrap="square">
+            <a:normAutofit/>
+          </a:bodyPr>
+          <a:lstStyle/>
+          <a:p>
+            <a:pPr algn="l"/>
+            <a:r>
+              <a:rPr sz="1200" b="0" i="0">
+                <a:solidFill>
+                  <a:srgbClr val="CBD5E1"/>
+                </a:solidFill>
+                <a:latin typeface="Aptos"/>
+              </a:rPr>
+              <a:t>Cache, queue, autoscaling, observability</a:t>
+            </a:r>
+          </a:p>
+        </p:txBody>
+      </p:sp>
+      <p:sp>
+        <p:nvSpPr>
+          <p:cNvPr id="18" name="Rounded Rectangle 17"/>
+          <p:cNvSpPr/>
+          <p:nvPr/>
+        </p:nvSpPr>
+        <p:spPr>
+          <a:xfrm>
+            <a:off x="749808" y="4297680"/>
+            <a:ext cx="10972800" cy="1554480"/>
           </a:xfrm>
           <a:prstGeom prst="roundRect">
             <a:avLst/>
@@ -6517,7 +9549,7 @@
           </a:solidFill>
           <a:ln>
             <a:solidFill>
-              <a:srgbClr val="E2E8F0"/>
+              <a:srgbClr val="2DD4BF"/>
             </a:solidFill>
           </a:ln>
         </p:spPr>
@@ -6545,98 +9577,620 @@
       </p:sp>
       <p:sp>
         <p:nvSpPr>
-          <p:cNvPr id="7" name="TextBox 6"/>
-          <p:cNvSpPr txBox="1"/>
-          <p:nvPr/>
-        </p:nvSpPr>
-        <p:spPr>
-          <a:xfrm>
-            <a:off x="914400" y="1783080"/>
-            <a:ext cx="9875520" cy="3566160"/>
-          </a:xfrm>
-          <a:prstGeom prst="rect">
-            <a:avLst/>
-          </a:prstGeom>
-          <a:noFill/>
-        </p:spPr>
-        <p:txBody>
-          <a:bodyPr wrap="square">
-            <a:spAutoFit/>
-          </a:bodyPr>
-          <a:lstStyle/>
-          <a:p>
-            <a:pPr>
-              <a:spcAft>
-                <a:spcPts val="1000"/>
-              </a:spcAft>
-              <a:defRPr sz="2000">
+          <p:cNvPr id="19" name="Rounded Rectangle 18"/>
+          <p:cNvSpPr/>
+          <p:nvPr/>
+        </p:nvSpPr>
+        <p:spPr>
+          <a:xfrm>
+            <a:off x="1005840" y="4681728"/>
+            <a:ext cx="1554480" cy="731520"/>
+          </a:xfrm>
+          <a:prstGeom prst="roundRect">
+            <a:avLst/>
+          </a:prstGeom>
+          <a:solidFill>
+            <a:srgbClr val="F1F5F9"/>
+          </a:solidFill>
+          <a:ln>
+            <a:solidFill>
+              <a:srgbClr val="99F6E4"/>
+            </a:solidFill>
+          </a:ln>
+        </p:spPr>
+        <p:style>
+          <a:lnRef idx="1">
+            <a:schemeClr val="accent1"/>
+          </a:lnRef>
+          <a:fillRef idx="3">
+            <a:schemeClr val="accent1"/>
+          </a:fillRef>
+          <a:effectRef idx="2">
+            <a:schemeClr val="accent1"/>
+          </a:effectRef>
+          <a:fontRef idx="minor">
+            <a:schemeClr val="lt1"/>
+          </a:fontRef>
+        </p:style>
+        <p:txBody>
+          <a:bodyPr rtlCol="0" anchor="ctr"/>
+          <a:lstStyle/>
+          <a:p>
+            <a:pPr algn="ctr"/>
+          </a:p>
+        </p:txBody>
+      </p:sp>
+      <p:sp>
+        <p:nvSpPr>
+          <p:cNvPr id="20" name="TextBox 19"/>
+          <p:cNvSpPr txBox="1"/>
+          <p:nvPr/>
+        </p:nvSpPr>
+        <p:spPr>
+          <a:xfrm>
+            <a:off x="1051560" y="4882896"/>
+            <a:ext cx="1463040" cy="182880"/>
+          </a:xfrm>
+          <a:prstGeom prst="rect">
+            <a:avLst/>
+          </a:prstGeom>
+          <a:noFill/>
+        </p:spPr>
+        <p:txBody>
+          <a:bodyPr wrap="square">
+            <a:normAutofit/>
+          </a:bodyPr>
+          <a:lstStyle/>
+          <a:p>
+            <a:pPr algn="ctr"/>
+            <a:r>
+              <a:rPr sz="1300" b="1" i="0">
                 <a:solidFill>
                   <a:srgbClr val="0F172A"/>
                 </a:solidFill>
-              </a:defRPr>
-            </a:pPr>
-            <a:r>
-              <a:t>Add a payment system for deposits, booking confirmation, refunds, and receipts</a:t>
-            </a:r>
-          </a:p>
-          <a:p>
-            <a:pPr>
-              <a:spcAft>
-                <a:spcPts val="1000"/>
-              </a:spcAft>
-              <a:defRPr sz="2000">
+                <a:latin typeface="Aptos"/>
+              </a:rPr>
+              <a:t>Users</a:t>
+            </a:r>
+          </a:p>
+        </p:txBody>
+      </p:sp>
+      <p:sp>
+        <p:nvSpPr>
+          <p:cNvPr id="21" name="Rounded Rectangle 20"/>
+          <p:cNvSpPr/>
+          <p:nvPr/>
+        </p:nvSpPr>
+        <p:spPr>
+          <a:xfrm>
+            <a:off x="2971800" y="4681728"/>
+            <a:ext cx="1554480" cy="731520"/>
+          </a:xfrm>
+          <a:prstGeom prst="roundRect">
+            <a:avLst/>
+          </a:prstGeom>
+          <a:solidFill>
+            <a:srgbClr val="ECFDF5"/>
+          </a:solidFill>
+          <a:ln>
+            <a:solidFill>
+              <a:srgbClr val="99F6E4"/>
+            </a:solidFill>
+          </a:ln>
+        </p:spPr>
+        <p:style>
+          <a:lnRef idx="1">
+            <a:schemeClr val="accent1"/>
+          </a:lnRef>
+          <a:fillRef idx="3">
+            <a:schemeClr val="accent1"/>
+          </a:fillRef>
+          <a:effectRef idx="2">
+            <a:schemeClr val="accent1"/>
+          </a:effectRef>
+          <a:fontRef idx="minor">
+            <a:schemeClr val="lt1"/>
+          </a:fontRef>
+        </p:style>
+        <p:txBody>
+          <a:bodyPr rtlCol="0" anchor="ctr"/>
+          <a:lstStyle/>
+          <a:p>
+            <a:pPr algn="ctr"/>
+          </a:p>
+        </p:txBody>
+      </p:sp>
+      <p:sp>
+        <p:nvSpPr>
+          <p:cNvPr id="22" name="TextBox 21"/>
+          <p:cNvSpPr txBox="1"/>
+          <p:nvPr/>
+        </p:nvSpPr>
+        <p:spPr>
+          <a:xfrm>
+            <a:off x="3017520" y="4882896"/>
+            <a:ext cx="1463040" cy="182880"/>
+          </a:xfrm>
+          <a:prstGeom prst="rect">
+            <a:avLst/>
+          </a:prstGeom>
+          <a:noFill/>
+        </p:spPr>
+        <p:txBody>
+          <a:bodyPr wrap="square">
+            <a:normAutofit/>
+          </a:bodyPr>
+          <a:lstStyle/>
+          <a:p>
+            <a:pPr algn="ctr"/>
+            <a:r>
+              <a:rPr sz="1300" b="1" i="0">
                 <a:solidFill>
                   <a:srgbClr val="0F172A"/>
                 </a:solidFill>
-              </a:defRPr>
-            </a:pPr>
-            <a:r>
-              <a:t>Complete production cloud deployment with CI/CD, secrets handling, and monitoring</a:t>
-            </a:r>
-          </a:p>
-          <a:p>
-            <a:pPr>
-              <a:spcAft>
-                <a:spcPts val="1000"/>
-              </a:spcAft>
-              <a:defRPr sz="2000">
+                <a:latin typeface="Aptos"/>
+              </a:rPr>
+              <a:t>Edge</a:t>
+            </a:r>
+          </a:p>
+        </p:txBody>
+      </p:sp>
+      <p:sp>
+        <p:nvSpPr>
+          <p:cNvPr id="23" name="Rounded Rectangle 22"/>
+          <p:cNvSpPr/>
+          <p:nvPr/>
+        </p:nvSpPr>
+        <p:spPr>
+          <a:xfrm>
+            <a:off x="4937760" y="4681728"/>
+            <a:ext cx="1554480" cy="731520"/>
+          </a:xfrm>
+          <a:prstGeom prst="roundRect">
+            <a:avLst/>
+          </a:prstGeom>
+          <a:solidFill>
+            <a:srgbClr val="F1F5F9"/>
+          </a:solidFill>
+          <a:ln>
+            <a:solidFill>
+              <a:srgbClr val="99F6E4"/>
+            </a:solidFill>
+          </a:ln>
+        </p:spPr>
+        <p:style>
+          <a:lnRef idx="1">
+            <a:schemeClr val="accent1"/>
+          </a:lnRef>
+          <a:fillRef idx="3">
+            <a:schemeClr val="accent1"/>
+          </a:fillRef>
+          <a:effectRef idx="2">
+            <a:schemeClr val="accent1"/>
+          </a:effectRef>
+          <a:fontRef idx="minor">
+            <a:schemeClr val="lt1"/>
+          </a:fontRef>
+        </p:style>
+        <p:txBody>
+          <a:bodyPr rtlCol="0" anchor="ctr"/>
+          <a:lstStyle/>
+          <a:p>
+            <a:pPr algn="ctr"/>
+          </a:p>
+        </p:txBody>
+      </p:sp>
+      <p:sp>
+        <p:nvSpPr>
+          <p:cNvPr id="24" name="TextBox 23"/>
+          <p:cNvSpPr txBox="1"/>
+          <p:nvPr/>
+        </p:nvSpPr>
+        <p:spPr>
+          <a:xfrm>
+            <a:off x="4983480" y="4882896"/>
+            <a:ext cx="1463040" cy="182880"/>
+          </a:xfrm>
+          <a:prstGeom prst="rect">
+            <a:avLst/>
+          </a:prstGeom>
+          <a:noFill/>
+        </p:spPr>
+        <p:txBody>
+          <a:bodyPr wrap="square">
+            <a:normAutofit/>
+          </a:bodyPr>
+          <a:lstStyle/>
+          <a:p>
+            <a:pPr algn="ctr"/>
+            <a:r>
+              <a:rPr sz="1300" b="1" i="0">
                 <a:solidFill>
                   <a:srgbClr val="0F172A"/>
                 </a:solidFill>
-              </a:defRPr>
-            </a:pPr>
-            <a:r>
-              <a:t>Move booking reservation and insert into stronger transactional workflows</a:t>
-            </a:r>
-          </a:p>
-          <a:p>
-            <a:pPr>
-              <a:spcAft>
-                <a:spcPts val="1000"/>
-              </a:spcAft>
-              <a:defRPr sz="2000">
+                <a:latin typeface="Aptos"/>
+              </a:rPr>
+              <a:t>App</a:t>
+            </a:r>
+          </a:p>
+        </p:txBody>
+      </p:sp>
+      <p:sp>
+        <p:nvSpPr>
+          <p:cNvPr id="25" name="Rounded Rectangle 24"/>
+          <p:cNvSpPr/>
+          <p:nvPr/>
+        </p:nvSpPr>
+        <p:spPr>
+          <a:xfrm>
+            <a:off x="6903720" y="4681728"/>
+            <a:ext cx="1554480" cy="731520"/>
+          </a:xfrm>
+          <a:prstGeom prst="roundRect">
+            <a:avLst/>
+          </a:prstGeom>
+          <a:solidFill>
+            <a:srgbClr val="ECFDF5"/>
+          </a:solidFill>
+          <a:ln>
+            <a:solidFill>
+              <a:srgbClr val="99F6E4"/>
+            </a:solidFill>
+          </a:ln>
+        </p:spPr>
+        <p:style>
+          <a:lnRef idx="1">
+            <a:schemeClr val="accent1"/>
+          </a:lnRef>
+          <a:fillRef idx="3">
+            <a:schemeClr val="accent1"/>
+          </a:fillRef>
+          <a:effectRef idx="2">
+            <a:schemeClr val="accent1"/>
+          </a:effectRef>
+          <a:fontRef idx="minor">
+            <a:schemeClr val="lt1"/>
+          </a:fontRef>
+        </p:style>
+        <p:txBody>
+          <a:bodyPr rtlCol="0" anchor="ctr"/>
+          <a:lstStyle/>
+          <a:p>
+            <a:pPr algn="ctr"/>
+          </a:p>
+        </p:txBody>
+      </p:sp>
+      <p:sp>
+        <p:nvSpPr>
+          <p:cNvPr id="26" name="TextBox 25"/>
+          <p:cNvSpPr txBox="1"/>
+          <p:nvPr/>
+        </p:nvSpPr>
+        <p:spPr>
+          <a:xfrm>
+            <a:off x="6949440" y="4882896"/>
+            <a:ext cx="1463040" cy="182880"/>
+          </a:xfrm>
+          <a:prstGeom prst="rect">
+            <a:avLst/>
+          </a:prstGeom>
+          <a:noFill/>
+        </p:spPr>
+        <p:txBody>
+          <a:bodyPr wrap="square">
+            <a:normAutofit/>
+          </a:bodyPr>
+          <a:lstStyle/>
+          <a:p>
+            <a:pPr algn="ctr"/>
+            <a:r>
+              <a:rPr sz="1300" b="1" i="0">
                 <a:solidFill>
                   <a:srgbClr val="0F172A"/>
                 </a:solidFill>
-              </a:defRPr>
-            </a:pPr>
-            <a:r>
-              <a:t>Add doctor-level scheduling and richer hospital-side operations</a:t>
-            </a:r>
-          </a:p>
-          <a:p>
-            <a:pPr>
-              <a:spcAft>
-                <a:spcPts val="1000"/>
-              </a:spcAft>
-              <a:defRPr sz="2000">
+                <a:latin typeface="Aptos"/>
+              </a:rPr>
+              <a:t>Platform</a:t>
+            </a:r>
+          </a:p>
+        </p:txBody>
+      </p:sp>
+      <p:sp>
+        <p:nvSpPr>
+          <p:cNvPr id="27" name="Rounded Rectangle 26"/>
+          <p:cNvSpPr/>
+          <p:nvPr/>
+        </p:nvSpPr>
+        <p:spPr>
+          <a:xfrm>
+            <a:off x="8869680" y="4681728"/>
+            <a:ext cx="1554480" cy="731520"/>
+          </a:xfrm>
+          <a:prstGeom prst="roundRect">
+            <a:avLst/>
+          </a:prstGeom>
+          <a:solidFill>
+            <a:srgbClr val="F1F5F9"/>
+          </a:solidFill>
+          <a:ln>
+            <a:solidFill>
+              <a:srgbClr val="99F6E4"/>
+            </a:solidFill>
+          </a:ln>
+        </p:spPr>
+        <p:style>
+          <a:lnRef idx="1">
+            <a:schemeClr val="accent1"/>
+          </a:lnRef>
+          <a:fillRef idx="3">
+            <a:schemeClr val="accent1"/>
+          </a:fillRef>
+          <a:effectRef idx="2">
+            <a:schemeClr val="accent1"/>
+          </a:effectRef>
+          <a:fontRef idx="minor">
+            <a:schemeClr val="lt1"/>
+          </a:fontRef>
+        </p:style>
+        <p:txBody>
+          <a:bodyPr rtlCol="0" anchor="ctr"/>
+          <a:lstStyle/>
+          <a:p>
+            <a:pPr algn="ctr"/>
+          </a:p>
+        </p:txBody>
+      </p:sp>
+      <p:sp>
+        <p:nvSpPr>
+          <p:cNvPr id="28" name="TextBox 27"/>
+          <p:cNvSpPr txBox="1"/>
+          <p:nvPr/>
+        </p:nvSpPr>
+        <p:spPr>
+          <a:xfrm>
+            <a:off x="8915400" y="4882896"/>
+            <a:ext cx="1463040" cy="182880"/>
+          </a:xfrm>
+          <a:prstGeom prst="rect">
+            <a:avLst/>
+          </a:prstGeom>
+          <a:noFill/>
+        </p:spPr>
+        <p:txBody>
+          <a:bodyPr wrap="square">
+            <a:normAutofit/>
+          </a:bodyPr>
+          <a:lstStyle/>
+          <a:p>
+            <a:pPr algn="ctr"/>
+            <a:r>
+              <a:rPr sz="1300" b="1" i="0">
                 <a:solidFill>
                   <a:srgbClr val="0F172A"/>
                 </a:solidFill>
-              </a:defRPr>
-            </a:pPr>
-            <a:r>
-              <a:t>Introduce rate limiting, WAF, audit trails, and production security hardening</a:t>
+                <a:latin typeface="Aptos"/>
+              </a:rPr>
+              <a:t>Data + Integrations</a:t>
+            </a:r>
+          </a:p>
+        </p:txBody>
+      </p:sp>
+      <p:sp>
+        <p:nvSpPr>
+          <p:cNvPr id="29" name="TextBox 28"/>
+          <p:cNvSpPr txBox="1"/>
+          <p:nvPr/>
+        </p:nvSpPr>
+        <p:spPr>
+          <a:xfrm>
+            <a:off x="2615184" y="4882896"/>
+            <a:ext cx="256032" cy="164592"/>
+          </a:xfrm>
+          <a:prstGeom prst="rect">
+            <a:avLst/>
+          </a:prstGeom>
+          <a:noFill/>
+        </p:spPr>
+        <p:txBody>
+          <a:bodyPr wrap="square">
+            <a:normAutofit/>
+          </a:bodyPr>
+          <a:lstStyle/>
+          <a:p>
+            <a:pPr algn="ctr"/>
+            <a:r>
+              <a:rPr sz="2200" b="1" i="0">
+                <a:solidFill>
+                  <a:srgbClr val="0D746F"/>
+                </a:solidFill>
+                <a:latin typeface="Aptos"/>
+              </a:rPr>
+              <a:t>→</a:t>
+            </a:r>
+          </a:p>
+        </p:txBody>
+      </p:sp>
+      <p:sp>
+        <p:nvSpPr>
+          <p:cNvPr id="30" name="TextBox 29"/>
+          <p:cNvSpPr txBox="1"/>
+          <p:nvPr/>
+        </p:nvSpPr>
+        <p:spPr>
+          <a:xfrm>
+            <a:off x="4581144" y="4882896"/>
+            <a:ext cx="256032" cy="164592"/>
+          </a:xfrm>
+          <a:prstGeom prst="rect">
+            <a:avLst/>
+          </a:prstGeom>
+          <a:noFill/>
+        </p:spPr>
+        <p:txBody>
+          <a:bodyPr wrap="square">
+            <a:normAutofit/>
+          </a:bodyPr>
+          <a:lstStyle/>
+          <a:p>
+            <a:pPr algn="ctr"/>
+            <a:r>
+              <a:rPr sz="2200" b="1" i="0">
+                <a:solidFill>
+                  <a:srgbClr val="0D746F"/>
+                </a:solidFill>
+                <a:latin typeface="Aptos"/>
+              </a:rPr>
+              <a:t>→</a:t>
+            </a:r>
+          </a:p>
+        </p:txBody>
+      </p:sp>
+      <p:sp>
+        <p:nvSpPr>
+          <p:cNvPr id="31" name="TextBox 30"/>
+          <p:cNvSpPr txBox="1"/>
+          <p:nvPr/>
+        </p:nvSpPr>
+        <p:spPr>
+          <a:xfrm>
+            <a:off x="6547104" y="4882896"/>
+            <a:ext cx="256032" cy="164592"/>
+          </a:xfrm>
+          <a:prstGeom prst="rect">
+            <a:avLst/>
+          </a:prstGeom>
+          <a:noFill/>
+        </p:spPr>
+        <p:txBody>
+          <a:bodyPr wrap="square">
+            <a:normAutofit/>
+          </a:bodyPr>
+          <a:lstStyle/>
+          <a:p>
+            <a:pPr algn="ctr"/>
+            <a:r>
+              <a:rPr sz="2200" b="1" i="0">
+                <a:solidFill>
+                  <a:srgbClr val="0D746F"/>
+                </a:solidFill>
+                <a:latin typeface="Aptos"/>
+              </a:rPr>
+              <a:t>→</a:t>
+            </a:r>
+          </a:p>
+        </p:txBody>
+      </p:sp>
+      <p:sp>
+        <p:nvSpPr>
+          <p:cNvPr id="32" name="TextBox 31"/>
+          <p:cNvSpPr txBox="1"/>
+          <p:nvPr/>
+        </p:nvSpPr>
+        <p:spPr>
+          <a:xfrm>
+            <a:off x="8513064" y="4882896"/>
+            <a:ext cx="256032" cy="164592"/>
+          </a:xfrm>
+          <a:prstGeom prst="rect">
+            <a:avLst/>
+          </a:prstGeom>
+          <a:noFill/>
+        </p:spPr>
+        <p:txBody>
+          <a:bodyPr wrap="square">
+            <a:normAutofit/>
+          </a:bodyPr>
+          <a:lstStyle/>
+          <a:p>
+            <a:pPr algn="ctr"/>
+            <a:r>
+              <a:rPr sz="2200" b="1" i="0">
+                <a:solidFill>
+                  <a:srgbClr val="0D746F"/>
+                </a:solidFill>
+                <a:latin typeface="Aptos"/>
+              </a:rPr>
+              <a:t>→</a:t>
+            </a:r>
+          </a:p>
+        </p:txBody>
+      </p:sp>
+      <p:sp>
+        <p:nvSpPr>
+          <p:cNvPr id="33" name="Rounded Rectangle 32"/>
+          <p:cNvSpPr/>
+          <p:nvPr/>
+        </p:nvSpPr>
+        <p:spPr>
+          <a:xfrm>
+            <a:off x="10789920" y="502920"/>
+            <a:ext cx="868680" cy="384048"/>
+          </a:xfrm>
+          <a:prstGeom prst="roundRect">
+            <a:avLst/>
+          </a:prstGeom>
+          <a:solidFill>
+            <a:srgbClr val="5EEAD4"/>
+          </a:solidFill>
+          <a:ln>
+            <a:solidFill>
+              <a:srgbClr val="5EEAD4"/>
+            </a:solidFill>
+          </a:ln>
+        </p:spPr>
+        <p:style>
+          <a:lnRef idx="1">
+            <a:schemeClr val="accent1"/>
+          </a:lnRef>
+          <a:fillRef idx="3">
+            <a:schemeClr val="accent1"/>
+          </a:fillRef>
+          <a:effectRef idx="2">
+            <a:schemeClr val="accent1"/>
+          </a:effectRef>
+          <a:fontRef idx="minor">
+            <a:schemeClr val="lt1"/>
+          </a:fontRef>
+        </p:style>
+        <p:txBody>
+          <a:bodyPr rtlCol="0" anchor="ctr"/>
+          <a:lstStyle/>
+          <a:p>
+            <a:pPr algn="ctr"/>
+          </a:p>
+        </p:txBody>
+      </p:sp>
+      <p:sp>
+        <p:nvSpPr>
+          <p:cNvPr id="34" name="TextBox 33"/>
+          <p:cNvSpPr txBox="1"/>
+          <p:nvPr/>
+        </p:nvSpPr>
+        <p:spPr>
+          <a:xfrm>
+            <a:off x="10789920" y="530352"/>
+            <a:ext cx="868680" cy="256032"/>
+          </a:xfrm>
+          <a:prstGeom prst="rect">
+            <a:avLst/>
+          </a:prstGeom>
+          <a:noFill/>
+        </p:spPr>
+        <p:txBody>
+          <a:bodyPr wrap="square">
+            <a:normAutofit/>
+          </a:bodyPr>
+          <a:lstStyle/>
+          <a:p>
+            <a:pPr algn="ctr"/>
+            <a:r>
+              <a:rPr sz="1100" b="1" i="0">
+                <a:solidFill>
+                  <a:srgbClr val="0F172A"/>
+                </a:solidFill>
+                <a:latin typeface="Aptos"/>
+              </a:rPr>
+              <a:t>07</a:t>
             </a:r>
           </a:p>
         </p:txBody>
@@ -6675,18 +10229,18 @@
         </p:nvSpPr>
         <p:spPr>
           <a:xfrm>
-            <a:off x="411480" y="320040"/>
-            <a:ext cx="11338560" cy="822960"/>
+            <a:off x="502920" y="384048"/>
+            <a:ext cx="1874519" cy="457200"/>
           </a:xfrm>
           <a:prstGeom prst="roundRect">
             <a:avLst/>
           </a:prstGeom>
           <a:solidFill>
-            <a:srgbClr val="F0FDFA"/>
+            <a:srgbClr val="ECFEFF"/>
           </a:solidFill>
           <a:ln>
             <a:solidFill>
-              <a:srgbClr val="CCFBF1"/>
+              <a:srgbClr val="A5F3FC"/>
             </a:solidFill>
           </a:ln>
         </p:spPr>
@@ -6720,51 +10274,123 @@
         </p:nvSpPr>
         <p:spPr>
           <a:xfrm>
-            <a:off x="685800" y="475488"/>
-            <a:ext cx="7772400" cy="411480"/>
-          </a:xfrm>
-          <a:prstGeom prst="rect">
-            <a:avLst/>
-          </a:prstGeom>
-          <a:noFill/>
-        </p:spPr>
-        <p:txBody>
-          <a:bodyPr wrap="none">
-            <a:spAutoFit/>
-          </a:bodyPr>
-          <a:lstStyle/>
-          <a:p>
-            <a:r>
-              <a:rPr sz="2800" b="1">
+            <a:off x="658368" y="493776"/>
+            <a:ext cx="1554480" cy="182880"/>
+          </a:xfrm>
+          <a:prstGeom prst="rect">
+            <a:avLst/>
+          </a:prstGeom>
+          <a:noFill/>
+        </p:spPr>
+        <p:txBody>
+          <a:bodyPr wrap="square">
+            <a:normAutofit/>
+          </a:bodyPr>
+          <a:lstStyle/>
+          <a:p>
+            <a:pPr algn="l"/>
+            <a:r>
+              <a:rPr sz="1100" b="1" i="0">
+                <a:solidFill>
+                  <a:srgbClr val="0D746F"/>
+                </a:solidFill>
+                <a:latin typeface="Aptos"/>
+              </a:rPr>
+              <a:t>TEAM + CLOSE</a:t>
+            </a:r>
+          </a:p>
+        </p:txBody>
+      </p:sp>
+      <p:sp>
+        <p:nvSpPr>
+          <p:cNvPr id="4" name="TextBox 3"/>
+          <p:cNvSpPr txBox="1"/>
+          <p:nvPr/>
+        </p:nvSpPr>
+        <p:spPr>
+          <a:xfrm>
+            <a:off x="640080" y="914400"/>
+            <a:ext cx="5486400" cy="822960"/>
+          </a:xfrm>
+          <a:prstGeom prst="rect">
+            <a:avLst/>
+          </a:prstGeom>
+          <a:noFill/>
+        </p:spPr>
+        <p:txBody>
+          <a:bodyPr wrap="square">
+            <a:normAutofit/>
+          </a:bodyPr>
+          <a:lstStyle/>
+          <a:p>
+            <a:pPr algn="l"/>
+            <a:r>
+              <a:rPr sz="2800" b="1" i="0">
                 <a:solidFill>
                   <a:srgbClr val="0F172A"/>
                 </a:solidFill>
-              </a:rPr>
-              <a:t>Long-Run Architecture</a:t>
-            </a:r>
-          </a:p>
-        </p:txBody>
-      </p:sp>
-      <p:sp>
-        <p:nvSpPr>
-          <p:cNvPr id="4" name="Rounded Rectangle 3"/>
+                <a:latin typeface="Aptos"/>
+              </a:rPr>
+              <a:t>Built by a team thinking about product, not just code</a:t>
+            </a:r>
+          </a:p>
+        </p:txBody>
+      </p:sp>
+      <p:sp>
+        <p:nvSpPr>
+          <p:cNvPr id="5" name="TextBox 4"/>
+          <p:cNvSpPr txBox="1"/>
+          <p:nvPr/>
+        </p:nvSpPr>
+        <p:spPr>
+          <a:xfrm>
+            <a:off x="640080" y="1572768"/>
+            <a:ext cx="5394960" cy="548640"/>
+          </a:xfrm>
+          <a:prstGeom prst="rect">
+            <a:avLst/>
+          </a:prstGeom>
+          <a:noFill/>
+        </p:spPr>
+        <p:txBody>
+          <a:bodyPr wrap="square">
+            <a:normAutofit/>
+          </a:bodyPr>
+          <a:lstStyle/>
+          <a:p>
+            <a:pPr algn="l"/>
+            <a:r>
+              <a:rPr sz="1500" b="0" i="0">
+                <a:solidFill>
+                  <a:srgbClr val="475569"/>
+                </a:solidFill>
+                <a:latin typeface="Aptos"/>
+              </a:rPr>
+              <a:t>We built the workflow end-to-end: search, AI guidance, booking, history, cancellation, deployment, and the scale-up plan.</a:t>
+            </a:r>
+          </a:p>
+        </p:txBody>
+      </p:sp>
+      <p:sp>
+        <p:nvSpPr>
+          <p:cNvPr id="6" name="Rounded Rectangle 5"/>
           <p:cNvSpPr/>
           <p:nvPr/>
         </p:nvSpPr>
         <p:spPr>
           <a:xfrm>
-            <a:off x="10058400" y="475488"/>
-            <a:ext cx="1097280" cy="310896"/>
+            <a:off x="749808" y="2240280"/>
+            <a:ext cx="3520440" cy="2788920"/>
           </a:xfrm>
           <a:prstGeom prst="roundRect">
             <a:avLst/>
           </a:prstGeom>
           <a:solidFill>
-            <a:srgbClr val="0D9488"/>
+            <a:srgbClr val="FFFFFF"/>
           </a:solidFill>
           <a:ln>
             <a:solidFill>
-              <a:srgbClr val="0D9488"/>
+              <a:srgbClr val="CBD5E1"/>
             </a:solidFill>
           </a:ln>
         </p:spPr>
@@ -6790,50 +10416,110 @@
           </a:p>
         </p:txBody>
       </p:sp>
-      <p:sp>
-        <p:nvSpPr>
-          <p:cNvPr id="5" name="TextBox 4"/>
-          <p:cNvSpPr txBox="1"/>
-          <p:nvPr/>
-        </p:nvSpPr>
-        <p:spPr>
-          <a:xfrm>
-            <a:off x="10058400" y="512064"/>
-            <a:ext cx="1097280" cy="228600"/>
-          </a:xfrm>
-          <a:prstGeom prst="rect">
-            <a:avLst/>
-          </a:prstGeom>
-          <a:noFill/>
-        </p:spPr>
-        <p:txBody>
-          <a:bodyPr wrap="none">
-            <a:spAutoFit/>
-          </a:bodyPr>
-          <a:lstStyle/>
-          <a:p>
-            <a:pPr algn="ctr"/>
-            <a:r>
-              <a:rPr sz="1200" b="1">
-                <a:solidFill>
-                  <a:srgbClr val="FFFFFF"/>
-                </a:solidFill>
-              </a:rPr>
-              <a:t>08</a:t>
-            </a:r>
-          </a:p>
-        </p:txBody>
-      </p:sp>
-      <p:sp>
-        <p:nvSpPr>
-          <p:cNvPr id="6" name="Rounded Rectangle 5"/>
+      <p:pic>
+        <p:nvPicPr>
+          <p:cNvPr id="7" name="Picture 6" descr="aditi.png"/>
+          <p:cNvPicPr>
+            <a:picLocks noChangeAspect="1"/>
+          </p:cNvPicPr>
+          <p:nvPr/>
+        </p:nvPicPr>
+        <p:blipFill>
+          <a:blip r:embed="rId2"/>
+          <a:stretch>
+            <a:fillRect/>
+          </a:stretch>
+        </p:blipFill>
+        <p:spPr>
+          <a:xfrm>
+            <a:off x="987552" y="2487168"/>
+            <a:ext cx="3035808" cy="1664208"/>
+          </a:xfrm>
+          <a:prstGeom prst="rect">
+            <a:avLst/>
+          </a:prstGeom>
+        </p:spPr>
+      </p:pic>
+      <p:sp>
+        <p:nvSpPr>
+          <p:cNvPr id="8" name="TextBox 7"/>
+          <p:cNvSpPr txBox="1"/>
+          <p:nvPr/>
+        </p:nvSpPr>
+        <p:spPr>
+          <a:xfrm>
+            <a:off x="987552" y="4315968"/>
+            <a:ext cx="2743200" cy="256032"/>
+          </a:xfrm>
+          <a:prstGeom prst="rect">
+            <a:avLst/>
+          </a:prstGeom>
+          <a:noFill/>
+        </p:spPr>
+        <p:txBody>
+          <a:bodyPr wrap="square">
+            <a:normAutofit/>
+          </a:bodyPr>
+          <a:lstStyle/>
+          <a:p>
+            <a:pPr algn="ctr"/>
+            <a:r>
+              <a:rPr sz="1600" b="1" i="0">
+                <a:solidFill>
+                  <a:srgbClr val="0F172A"/>
+                </a:solidFill>
+                <a:latin typeface="Aptos"/>
+              </a:rPr>
+              <a:t>Aditi Prasad</a:t>
+            </a:r>
+          </a:p>
+        </p:txBody>
+      </p:sp>
+      <p:sp>
+        <p:nvSpPr>
+          <p:cNvPr id="9" name="TextBox 8"/>
+          <p:cNvSpPr txBox="1"/>
+          <p:nvPr/>
+        </p:nvSpPr>
+        <p:spPr>
+          <a:xfrm>
+            <a:off x="987552" y="4608576"/>
+            <a:ext cx="2743200" cy="201168"/>
+          </a:xfrm>
+          <a:prstGeom prst="rect">
+            <a:avLst/>
+          </a:prstGeom>
+          <a:noFill/>
+        </p:spPr>
+        <p:txBody>
+          <a:bodyPr wrap="square">
+            <a:normAutofit/>
+          </a:bodyPr>
+          <a:lstStyle/>
+          <a:p>
+            <a:pPr algn="ctr"/>
+            <a:r>
+              <a:rPr sz="1100" b="0" i="0">
+                <a:solidFill>
+                  <a:srgbClr val="475569"/>
+                </a:solidFill>
+                <a:latin typeface="Aptos"/>
+              </a:rPr>
+              <a:t>SDE &amp; Product Lead</a:t>
+            </a:r>
+          </a:p>
+        </p:txBody>
+      </p:sp>
+      <p:sp>
+        <p:nvSpPr>
+          <p:cNvPr id="10" name="Rounded Rectangle 9"/>
           <p:cNvSpPr/>
           <p:nvPr/>
         </p:nvSpPr>
         <p:spPr>
           <a:xfrm>
-            <a:off x="640080" y="1417320"/>
-            <a:ext cx="10972800" cy="4846320"/>
+            <a:off x="4462272" y="2240280"/>
+            <a:ext cx="3520440" cy="2788920"/>
           </a:xfrm>
           <a:prstGeom prst="roundRect">
             <a:avLst/>
@@ -6843,7 +10529,7 @@
           </a:solidFill>
           <a:ln>
             <a:solidFill>
-              <a:srgbClr val="E2E8F0"/>
+              <a:srgbClr val="CBD5E1"/>
             </a:solidFill>
           </a:ln>
         </p:spPr>
@@ -6869,165 +10555,120 @@
           </a:p>
         </p:txBody>
       </p:sp>
-      <p:sp>
-        <p:nvSpPr>
-          <p:cNvPr id="7" name="TextBox 6"/>
-          <p:cNvSpPr txBox="1"/>
-          <p:nvPr/>
-        </p:nvSpPr>
-        <p:spPr>
-          <a:xfrm>
-            <a:off x="914400" y="1783080"/>
-            <a:ext cx="9875520" cy="3566160"/>
-          </a:xfrm>
-          <a:prstGeom prst="rect">
-            <a:avLst/>
-          </a:prstGeom>
-          <a:noFill/>
-        </p:spPr>
-        <p:txBody>
-          <a:bodyPr wrap="square">
-            <a:spAutoFit/>
-          </a:bodyPr>
-          <a:lstStyle/>
-          <a:p>
-            <a:pPr>
-              <a:spcAft>
-                <a:spcPts val="1000"/>
-              </a:spcAft>
-              <a:defRPr sz="2000">
+      <p:pic>
+        <p:nvPicPr>
+          <p:cNvPr id="11" name="Picture 10" descr="mayank.jpg"/>
+          <p:cNvPicPr>
+            <a:picLocks noChangeAspect="1"/>
+          </p:cNvPicPr>
+          <p:nvPr/>
+        </p:nvPicPr>
+        <p:blipFill>
+          <a:blip r:embed="rId3"/>
+          <a:stretch>
+            <a:fillRect/>
+          </a:stretch>
+        </p:blipFill>
+        <p:spPr>
+          <a:xfrm>
+            <a:off x="4700016" y="2487168"/>
+            <a:ext cx="3035808" cy="1664208"/>
+          </a:xfrm>
+          <a:prstGeom prst="rect">
+            <a:avLst/>
+          </a:prstGeom>
+        </p:spPr>
+      </p:pic>
+      <p:sp>
+        <p:nvSpPr>
+          <p:cNvPr id="12" name="TextBox 11"/>
+          <p:cNvSpPr txBox="1"/>
+          <p:nvPr/>
+        </p:nvSpPr>
+        <p:spPr>
+          <a:xfrm>
+            <a:off x="4700016" y="4315968"/>
+            <a:ext cx="2743200" cy="256032"/>
+          </a:xfrm>
+          <a:prstGeom prst="rect">
+            <a:avLst/>
+          </a:prstGeom>
+          <a:noFill/>
+        </p:spPr>
+        <p:txBody>
+          <a:bodyPr wrap="square">
+            <a:normAutofit/>
+          </a:bodyPr>
+          <a:lstStyle/>
+          <a:p>
+            <a:pPr algn="ctr"/>
+            <a:r>
+              <a:rPr sz="1600" b="1" i="0">
                 <a:solidFill>
                   <a:srgbClr val="0F172A"/>
                 </a:solidFill>
-              </a:defRPr>
-            </a:pPr>
-            <a:r>
-              <a:t>Global edge delivery and CDN</a:t>
-            </a:r>
-          </a:p>
-          <a:p>
-            <a:pPr>
-              <a:spcAft>
-                <a:spcPts val="1000"/>
-              </a:spcAft>
-              <a:defRPr sz="2000">
-                <a:solidFill>
-                  <a:srgbClr val="0F172A"/>
-                </a:solidFill>
-              </a:defRPr>
-            </a:pPr>
-            <a:r>
-              <a:t>Load balancer and autoscaled app runtime</a:t>
-            </a:r>
-          </a:p>
-          <a:p>
-            <a:pPr>
-              <a:spcAft>
-                <a:spcPts val="1000"/>
-              </a:spcAft>
-              <a:defRPr sz="2000">
-                <a:solidFill>
-                  <a:srgbClr val="0F172A"/>
-                </a:solidFill>
-              </a:defRPr>
-            </a:pPr>
-            <a:r>
-              <a:t>API management for policies, versioning, and rate limiting</a:t>
-            </a:r>
-          </a:p>
-          <a:p>
-            <a:pPr>
-              <a:spcAft>
-                <a:spcPts val="1000"/>
-              </a:spcAft>
-              <a:defRPr sz="2000">
-                <a:solidFill>
-                  <a:srgbClr val="0F172A"/>
-                </a:solidFill>
-              </a:defRPr>
-            </a:pPr>
-            <a:r>
-              <a:t>Redis cache for frequent reads and counters</a:t>
-            </a:r>
-          </a:p>
-          <a:p>
-            <a:pPr>
-              <a:spcAft>
-                <a:spcPts val="1000"/>
-              </a:spcAft>
-              <a:defRPr sz="2000">
-                <a:solidFill>
-                  <a:srgbClr val="0F172A"/>
-                </a:solidFill>
-              </a:defRPr>
-            </a:pPr>
-            <a:r>
-              <a:t>Queue and workers for notifications and reconciliation</a:t>
-            </a:r>
-          </a:p>
-          <a:p>
-            <a:pPr>
-              <a:spcAft>
-                <a:spcPts val="1000"/>
-              </a:spcAft>
-              <a:defRPr sz="2000">
-                <a:solidFill>
-                  <a:srgbClr val="0F172A"/>
-                </a:solidFill>
-              </a:defRPr>
-            </a:pPr>
-            <a:r>
-              <a:t>Observability, secrets management, and audit logging</a:t>
-            </a:r>
-          </a:p>
-        </p:txBody>
-      </p:sp>
-    </p:spTree>
-  </p:cSld>
-  <p:clrMapOvr>
-    <a:masterClrMapping/>
-  </p:clrMapOvr>
-</p:sld>
-</file>
-
-<file path=ppt/slides/slide9.xml><?xml version="1.0" encoding="utf-8"?>
-<p:sld xmlns:a="http://schemas.openxmlformats.org/drawingml/2006/main" xmlns:p="http://schemas.openxmlformats.org/presentationml/2006/main" xmlns:r="http://schemas.openxmlformats.org/officeDocument/2006/relationships">
-  <p:cSld>
-    <p:bg>
-      <p:bgPr>
-        <a:solidFill>
-          <a:srgbClr val="FFFFFF"/>
-        </a:solidFill>
-        <a:effectLst/>
-      </p:bgPr>
-    </p:bg>
-    <p:spTree>
-      <p:nvGrpSpPr>
-        <p:cNvPr id="1" name=""/>
-        <p:cNvGrpSpPr/>
-        <p:nvPr/>
-      </p:nvGrpSpPr>
-      <p:grpSpPr/>
-      <p:sp>
-        <p:nvSpPr>
-          <p:cNvPr id="2" name="Rounded Rectangle 1"/>
+                <a:latin typeface="Aptos"/>
+              </a:rPr>
+              <a:t>Mayank Prasad</a:t>
+            </a:r>
+          </a:p>
+        </p:txBody>
+      </p:sp>
+      <p:sp>
+        <p:nvSpPr>
+          <p:cNvPr id="13" name="TextBox 12"/>
+          <p:cNvSpPr txBox="1"/>
+          <p:nvPr/>
+        </p:nvSpPr>
+        <p:spPr>
+          <a:xfrm>
+            <a:off x="4700016" y="4608576"/>
+            <a:ext cx="2743200" cy="201168"/>
+          </a:xfrm>
+          <a:prstGeom prst="rect">
+            <a:avLst/>
+          </a:prstGeom>
+          <a:noFill/>
+        </p:spPr>
+        <p:txBody>
+          <a:bodyPr wrap="square">
+            <a:normAutofit/>
+          </a:bodyPr>
+          <a:lstStyle/>
+          <a:p>
+            <a:pPr algn="ctr"/>
+            <a:r>
+              <a:rPr sz="1100" b="0" i="0">
+                <a:solidFill>
+                  <a:srgbClr val="475569"/>
+                </a:solidFill>
+                <a:latin typeface="Aptos"/>
+              </a:rPr>
+              <a:t>SDE</a:t>
+            </a:r>
+          </a:p>
+        </p:txBody>
+      </p:sp>
+      <p:sp>
+        <p:nvSpPr>
+          <p:cNvPr id="14" name="Rounded Rectangle 13"/>
           <p:cNvSpPr/>
           <p:nvPr/>
         </p:nvSpPr>
         <p:spPr>
           <a:xfrm>
-            <a:off x="411480" y="320040"/>
-            <a:ext cx="11338560" cy="822960"/>
+            <a:off x="8174736" y="2240280"/>
+            <a:ext cx="3520440" cy="2788920"/>
           </a:xfrm>
           <a:prstGeom prst="roundRect">
             <a:avLst/>
           </a:prstGeom>
           <a:solidFill>
-            <a:srgbClr val="F0FDFA"/>
+            <a:srgbClr val="FFFFFF"/>
           </a:solidFill>
           <a:ln>
             <a:solidFill>
-              <a:srgbClr val="CCFBF1"/>
+              <a:srgbClr val="CBD5E1"/>
             </a:solidFill>
           </a:ln>
         </p:spPr>
@@ -7053,59 +10694,120 @@
           </a:p>
         </p:txBody>
       </p:sp>
-      <p:sp>
-        <p:nvSpPr>
-          <p:cNvPr id="3" name="TextBox 2"/>
-          <p:cNvSpPr txBox="1"/>
-          <p:nvPr/>
-        </p:nvSpPr>
-        <p:spPr>
-          <a:xfrm>
-            <a:off x="685800" y="475488"/>
-            <a:ext cx="7772400" cy="411480"/>
-          </a:xfrm>
-          <a:prstGeom prst="rect">
-            <a:avLst/>
-          </a:prstGeom>
-          <a:noFill/>
-        </p:spPr>
-        <p:txBody>
-          <a:bodyPr wrap="none">
-            <a:spAutoFit/>
-          </a:bodyPr>
-          <a:lstStyle/>
-          <a:p>
-            <a:r>
-              <a:rPr sz="2800" b="1">
+      <p:pic>
+        <p:nvPicPr>
+          <p:cNvPr id="15" name="Picture 14" descr="deepnarayan.png"/>
+          <p:cNvPicPr>
+            <a:picLocks noChangeAspect="1"/>
+          </p:cNvPicPr>
+          <p:nvPr/>
+        </p:nvPicPr>
+        <p:blipFill>
+          <a:blip r:embed="rId4"/>
+          <a:stretch>
+            <a:fillRect/>
+          </a:stretch>
+        </p:blipFill>
+        <p:spPr>
+          <a:xfrm>
+            <a:off x="8412480" y="2487168"/>
+            <a:ext cx="3035808" cy="1664208"/>
+          </a:xfrm>
+          <a:prstGeom prst="rect">
+            <a:avLst/>
+          </a:prstGeom>
+        </p:spPr>
+      </p:pic>
+      <p:sp>
+        <p:nvSpPr>
+          <p:cNvPr id="16" name="TextBox 15"/>
+          <p:cNvSpPr txBox="1"/>
+          <p:nvPr/>
+        </p:nvSpPr>
+        <p:spPr>
+          <a:xfrm>
+            <a:off x="8412480" y="4315968"/>
+            <a:ext cx="2743200" cy="256032"/>
+          </a:xfrm>
+          <a:prstGeom prst="rect">
+            <a:avLst/>
+          </a:prstGeom>
+          <a:noFill/>
+        </p:spPr>
+        <p:txBody>
+          <a:bodyPr wrap="square">
+            <a:normAutofit/>
+          </a:bodyPr>
+          <a:lstStyle/>
+          <a:p>
+            <a:pPr algn="ctr"/>
+            <a:r>
+              <a:rPr sz="1600" b="1" i="0">
                 <a:solidFill>
                   <a:srgbClr val="0F172A"/>
                 </a:solidFill>
-              </a:rPr>
-              <a:t>Team</a:t>
-            </a:r>
-          </a:p>
-        </p:txBody>
-      </p:sp>
-      <p:sp>
-        <p:nvSpPr>
-          <p:cNvPr id="4" name="Rounded Rectangle 3"/>
+                <a:latin typeface="Aptos"/>
+              </a:rPr>
+              <a:t>Deepnarayan Lohra</a:t>
+            </a:r>
+          </a:p>
+        </p:txBody>
+      </p:sp>
+      <p:sp>
+        <p:nvSpPr>
+          <p:cNvPr id="17" name="TextBox 16"/>
+          <p:cNvSpPr txBox="1"/>
+          <p:nvPr/>
+        </p:nvSpPr>
+        <p:spPr>
+          <a:xfrm>
+            <a:off x="8412480" y="4608576"/>
+            <a:ext cx="2743200" cy="201168"/>
+          </a:xfrm>
+          <a:prstGeom prst="rect">
+            <a:avLst/>
+          </a:prstGeom>
+          <a:noFill/>
+        </p:spPr>
+        <p:txBody>
+          <a:bodyPr wrap="square">
+            <a:normAutofit/>
+          </a:bodyPr>
+          <a:lstStyle/>
+          <a:p>
+            <a:pPr algn="ctr"/>
+            <a:r>
+              <a:rPr sz="1100" b="0" i="0">
+                <a:solidFill>
+                  <a:srgbClr val="475569"/>
+                </a:solidFill>
+                <a:latin typeface="Aptos"/>
+              </a:rPr>
+              <a:t>SDE</a:t>
+            </a:r>
+          </a:p>
+        </p:txBody>
+      </p:sp>
+      <p:sp>
+        <p:nvSpPr>
+          <p:cNvPr id="18" name="Rounded Rectangle 17"/>
           <p:cNvSpPr/>
           <p:nvPr/>
         </p:nvSpPr>
         <p:spPr>
           <a:xfrm>
-            <a:off x="10058400" y="475488"/>
-            <a:ext cx="1097280" cy="310896"/>
+            <a:off x="749808" y="5440680"/>
+            <a:ext cx="10972800" cy="685800"/>
           </a:xfrm>
           <a:prstGeom prst="roundRect">
             <a:avLst/>
           </a:prstGeom>
           <a:solidFill>
-            <a:srgbClr val="0D9488"/>
+            <a:srgbClr val="0F172A"/>
           </a:solidFill>
           <a:ln>
             <a:solidFill>
-              <a:srgbClr val="0D9488"/>
+              <a:srgbClr val="0F172A"/>
             </a:solidFill>
           </a:ln>
         </p:spPr>
@@ -7133,58 +10835,59 @@
       </p:sp>
       <p:sp>
         <p:nvSpPr>
-          <p:cNvPr id="5" name="TextBox 4"/>
-          <p:cNvSpPr txBox="1"/>
-          <p:nvPr/>
-        </p:nvSpPr>
-        <p:spPr>
-          <a:xfrm>
-            <a:off x="10058400" y="512064"/>
-            <a:ext cx="1097280" cy="228600"/>
-          </a:xfrm>
-          <a:prstGeom prst="rect">
-            <a:avLst/>
-          </a:prstGeom>
-          <a:noFill/>
-        </p:spPr>
-        <p:txBody>
-          <a:bodyPr wrap="none">
-            <a:spAutoFit/>
-          </a:bodyPr>
-          <a:lstStyle/>
-          <a:p>
-            <a:pPr algn="ctr"/>
-            <a:r>
-              <a:rPr sz="1200" b="1">
+          <p:cNvPr id="19" name="TextBox 18"/>
+          <p:cNvSpPr txBox="1"/>
+          <p:nvPr/>
+        </p:nvSpPr>
+        <p:spPr>
+          <a:xfrm>
+            <a:off x="1005840" y="5650992"/>
+            <a:ext cx="10241280" cy="164592"/>
+          </a:xfrm>
+          <a:prstGeom prst="rect">
+            <a:avLst/>
+          </a:prstGeom>
+          <a:noFill/>
+        </p:spPr>
+        <p:txBody>
+          <a:bodyPr wrap="square">
+            <a:normAutofit/>
+          </a:bodyPr>
+          <a:lstStyle/>
+          <a:p>
+            <a:pPr algn="ctr"/>
+            <a:r>
+              <a:rPr sz="1600" b="1" i="0">
                 <a:solidFill>
                   <a:srgbClr val="FFFFFF"/>
                 </a:solidFill>
-              </a:rPr>
-              <a:t>09</a:t>
-            </a:r>
-          </a:p>
-        </p:txBody>
-      </p:sp>
-      <p:sp>
-        <p:nvSpPr>
-          <p:cNvPr id="6" name="Rounded Rectangle 5"/>
+                <a:latin typeface="Aptos"/>
+              </a:rPr>
+              <a:t>SurgiFind makes surgery discovery transparent and patient-first. That is the product, and that is the pitch.</a:t>
+            </a:r>
+          </a:p>
+        </p:txBody>
+      </p:sp>
+      <p:sp>
+        <p:nvSpPr>
+          <p:cNvPr id="20" name="Rounded Rectangle 19"/>
           <p:cNvSpPr/>
           <p:nvPr/>
         </p:nvSpPr>
         <p:spPr>
           <a:xfrm>
-            <a:off x="640080" y="1417320"/>
-            <a:ext cx="10972800" cy="4846320"/>
+            <a:off x="10789920" y="502920"/>
+            <a:ext cx="868680" cy="384048"/>
           </a:xfrm>
           <a:prstGeom prst="roundRect">
             <a:avLst/>
           </a:prstGeom>
           <a:solidFill>
-            <a:srgbClr val="FFFFFF"/>
+            <a:srgbClr val="05ABA5"/>
           </a:solidFill>
           <a:ln>
             <a:solidFill>
-              <a:srgbClr val="E2E8F0"/>
+              <a:srgbClr val="05ABA5"/>
             </a:solidFill>
           </a:ln>
         </p:spPr>
@@ -7212,68 +10915,35 @@
       </p:sp>
       <p:sp>
         <p:nvSpPr>
-          <p:cNvPr id="7" name="TextBox 6"/>
-          <p:cNvSpPr txBox="1"/>
-          <p:nvPr/>
-        </p:nvSpPr>
-        <p:spPr>
-          <a:xfrm>
-            <a:off x="914400" y="1783080"/>
-            <a:ext cx="9875520" cy="3566160"/>
-          </a:xfrm>
-          <a:prstGeom prst="rect">
-            <a:avLst/>
-          </a:prstGeom>
-          <a:noFill/>
-        </p:spPr>
-        <p:txBody>
-          <a:bodyPr wrap="square">
-            <a:spAutoFit/>
-          </a:bodyPr>
-          <a:lstStyle/>
-          <a:p>
-            <a:pPr>
-              <a:spcAft>
-                <a:spcPts val="1000"/>
-              </a:spcAft>
-              <a:defRPr sz="2000">
-                <a:solidFill>
-                  <a:srgbClr val="0F172A"/>
-                </a:solidFill>
-              </a:defRPr>
-            </a:pPr>
-            <a:r>
-              <a:t>Aditi Prasad</a:t>
-            </a:r>
-          </a:p>
-          <a:p>
-            <a:pPr>
-              <a:spcAft>
-                <a:spcPts val="1000"/>
-              </a:spcAft>
-              <a:defRPr sz="2000">
-                <a:solidFill>
-                  <a:srgbClr val="0F172A"/>
-                </a:solidFill>
-              </a:defRPr>
-            </a:pPr>
-            <a:r>
-              <a:t>Mayank Prasad</a:t>
-            </a:r>
-          </a:p>
-          <a:p>
-            <a:pPr>
-              <a:spcAft>
-                <a:spcPts val="1000"/>
-              </a:spcAft>
-              <a:defRPr sz="2000">
-                <a:solidFill>
-                  <a:srgbClr val="0F172A"/>
-                </a:solidFill>
-              </a:defRPr>
-            </a:pPr>
-            <a:r>
-              <a:t>Deepnarayan Lohra</a:t>
+          <p:cNvPr id="21" name="TextBox 20"/>
+          <p:cNvSpPr txBox="1"/>
+          <p:nvPr/>
+        </p:nvSpPr>
+        <p:spPr>
+          <a:xfrm>
+            <a:off x="10789920" y="530352"/>
+            <a:ext cx="868680" cy="256032"/>
+          </a:xfrm>
+          <a:prstGeom prst="rect">
+            <a:avLst/>
+          </a:prstGeom>
+          <a:noFill/>
+        </p:spPr>
+        <p:txBody>
+          <a:bodyPr wrap="square">
+            <a:normAutofit/>
+          </a:bodyPr>
+          <a:lstStyle/>
+          <a:p>
+            <a:pPr algn="ctr"/>
+            <a:r>
+              <a:rPr sz="1100" b="1" i="0">
+                <a:solidFill>
+                  <a:srgbClr val="FFFFFF"/>
+                </a:solidFill>
+                <a:latin typeface="Aptos"/>
+              </a:rPr>
+              <a:t>08</a:t>
             </a:r>
           </a:p>
         </p:txBody>
